--- a/docs/sales/EduNexus_Sales_Pitch.pptx
+++ b/docs/sales/EduNexus_Sales_Pitch.pptx
@@ -20,9 +20,15 @@
     <p:sldId id="268" r:id="rId14"/>
     <p:sldId id="269" r:id="rId15"/>
     <p:sldId id="270" r:id="rId16"/>
+    <p:sldId id="271" r:id="rId17"/>
+    <p:sldId id="272" r:id="rId18"/>
+    <p:sldId id="273" r:id="rId19"/>
+    <p:sldId id="274" r:id="rId20"/>
+    <p:sldId id="275" r:id="rId21"/>
+    <p:sldId id="276" r:id="rId22"/>
   </p:sldIdLst>
   <p:notesMasterIdLst>
-    <p:notesMasterId r:id="rId17"/>
+    <p:notesMasterId r:id="rId23"/>
   </p:notesMasterIdLst>
   <p:sldSz cx="9144000" cy="5143500"/>
   <p:notesSz cx="5143500" cy="9144000"/>
@@ -1086,6 +1092,358 @@
 </p:notes>
 </file>
 
+<file path=ppt/notesSlides/notesSlide16.xml><?xml version="1.0" encoding="utf-8"?>
+<p:notes xmlns:a="http://schemas.openxmlformats.org/drawingml/2006/main" xmlns:r="http://schemas.openxmlformats.org/officeDocument/2006/relationships" xmlns:p="http://schemas.openxmlformats.org/presentationml/2006/main">
+  <p:cSld>
+    <p:spTree>
+      <p:nvGrpSpPr>
+        <p:cNvPr id="1" name=""/>
+        <p:cNvGrpSpPr/>
+        <p:nvPr/>
+      </p:nvGrpSpPr>
+      <p:grpSpPr>
+        <a:xfrm>
+          <a:off x="0" y="0"/>
+          <a:ext cx="0" cy="0"/>
+          <a:chOff x="0" y="0"/>
+          <a:chExt cx="0" cy="0"/>
+        </a:xfrm>
+      </p:grpSpPr>
+      <p:sp>
+        <p:nvSpPr>
+          <p:cNvPr id="2" name="Slide Image Placeholder 1"/>
+          <p:cNvSpPr>
+            <a:spLocks noGrp="1" noRot="1" noChangeAspect="1"/>
+          </p:cNvSpPr>
+          <p:nvPr>
+            <p:ph type="sldImg"/>
+          </p:nvPr>
+        </p:nvSpPr>
+        <p:spPr/>
+      </p:sp>
+      <p:sp>
+        <p:nvSpPr>
+          <p:cNvPr id="3" name="Notes Placeholder 2"/>
+          <p:cNvSpPr>
+            <a:spLocks noGrp="1"/>
+          </p:cNvSpPr>
+          <p:nvPr>
+            <p:ph type="body" idx="1"/>
+          </p:nvPr>
+        </p:nvSpPr>
+        <p:spPr/>
+        <p:txBody>
+          <a:bodyPr/>
+          <a:lstStyle/>
+          <a:p>
+            <a:r>
+              <a:rPr lang="en-US" dirty="0"/>
+              <a:t/>
+            </a:r>
+            <a:endParaRPr lang="en-US" dirty="0"/>
+          </a:p>
+        </p:txBody>
+      </p:sp>
+      <p:sp>
+        <p:nvSpPr>
+          <p:cNvPr id="4" name="Slide Number Placeholder 3"/>
+          <p:cNvSpPr>
+            <a:spLocks noGrp="1"/>
+          </p:cNvSpPr>
+          <p:nvPr>
+            <p:ph type="sldNum" sz="quarter" idx="10"/>
+          </p:nvPr>
+        </p:nvSpPr>
+        <p:spPr/>
+        <p:txBody>
+          <a:bodyPr/>
+          <a:lstStyle/>
+          <a:p>
+            <a:fld id="{F7021451-1387-4CA6-816F-3879F97B5CBC}" type="slidenum">
+              <a:rPr lang="en-US"/>
+              <a:t>16</a:t>
+            </a:fld>
+            <a:endParaRPr lang="en-US"/>
+          </a:p>
+        </p:txBody>
+      </p:sp>
+    </p:spTree>
+    <p:extLst>
+      <p:ext uri="{BB962C8B-B14F-4D97-AF65-F5344CB8AC3E}">
+        <p14:creationId xmlns:p14="http://schemas.microsoft.com/office/powerpoint/2010/main" val="1024086991"/>
+      </p:ext>
+    </p:extLst>
+  </p:cSld>
+  <p:clrMapOvr>
+    <a:masterClrMapping/>
+  </p:clrMapOvr>
+</p:notes>
+</file>
+
+<file path=ppt/notesSlides/notesSlide17.xml><?xml version="1.0" encoding="utf-8"?>
+<p:notes xmlns:a="http://schemas.openxmlformats.org/drawingml/2006/main" xmlns:r="http://schemas.openxmlformats.org/officeDocument/2006/relationships" xmlns:p="http://schemas.openxmlformats.org/presentationml/2006/main">
+  <p:cSld>
+    <p:spTree>
+      <p:nvGrpSpPr>
+        <p:cNvPr id="1" name=""/>
+        <p:cNvGrpSpPr/>
+        <p:nvPr/>
+      </p:nvGrpSpPr>
+      <p:grpSpPr>
+        <a:xfrm>
+          <a:off x="0" y="0"/>
+          <a:ext cx="0" cy="0"/>
+          <a:chOff x="0" y="0"/>
+          <a:chExt cx="0" cy="0"/>
+        </a:xfrm>
+      </p:grpSpPr>
+      <p:sp>
+        <p:nvSpPr>
+          <p:cNvPr id="2" name="Slide Image Placeholder 1"/>
+          <p:cNvSpPr>
+            <a:spLocks noGrp="1" noRot="1" noChangeAspect="1"/>
+          </p:cNvSpPr>
+          <p:nvPr>
+            <p:ph type="sldImg"/>
+          </p:nvPr>
+        </p:nvSpPr>
+        <p:spPr/>
+      </p:sp>
+      <p:sp>
+        <p:nvSpPr>
+          <p:cNvPr id="3" name="Notes Placeholder 2"/>
+          <p:cNvSpPr>
+            <a:spLocks noGrp="1"/>
+          </p:cNvSpPr>
+          <p:nvPr>
+            <p:ph type="body" idx="1"/>
+          </p:nvPr>
+        </p:nvSpPr>
+        <p:spPr/>
+        <p:txBody>
+          <a:bodyPr/>
+          <a:lstStyle/>
+          <a:p>
+            <a:r>
+              <a:rPr lang="en-US" dirty="0"/>
+              <a:t/>
+            </a:r>
+            <a:endParaRPr lang="en-US" dirty="0"/>
+          </a:p>
+        </p:txBody>
+      </p:sp>
+      <p:sp>
+        <p:nvSpPr>
+          <p:cNvPr id="4" name="Slide Number Placeholder 3"/>
+          <p:cNvSpPr>
+            <a:spLocks noGrp="1"/>
+          </p:cNvSpPr>
+          <p:nvPr>
+            <p:ph type="sldNum" sz="quarter" idx="10"/>
+          </p:nvPr>
+        </p:nvSpPr>
+        <p:spPr/>
+        <p:txBody>
+          <a:bodyPr/>
+          <a:lstStyle/>
+          <a:p>
+            <a:fld id="{F7021451-1387-4CA6-816F-3879F97B5CBC}" type="slidenum">
+              <a:rPr lang="en-US"/>
+              <a:t>17</a:t>
+            </a:fld>
+            <a:endParaRPr lang="en-US"/>
+          </a:p>
+        </p:txBody>
+      </p:sp>
+    </p:spTree>
+    <p:extLst>
+      <p:ext uri="{BB962C8B-B14F-4D97-AF65-F5344CB8AC3E}">
+        <p14:creationId xmlns:p14="http://schemas.microsoft.com/office/powerpoint/2010/main" val="1024086991"/>
+      </p:ext>
+    </p:extLst>
+  </p:cSld>
+  <p:clrMapOvr>
+    <a:masterClrMapping/>
+  </p:clrMapOvr>
+</p:notes>
+</file>
+
+<file path=ppt/notesSlides/notesSlide18.xml><?xml version="1.0" encoding="utf-8"?>
+<p:notes xmlns:a="http://schemas.openxmlformats.org/drawingml/2006/main" xmlns:r="http://schemas.openxmlformats.org/officeDocument/2006/relationships" xmlns:p="http://schemas.openxmlformats.org/presentationml/2006/main">
+  <p:cSld>
+    <p:spTree>
+      <p:nvGrpSpPr>
+        <p:cNvPr id="1" name=""/>
+        <p:cNvGrpSpPr/>
+        <p:nvPr/>
+      </p:nvGrpSpPr>
+      <p:grpSpPr>
+        <a:xfrm>
+          <a:off x="0" y="0"/>
+          <a:ext cx="0" cy="0"/>
+          <a:chOff x="0" y="0"/>
+          <a:chExt cx="0" cy="0"/>
+        </a:xfrm>
+      </p:grpSpPr>
+      <p:sp>
+        <p:nvSpPr>
+          <p:cNvPr id="2" name="Slide Image Placeholder 1"/>
+          <p:cNvSpPr>
+            <a:spLocks noGrp="1" noRot="1" noChangeAspect="1"/>
+          </p:cNvSpPr>
+          <p:nvPr>
+            <p:ph type="sldImg"/>
+          </p:nvPr>
+        </p:nvSpPr>
+        <p:spPr/>
+      </p:sp>
+      <p:sp>
+        <p:nvSpPr>
+          <p:cNvPr id="3" name="Notes Placeholder 2"/>
+          <p:cNvSpPr>
+            <a:spLocks noGrp="1"/>
+          </p:cNvSpPr>
+          <p:nvPr>
+            <p:ph type="body" idx="1"/>
+          </p:nvPr>
+        </p:nvSpPr>
+        <p:spPr/>
+        <p:txBody>
+          <a:bodyPr/>
+          <a:lstStyle/>
+          <a:p>
+            <a:r>
+              <a:rPr lang="en-US" dirty="0"/>
+              <a:t/>
+            </a:r>
+            <a:endParaRPr lang="en-US" dirty="0"/>
+          </a:p>
+        </p:txBody>
+      </p:sp>
+      <p:sp>
+        <p:nvSpPr>
+          <p:cNvPr id="4" name="Slide Number Placeholder 3"/>
+          <p:cNvSpPr>
+            <a:spLocks noGrp="1"/>
+          </p:cNvSpPr>
+          <p:nvPr>
+            <p:ph type="sldNum" sz="quarter" idx="10"/>
+          </p:nvPr>
+        </p:nvSpPr>
+        <p:spPr/>
+        <p:txBody>
+          <a:bodyPr/>
+          <a:lstStyle/>
+          <a:p>
+            <a:fld id="{F7021451-1387-4CA6-816F-3879F97B5CBC}" type="slidenum">
+              <a:rPr lang="en-US"/>
+              <a:t>18</a:t>
+            </a:fld>
+            <a:endParaRPr lang="en-US"/>
+          </a:p>
+        </p:txBody>
+      </p:sp>
+    </p:spTree>
+    <p:extLst>
+      <p:ext uri="{BB962C8B-B14F-4D97-AF65-F5344CB8AC3E}">
+        <p14:creationId xmlns:p14="http://schemas.microsoft.com/office/powerpoint/2010/main" val="1024086991"/>
+      </p:ext>
+    </p:extLst>
+  </p:cSld>
+  <p:clrMapOvr>
+    <a:masterClrMapping/>
+  </p:clrMapOvr>
+</p:notes>
+</file>
+
+<file path=ppt/notesSlides/notesSlide19.xml><?xml version="1.0" encoding="utf-8"?>
+<p:notes xmlns:a="http://schemas.openxmlformats.org/drawingml/2006/main" xmlns:r="http://schemas.openxmlformats.org/officeDocument/2006/relationships" xmlns:p="http://schemas.openxmlformats.org/presentationml/2006/main">
+  <p:cSld>
+    <p:spTree>
+      <p:nvGrpSpPr>
+        <p:cNvPr id="1" name=""/>
+        <p:cNvGrpSpPr/>
+        <p:nvPr/>
+      </p:nvGrpSpPr>
+      <p:grpSpPr>
+        <a:xfrm>
+          <a:off x="0" y="0"/>
+          <a:ext cx="0" cy="0"/>
+          <a:chOff x="0" y="0"/>
+          <a:chExt cx="0" cy="0"/>
+        </a:xfrm>
+      </p:grpSpPr>
+      <p:sp>
+        <p:nvSpPr>
+          <p:cNvPr id="2" name="Slide Image Placeholder 1"/>
+          <p:cNvSpPr>
+            <a:spLocks noGrp="1" noRot="1" noChangeAspect="1"/>
+          </p:cNvSpPr>
+          <p:nvPr>
+            <p:ph type="sldImg"/>
+          </p:nvPr>
+        </p:nvSpPr>
+        <p:spPr/>
+      </p:sp>
+      <p:sp>
+        <p:nvSpPr>
+          <p:cNvPr id="3" name="Notes Placeholder 2"/>
+          <p:cNvSpPr>
+            <a:spLocks noGrp="1"/>
+          </p:cNvSpPr>
+          <p:nvPr>
+            <p:ph type="body" idx="1"/>
+          </p:nvPr>
+        </p:nvSpPr>
+        <p:spPr/>
+        <p:txBody>
+          <a:bodyPr/>
+          <a:lstStyle/>
+          <a:p>
+            <a:r>
+              <a:rPr lang="en-US" dirty="0"/>
+              <a:t/>
+            </a:r>
+            <a:endParaRPr lang="en-US" dirty="0"/>
+          </a:p>
+        </p:txBody>
+      </p:sp>
+      <p:sp>
+        <p:nvSpPr>
+          <p:cNvPr id="4" name="Slide Number Placeholder 3"/>
+          <p:cNvSpPr>
+            <a:spLocks noGrp="1"/>
+          </p:cNvSpPr>
+          <p:nvPr>
+            <p:ph type="sldNum" sz="quarter" idx="10"/>
+          </p:nvPr>
+        </p:nvSpPr>
+        <p:spPr/>
+        <p:txBody>
+          <a:bodyPr/>
+          <a:lstStyle/>
+          <a:p>
+            <a:fld id="{F7021451-1387-4CA6-816F-3879F97B5CBC}" type="slidenum">
+              <a:rPr lang="en-US"/>
+              <a:t>19</a:t>
+            </a:fld>
+            <a:endParaRPr lang="en-US"/>
+          </a:p>
+        </p:txBody>
+      </p:sp>
+    </p:spTree>
+    <p:extLst>
+      <p:ext uri="{BB962C8B-B14F-4D97-AF65-F5344CB8AC3E}">
+        <p14:creationId xmlns:p14="http://schemas.microsoft.com/office/powerpoint/2010/main" val="1024086991"/>
+      </p:ext>
+    </p:extLst>
+  </p:cSld>
+  <p:clrMapOvr>
+    <a:masterClrMapping/>
+  </p:clrMapOvr>
+</p:notes>
+</file>
+
 <file path=ppt/notesSlides/notesSlide2.xml><?xml version="1.0" encoding="utf-8"?>
 <p:notes xmlns:a="http://schemas.openxmlformats.org/drawingml/2006/main" xmlns:r="http://schemas.openxmlformats.org/officeDocument/2006/relationships" xmlns:p="http://schemas.openxmlformats.org/presentationml/2006/main">
   <p:cSld>
@@ -1156,6 +1514,182 @@
             <a:fld id="{F7021451-1387-4CA6-816F-3879F97B5CBC}" type="slidenum">
               <a:rPr lang="en-US"/>
               <a:t>2</a:t>
+            </a:fld>
+            <a:endParaRPr lang="en-US"/>
+          </a:p>
+        </p:txBody>
+      </p:sp>
+    </p:spTree>
+    <p:extLst>
+      <p:ext uri="{BB962C8B-B14F-4D97-AF65-F5344CB8AC3E}">
+        <p14:creationId xmlns:p14="http://schemas.microsoft.com/office/powerpoint/2010/main" val="1024086991"/>
+      </p:ext>
+    </p:extLst>
+  </p:cSld>
+  <p:clrMapOvr>
+    <a:masterClrMapping/>
+  </p:clrMapOvr>
+</p:notes>
+</file>
+
+<file path=ppt/notesSlides/notesSlide20.xml><?xml version="1.0" encoding="utf-8"?>
+<p:notes xmlns:a="http://schemas.openxmlformats.org/drawingml/2006/main" xmlns:r="http://schemas.openxmlformats.org/officeDocument/2006/relationships" xmlns:p="http://schemas.openxmlformats.org/presentationml/2006/main">
+  <p:cSld>
+    <p:spTree>
+      <p:nvGrpSpPr>
+        <p:cNvPr id="1" name=""/>
+        <p:cNvGrpSpPr/>
+        <p:nvPr/>
+      </p:nvGrpSpPr>
+      <p:grpSpPr>
+        <a:xfrm>
+          <a:off x="0" y="0"/>
+          <a:ext cx="0" cy="0"/>
+          <a:chOff x="0" y="0"/>
+          <a:chExt cx="0" cy="0"/>
+        </a:xfrm>
+      </p:grpSpPr>
+      <p:sp>
+        <p:nvSpPr>
+          <p:cNvPr id="2" name="Slide Image Placeholder 1"/>
+          <p:cNvSpPr>
+            <a:spLocks noGrp="1" noRot="1" noChangeAspect="1"/>
+          </p:cNvSpPr>
+          <p:nvPr>
+            <p:ph type="sldImg"/>
+          </p:nvPr>
+        </p:nvSpPr>
+        <p:spPr/>
+      </p:sp>
+      <p:sp>
+        <p:nvSpPr>
+          <p:cNvPr id="3" name="Notes Placeholder 2"/>
+          <p:cNvSpPr>
+            <a:spLocks noGrp="1"/>
+          </p:cNvSpPr>
+          <p:nvPr>
+            <p:ph type="body" idx="1"/>
+          </p:nvPr>
+        </p:nvSpPr>
+        <p:spPr/>
+        <p:txBody>
+          <a:bodyPr/>
+          <a:lstStyle/>
+          <a:p>
+            <a:r>
+              <a:rPr lang="en-US" dirty="0"/>
+              <a:t/>
+            </a:r>
+            <a:endParaRPr lang="en-US" dirty="0"/>
+          </a:p>
+        </p:txBody>
+      </p:sp>
+      <p:sp>
+        <p:nvSpPr>
+          <p:cNvPr id="4" name="Slide Number Placeholder 3"/>
+          <p:cNvSpPr>
+            <a:spLocks noGrp="1"/>
+          </p:cNvSpPr>
+          <p:nvPr>
+            <p:ph type="sldNum" sz="quarter" idx="10"/>
+          </p:nvPr>
+        </p:nvSpPr>
+        <p:spPr/>
+        <p:txBody>
+          <a:bodyPr/>
+          <a:lstStyle/>
+          <a:p>
+            <a:fld id="{F7021451-1387-4CA6-816F-3879F97B5CBC}" type="slidenum">
+              <a:rPr lang="en-US"/>
+              <a:t>20</a:t>
+            </a:fld>
+            <a:endParaRPr lang="en-US"/>
+          </a:p>
+        </p:txBody>
+      </p:sp>
+    </p:spTree>
+    <p:extLst>
+      <p:ext uri="{BB962C8B-B14F-4D97-AF65-F5344CB8AC3E}">
+        <p14:creationId xmlns:p14="http://schemas.microsoft.com/office/powerpoint/2010/main" val="1024086991"/>
+      </p:ext>
+    </p:extLst>
+  </p:cSld>
+  <p:clrMapOvr>
+    <a:masterClrMapping/>
+  </p:clrMapOvr>
+</p:notes>
+</file>
+
+<file path=ppt/notesSlides/notesSlide21.xml><?xml version="1.0" encoding="utf-8"?>
+<p:notes xmlns:a="http://schemas.openxmlformats.org/drawingml/2006/main" xmlns:r="http://schemas.openxmlformats.org/officeDocument/2006/relationships" xmlns:p="http://schemas.openxmlformats.org/presentationml/2006/main">
+  <p:cSld>
+    <p:spTree>
+      <p:nvGrpSpPr>
+        <p:cNvPr id="1" name=""/>
+        <p:cNvGrpSpPr/>
+        <p:nvPr/>
+      </p:nvGrpSpPr>
+      <p:grpSpPr>
+        <a:xfrm>
+          <a:off x="0" y="0"/>
+          <a:ext cx="0" cy="0"/>
+          <a:chOff x="0" y="0"/>
+          <a:chExt cx="0" cy="0"/>
+        </a:xfrm>
+      </p:grpSpPr>
+      <p:sp>
+        <p:nvSpPr>
+          <p:cNvPr id="2" name="Slide Image Placeholder 1"/>
+          <p:cNvSpPr>
+            <a:spLocks noGrp="1" noRot="1" noChangeAspect="1"/>
+          </p:cNvSpPr>
+          <p:nvPr>
+            <p:ph type="sldImg"/>
+          </p:nvPr>
+        </p:nvSpPr>
+        <p:spPr/>
+      </p:sp>
+      <p:sp>
+        <p:nvSpPr>
+          <p:cNvPr id="3" name="Notes Placeholder 2"/>
+          <p:cNvSpPr>
+            <a:spLocks noGrp="1"/>
+          </p:cNvSpPr>
+          <p:nvPr>
+            <p:ph type="body" idx="1"/>
+          </p:nvPr>
+        </p:nvSpPr>
+        <p:spPr/>
+        <p:txBody>
+          <a:bodyPr/>
+          <a:lstStyle/>
+          <a:p>
+            <a:r>
+              <a:rPr lang="en-US" dirty="0"/>
+              <a:t/>
+            </a:r>
+            <a:endParaRPr lang="en-US" dirty="0"/>
+          </a:p>
+        </p:txBody>
+      </p:sp>
+      <p:sp>
+        <p:nvSpPr>
+          <p:cNvPr id="4" name="Slide Number Placeholder 3"/>
+          <p:cNvSpPr>
+            <a:spLocks noGrp="1"/>
+          </p:cNvSpPr>
+          <p:nvPr>
+            <p:ph type="sldNum" sz="quarter" idx="10"/>
+          </p:nvPr>
+        </p:nvSpPr>
+        <p:spPr/>
+        <p:txBody>
+          <a:bodyPr/>
+          <a:lstStyle/>
+          <a:p>
+            <a:fld id="{F7021451-1387-4CA6-816F-3879F97B5CBC}" type="slidenum">
+              <a:rPr lang="en-US"/>
+              <a:t>21</a:t>
             </a:fld>
             <a:endParaRPr lang="en-US"/>
           </a:p>
@@ -2529,6 +3063,4441 @@
         <p:spPr>
           <a:xfrm>
             <a:off x="0" y="0"/>
+            <a:ext cx="9144000" cy="731520"/>
+          </a:xfrm>
+          <a:prstGeom prst="rect">
+            <a:avLst/>
+          </a:prstGeom>
+          <a:solidFill>
+            <a:srgbClr val="1E40AF"/>
+          </a:solidFill>
+          <a:ln/>
+        </p:spPr>
+      </p:sp>
+      <p:sp>
+        <p:nvSpPr>
+          <p:cNvPr id="3" name="Text 1"/>
+          <p:cNvSpPr/>
+          <p:nvPr/>
+        </p:nvSpPr>
+        <p:spPr>
+          <a:xfrm>
+            <a:off x="457200" y="182880"/>
+            <a:ext cx="5486400" cy="365760"/>
+          </a:xfrm>
+          <a:prstGeom prst="rect">
+            <a:avLst/>
+          </a:prstGeom>
+          <a:noFill/>
+          <a:ln/>
+        </p:spPr>
+        <p:txBody>
+          <a:bodyPr wrap="square" rtlCol="0" anchor="ctr"/>
+          <a:lstStyle/>
+          <a:p>
+            <a:pPr indent="0" marL="0">
+              <a:buNone/>
+            </a:pPr>
+            <a:r>
+              <a:rPr lang="en-US" sz="2400" b="1" dirty="0">
+                <a:solidFill>
+                  <a:srgbClr val="FFFFFF"/>
+                </a:solidFill>
+                <a:latin typeface="Arial" pitchFamily="34" charset="0"/>
+                <a:ea typeface="Arial" pitchFamily="34" charset="-122"/>
+                <a:cs typeface="Arial" pitchFamily="34" charset="-120"/>
+              </a:rPr>
+              <a:t>Admin Staff Dashboard</a:t>
+            </a:r>
+            <a:endParaRPr lang="en-US" sz="2400" dirty="0"/>
+          </a:p>
+        </p:txBody>
+      </p:sp>
+      <p:sp>
+        <p:nvSpPr>
+          <p:cNvPr id="4" name="Text 2"/>
+          <p:cNvSpPr/>
+          <p:nvPr/>
+        </p:nvSpPr>
+        <p:spPr>
+          <a:xfrm>
+            <a:off x="5029200" y="182880"/>
+            <a:ext cx="3657600" cy="365760"/>
+          </a:xfrm>
+          <a:prstGeom prst="rect">
+            <a:avLst/>
+          </a:prstGeom>
+          <a:noFill/>
+          <a:ln/>
+        </p:spPr>
+        <p:txBody>
+          <a:bodyPr wrap="square" rtlCol="0" anchor="ctr"/>
+          <a:lstStyle/>
+          <a:p>
+            <a:pPr algn="r" indent="0" marL="0">
+              <a:buNone/>
+            </a:pPr>
+            <a:r>
+              <a:rPr lang="en-US" sz="1200" dirty="0">
+                <a:solidFill>
+                  <a:srgbClr val="0D9488"/>
+                </a:solidFill>
+                <a:latin typeface="Arial" pitchFamily="34" charset="0"/>
+                <a:ea typeface="Arial" pitchFamily="34" charset="-122"/>
+                <a:cs typeface="Arial" pitchFamily="34" charset="-120"/>
+              </a:rPr>
+              <a:t>Streamlined operations &amp; automation</a:t>
+            </a:r>
+            <a:endParaRPr lang="en-US" sz="1200" dirty="0"/>
+          </a:p>
+        </p:txBody>
+      </p:sp>
+      <p:pic>
+        <p:nvPicPr>
+          <p:cNvPr id="5" name="Image 0" descr="/Users/sriramvenkatg/edunexus/e2e-tests/screenshots/admin_nexus-ec_dashboard.png">    </p:cNvPr>
+          <p:cNvPicPr>
+            <a:picLocks noChangeAspect="1"/>
+          </p:cNvPicPr>
+          <p:nvPr/>
+        </p:nvPicPr>
+        <p:blipFill>
+          <a:blip r:embed="rId1"/>
+          <a:stretch>
+            <a:fillRect/>
+          </a:stretch>
+        </p:blipFill>
+        <p:spPr>
+          <a:xfrm>
+            <a:off x="274320" y="822960"/>
+            <a:ext cx="8595360" cy="3840480"/>
+          </a:xfrm>
+          <a:prstGeom prst="rect">
+            <a:avLst/>
+          </a:prstGeom>
+        </p:spPr>
+      </p:pic>
+      <p:sp>
+        <p:nvSpPr>
+          <p:cNvPr id="6" name="Text 3"/>
+          <p:cNvSpPr/>
+          <p:nvPr/>
+        </p:nvSpPr>
+        <p:spPr>
+          <a:xfrm>
+            <a:off x="274320" y="4709160"/>
+            <a:ext cx="8595360" cy="274320"/>
+          </a:xfrm>
+          <a:prstGeom prst="rect">
+            <a:avLst/>
+          </a:prstGeom>
+          <a:noFill/>
+          <a:ln/>
+        </p:spPr>
+        <p:txBody>
+          <a:bodyPr wrap="square" rtlCol="0" anchor="ctr"/>
+          <a:lstStyle/>
+          <a:p>
+            <a:pPr algn="ctr" indent="0" marL="0">
+              <a:buNone/>
+            </a:pPr>
+            <a:r>
+              <a:rPr lang="en-US" sz="1100" dirty="0">
+                <a:solidFill>
+                  <a:srgbClr val="1F2937"/>
+                </a:solidFill>
+                <a:latin typeface="Arial" pitchFamily="34" charset="0"/>
+                <a:ea typeface="Arial" pitchFamily="34" charset="-122"/>
+                <a:cs typeface="Arial" pitchFamily="34" charset="-120"/>
+              </a:rPr>
+              <a:t>Admissions • Fee Collection • Documents • Library • Transport - 120+ hours saved monthly</a:t>
+            </a:r>
+            <a:endParaRPr lang="en-US" sz="1100" dirty="0"/>
+          </a:p>
+        </p:txBody>
+      </p:sp>
+    </p:spTree>
+  </p:cSld>
+  <p:clrMapOvr>
+    <a:masterClrMapping/>
+  </p:clrMapOvr>
+</p:sld>
+</file>
+
+<file path=ppt/slides/slide11.xml><?xml version="1.0" encoding="utf-8"?>
+<p:sld xmlns:a="http://schemas.openxmlformats.org/drawingml/2006/main" xmlns:r="http://schemas.openxmlformats.org/officeDocument/2006/relationships" xmlns:p="http://schemas.openxmlformats.org/presentationml/2006/main">
+  <p:cSld name="Slide 11">
+    <p:spTree>
+      <p:nvGrpSpPr>
+        <p:cNvPr id="1" name=""/>
+        <p:cNvGrpSpPr/>
+        <p:nvPr/>
+      </p:nvGrpSpPr>
+      <p:grpSpPr>
+        <a:xfrm>
+          <a:off x="0" y="0"/>
+          <a:ext cx="0" cy="0"/>
+          <a:chOff x="0" y="0"/>
+          <a:chExt cx="0" cy="0"/>
+        </a:xfrm>
+      </p:grpSpPr>
+      <p:sp>
+        <p:nvSpPr>
+          <p:cNvPr id="2" name="Shape 0"/>
+          <p:cNvSpPr/>
+          <p:nvPr/>
+        </p:nvSpPr>
+        <p:spPr>
+          <a:xfrm>
+            <a:off x="0" y="0"/>
+            <a:ext cx="9144000" cy="731520"/>
+          </a:xfrm>
+          <a:prstGeom prst="rect">
+            <a:avLst/>
+          </a:prstGeom>
+          <a:solidFill>
+            <a:srgbClr val="1E40AF"/>
+          </a:solidFill>
+          <a:ln/>
+        </p:spPr>
+      </p:sp>
+      <p:sp>
+        <p:nvSpPr>
+          <p:cNvPr id="3" name="Text 1"/>
+          <p:cNvSpPr/>
+          <p:nvPr/>
+        </p:nvSpPr>
+        <p:spPr>
+          <a:xfrm>
+            <a:off x="457200" y="182880"/>
+            <a:ext cx="5486400" cy="365760"/>
+          </a:xfrm>
+          <a:prstGeom prst="rect">
+            <a:avLst/>
+          </a:prstGeom>
+          <a:noFill/>
+          <a:ln/>
+        </p:spPr>
+        <p:txBody>
+          <a:bodyPr wrap="square" rtlCol="0" anchor="ctr"/>
+          <a:lstStyle/>
+          <a:p>
+            <a:pPr indent="0" marL="0">
+              <a:buNone/>
+            </a:pPr>
+            <a:r>
+              <a:rPr lang="en-US" sz="2400" b="1" dirty="0">
+                <a:solidFill>
+                  <a:srgbClr val="FFFFFF"/>
+                </a:solidFill>
+                <a:latin typeface="Arial" pitchFamily="34" charset="0"/>
+                <a:ea typeface="Arial" pitchFamily="34" charset="-122"/>
+                <a:cs typeface="Arial" pitchFamily="34" charset="-120"/>
+              </a:rPr>
+              <a:t>Teacher Dashboard</a:t>
+            </a:r>
+            <a:endParaRPr lang="en-US" sz="2400" dirty="0"/>
+          </a:p>
+        </p:txBody>
+      </p:sp>
+      <p:sp>
+        <p:nvSpPr>
+          <p:cNvPr id="4" name="Text 2"/>
+          <p:cNvSpPr/>
+          <p:nvPr/>
+        </p:nvSpPr>
+        <p:spPr>
+          <a:xfrm>
+            <a:off x="5029200" y="182880"/>
+            <a:ext cx="3657600" cy="365760"/>
+          </a:xfrm>
+          <a:prstGeom prst="rect">
+            <a:avLst/>
+          </a:prstGeom>
+          <a:noFill/>
+          <a:ln/>
+        </p:spPr>
+        <p:txBody>
+          <a:bodyPr wrap="square" rtlCol="0" anchor="ctr"/>
+          <a:lstStyle/>
+          <a:p>
+            <a:pPr algn="r" indent="0" marL="0">
+              <a:buNone/>
+            </a:pPr>
+            <a:r>
+              <a:rPr lang="en-US" sz="1200" dirty="0">
+                <a:solidFill>
+                  <a:srgbClr val="0D9488"/>
+                </a:solidFill>
+                <a:latin typeface="Arial" pitchFamily="34" charset="0"/>
+                <a:ea typeface="Arial" pitchFamily="34" charset="-122"/>
+                <a:cs typeface="Arial" pitchFamily="34" charset="-120"/>
+              </a:rPr>
+              <a:t>Focus on teaching, not paperwork</a:t>
+            </a:r>
+            <a:endParaRPr lang="en-US" sz="1200" dirty="0"/>
+          </a:p>
+        </p:txBody>
+      </p:sp>
+      <p:pic>
+        <p:nvPicPr>
+          <p:cNvPr id="5" name="Image 0" descr="/Users/sriramvenkatg/edunexus/e2e-tests/screenshots/teacher_nexus-ec_dashboard.png">    </p:cNvPr>
+          <p:cNvPicPr>
+            <a:picLocks noChangeAspect="1"/>
+          </p:cNvPicPr>
+          <p:nvPr/>
+        </p:nvPicPr>
+        <p:blipFill>
+          <a:blip r:embed="rId1"/>
+          <a:stretch>
+            <a:fillRect/>
+          </a:stretch>
+        </p:blipFill>
+        <p:spPr>
+          <a:xfrm>
+            <a:off x="274320" y="822960"/>
+            <a:ext cx="8595360" cy="3840480"/>
+          </a:xfrm>
+          <a:prstGeom prst="rect">
+            <a:avLst/>
+          </a:prstGeom>
+        </p:spPr>
+      </p:pic>
+      <p:sp>
+        <p:nvSpPr>
+          <p:cNvPr id="6" name="Text 3"/>
+          <p:cNvSpPr/>
+          <p:nvPr/>
+        </p:nvSpPr>
+        <p:spPr>
+          <a:xfrm>
+            <a:off x="274320" y="4709160"/>
+            <a:ext cx="8595360" cy="274320"/>
+          </a:xfrm>
+          <a:prstGeom prst="rect">
+            <a:avLst/>
+          </a:prstGeom>
+          <a:noFill/>
+          <a:ln/>
+        </p:spPr>
+        <p:txBody>
+          <a:bodyPr wrap="square" rtlCol="0" anchor="ctr"/>
+          <a:lstStyle/>
+          <a:p>
+            <a:pPr algn="ctr" indent="0" marL="0">
+              <a:buNone/>
+            </a:pPr>
+            <a:r>
+              <a:rPr lang="en-US" sz="1100" dirty="0">
+                <a:solidFill>
+                  <a:srgbClr val="1F2937"/>
+                </a:solidFill>
+                <a:latin typeface="Arial" pitchFamily="34" charset="0"/>
+                <a:ea typeface="Arial" pitchFamily="34" charset="-122"/>
+                <a:cs typeface="Arial" pitchFamily="34" charset="-120"/>
+              </a:rPr>
+              <a:t>Quick Attendance • Gradebook • Assignments • Class Analytics - 10-15 hours saved monthly</a:t>
+            </a:r>
+            <a:endParaRPr lang="en-US" sz="1100" dirty="0"/>
+          </a:p>
+        </p:txBody>
+      </p:sp>
+    </p:spTree>
+  </p:cSld>
+  <p:clrMapOvr>
+    <a:masterClrMapping/>
+  </p:clrMapOvr>
+</p:sld>
+</file>
+
+<file path=ppt/slides/slide12.xml><?xml version="1.0" encoding="utf-8"?>
+<p:sld xmlns:a="http://schemas.openxmlformats.org/drawingml/2006/main" xmlns:r="http://schemas.openxmlformats.org/officeDocument/2006/relationships" xmlns:p="http://schemas.openxmlformats.org/presentationml/2006/main">
+  <p:cSld name="Slide 12">
+    <p:spTree>
+      <p:nvGrpSpPr>
+        <p:cNvPr id="1" name=""/>
+        <p:cNvGrpSpPr/>
+        <p:nvPr/>
+      </p:nvGrpSpPr>
+      <p:grpSpPr>
+        <a:xfrm>
+          <a:off x="0" y="0"/>
+          <a:ext cx="0" cy="0"/>
+          <a:chOff x="0" y="0"/>
+          <a:chExt cx="0" cy="0"/>
+        </a:xfrm>
+      </p:grpSpPr>
+      <p:sp>
+        <p:nvSpPr>
+          <p:cNvPr id="2" name="Shape 0"/>
+          <p:cNvSpPr/>
+          <p:nvPr/>
+        </p:nvSpPr>
+        <p:spPr>
+          <a:xfrm>
+            <a:off x="0" y="0"/>
+            <a:ext cx="9144000" cy="731520"/>
+          </a:xfrm>
+          <a:prstGeom prst="rect">
+            <a:avLst/>
+          </a:prstGeom>
+          <a:solidFill>
+            <a:srgbClr val="1E40AF"/>
+          </a:solidFill>
+          <a:ln/>
+        </p:spPr>
+      </p:sp>
+      <p:sp>
+        <p:nvSpPr>
+          <p:cNvPr id="3" name="Text 1"/>
+          <p:cNvSpPr/>
+          <p:nvPr/>
+        </p:nvSpPr>
+        <p:spPr>
+          <a:xfrm>
+            <a:off x="457200" y="182880"/>
+            <a:ext cx="5486400" cy="365760"/>
+          </a:xfrm>
+          <a:prstGeom prst="rect">
+            <a:avLst/>
+          </a:prstGeom>
+          <a:noFill/>
+          <a:ln/>
+        </p:spPr>
+        <p:txBody>
+          <a:bodyPr wrap="square" rtlCol="0" anchor="ctr"/>
+          <a:lstStyle/>
+          <a:p>
+            <a:pPr indent="0" marL="0">
+              <a:buNone/>
+            </a:pPr>
+            <a:r>
+              <a:rPr lang="en-US" sz="2400" b="1" dirty="0">
+                <a:solidFill>
+                  <a:srgbClr val="FFFFFF"/>
+                </a:solidFill>
+                <a:latin typeface="Arial" pitchFamily="34" charset="0"/>
+                <a:ea typeface="Arial" pitchFamily="34" charset="-122"/>
+                <a:cs typeface="Arial" pitchFamily="34" charset="-120"/>
+              </a:rPr>
+              <a:t>Student Dashboard</a:t>
+            </a:r>
+            <a:endParaRPr lang="en-US" sz="2400" dirty="0"/>
+          </a:p>
+        </p:txBody>
+      </p:sp>
+      <p:sp>
+        <p:nvSpPr>
+          <p:cNvPr id="4" name="Text 2"/>
+          <p:cNvSpPr/>
+          <p:nvPr/>
+        </p:nvSpPr>
+        <p:spPr>
+          <a:xfrm>
+            <a:off x="5029200" y="182880"/>
+            <a:ext cx="3657600" cy="365760"/>
+          </a:xfrm>
+          <a:prstGeom prst="rect">
+            <a:avLst/>
+          </a:prstGeom>
+          <a:noFill/>
+          <a:ln/>
+        </p:spPr>
+        <p:txBody>
+          <a:bodyPr wrap="square" rtlCol="0" anchor="ctr"/>
+          <a:lstStyle/>
+          <a:p>
+            <a:pPr algn="r" indent="0" marL="0">
+              <a:buNone/>
+            </a:pPr>
+            <a:r>
+              <a:rPr lang="en-US" sz="1200" dirty="0">
+                <a:solidFill>
+                  <a:srgbClr val="0D9488"/>
+                </a:solidFill>
+                <a:latin typeface="Arial" pitchFamily="34" charset="0"/>
+                <a:ea typeface="Arial" pitchFamily="34" charset="-122"/>
+                <a:cs typeface="Arial" pitchFamily="34" charset="-120"/>
+              </a:rPr>
+              <a:t>Self-service portal with AI insights</a:t>
+            </a:r>
+            <a:endParaRPr lang="en-US" sz="1200" dirty="0"/>
+          </a:p>
+        </p:txBody>
+      </p:sp>
+      <p:pic>
+        <p:nvPicPr>
+          <p:cNvPr id="5" name="Image 0" descr="/Users/sriramvenkatg/edunexus/e2e-tests/screenshots/student_nexus-ec_dashboard.png">    </p:cNvPr>
+          <p:cNvPicPr>
+            <a:picLocks noChangeAspect="1"/>
+          </p:cNvPicPr>
+          <p:nvPr/>
+        </p:nvPicPr>
+        <p:blipFill>
+          <a:blip r:embed="rId1"/>
+          <a:stretch>
+            <a:fillRect/>
+          </a:stretch>
+        </p:blipFill>
+        <p:spPr>
+          <a:xfrm>
+            <a:off x="274320" y="822960"/>
+            <a:ext cx="8595360" cy="3840480"/>
+          </a:xfrm>
+          <a:prstGeom prst="rect">
+            <a:avLst/>
+          </a:prstGeom>
+        </p:spPr>
+      </p:pic>
+      <p:sp>
+        <p:nvSpPr>
+          <p:cNvPr id="6" name="Text 3"/>
+          <p:cNvSpPr/>
+          <p:nvPr/>
+        </p:nvSpPr>
+        <p:spPr>
+          <a:xfrm>
+            <a:off x="274320" y="4709160"/>
+            <a:ext cx="8595360" cy="274320"/>
+          </a:xfrm>
+          <a:prstGeom prst="rect">
+            <a:avLst/>
+          </a:prstGeom>
+          <a:noFill/>
+          <a:ln/>
+        </p:spPr>
+        <p:txBody>
+          <a:bodyPr wrap="square" rtlCol="0" anchor="ctr"/>
+          <a:lstStyle/>
+          <a:p>
+            <a:pPr algn="ctr" indent="0" marL="0">
+              <a:buNone/>
+            </a:pPr>
+            <a:r>
+              <a:rPr lang="en-US" sz="1100" dirty="0">
+                <a:solidFill>
+                  <a:srgbClr val="1F2937"/>
+                </a:solidFill>
+                <a:latin typeface="Arial" pitchFamily="34" charset="0"/>
+                <a:ea typeface="Arial" pitchFamily="34" charset="-122"/>
+                <a:cs typeface="Arial" pitchFamily="34" charset="-120"/>
+              </a:rPr>
+              <a:t>AI Score Prediction • Career Hub • Placement Prep • 24/7 Chatbot Support</a:t>
+            </a:r>
+            <a:endParaRPr lang="en-US" sz="1100" dirty="0"/>
+          </a:p>
+        </p:txBody>
+      </p:sp>
+    </p:spTree>
+  </p:cSld>
+  <p:clrMapOvr>
+    <a:masterClrMapping/>
+  </p:clrMapOvr>
+</p:sld>
+</file>
+
+<file path=ppt/slides/slide13.xml><?xml version="1.0" encoding="utf-8"?>
+<p:sld xmlns:a="http://schemas.openxmlformats.org/drawingml/2006/main" xmlns:r="http://schemas.openxmlformats.org/officeDocument/2006/relationships" xmlns:p="http://schemas.openxmlformats.org/presentationml/2006/main">
+  <p:cSld name="Slide 13">
+    <p:spTree>
+      <p:nvGrpSpPr>
+        <p:cNvPr id="1" name=""/>
+        <p:cNvGrpSpPr/>
+        <p:nvPr/>
+      </p:nvGrpSpPr>
+      <p:grpSpPr>
+        <a:xfrm>
+          <a:off x="0" y="0"/>
+          <a:ext cx="0" cy="0"/>
+          <a:chOff x="0" y="0"/>
+          <a:chExt cx="0" cy="0"/>
+        </a:xfrm>
+      </p:grpSpPr>
+      <p:sp>
+        <p:nvSpPr>
+          <p:cNvPr id="2" name="Shape 0"/>
+          <p:cNvSpPr/>
+          <p:nvPr/>
+        </p:nvSpPr>
+        <p:spPr>
+          <a:xfrm>
+            <a:off x="0" y="0"/>
+            <a:ext cx="9144000" cy="731520"/>
+          </a:xfrm>
+          <a:prstGeom prst="rect">
+            <a:avLst/>
+          </a:prstGeom>
+          <a:solidFill>
+            <a:srgbClr val="1E40AF"/>
+          </a:solidFill>
+          <a:ln/>
+        </p:spPr>
+      </p:sp>
+      <p:sp>
+        <p:nvSpPr>
+          <p:cNvPr id="3" name="Text 1"/>
+          <p:cNvSpPr/>
+          <p:nvPr/>
+        </p:nvSpPr>
+        <p:spPr>
+          <a:xfrm>
+            <a:off x="457200" y="182880"/>
+            <a:ext cx="5486400" cy="365760"/>
+          </a:xfrm>
+          <a:prstGeom prst="rect">
+            <a:avLst/>
+          </a:prstGeom>
+          <a:noFill/>
+          <a:ln/>
+        </p:spPr>
+        <p:txBody>
+          <a:bodyPr wrap="square" rtlCol="0" anchor="ctr"/>
+          <a:lstStyle/>
+          <a:p>
+            <a:pPr indent="0" marL="0">
+              <a:buNone/>
+            </a:pPr>
+            <a:r>
+              <a:rPr lang="en-US" sz="2400" b="1" dirty="0">
+                <a:solidFill>
+                  <a:srgbClr val="FFFFFF"/>
+                </a:solidFill>
+                <a:latin typeface="Arial" pitchFamily="34" charset="0"/>
+                <a:ea typeface="Arial" pitchFamily="34" charset="-122"/>
+                <a:cs typeface="Arial" pitchFamily="34" charset="-120"/>
+              </a:rPr>
+              <a:t>Parent Dashboard</a:t>
+            </a:r>
+            <a:endParaRPr lang="en-US" sz="2400" dirty="0"/>
+          </a:p>
+        </p:txBody>
+      </p:sp>
+      <p:sp>
+        <p:nvSpPr>
+          <p:cNvPr id="4" name="Text 2"/>
+          <p:cNvSpPr/>
+          <p:nvPr/>
+        </p:nvSpPr>
+        <p:spPr>
+          <a:xfrm>
+            <a:off x="5029200" y="182880"/>
+            <a:ext cx="3657600" cy="365760"/>
+          </a:xfrm>
+          <a:prstGeom prst="rect">
+            <a:avLst/>
+          </a:prstGeom>
+          <a:noFill/>
+          <a:ln/>
+        </p:spPr>
+        <p:txBody>
+          <a:bodyPr wrap="square" rtlCol="0" anchor="ctr"/>
+          <a:lstStyle/>
+          <a:p>
+            <a:pPr algn="r" indent="0" marL="0">
+              <a:buNone/>
+            </a:pPr>
+            <a:r>
+              <a:rPr lang="en-US" sz="1200" dirty="0">
+                <a:solidFill>
+                  <a:srgbClr val="0D9488"/>
+                </a:solidFill>
+                <a:latin typeface="Arial" pitchFamily="34" charset="0"/>
+                <a:ea typeface="Arial" pitchFamily="34" charset="-122"/>
+                <a:cs typeface="Arial" pitchFamily="34" charset="-120"/>
+              </a:rPr>
+              <a:t>Stay connected with child's progress</a:t>
+            </a:r>
+            <a:endParaRPr lang="en-US" sz="1200" dirty="0"/>
+          </a:p>
+        </p:txBody>
+      </p:sp>
+      <p:pic>
+        <p:nvPicPr>
+          <p:cNvPr id="5" name="Image 0" descr="/Users/sriramvenkatg/edunexus/e2e-tests/screenshots/parent_nexus-ec_dashboard.png">    </p:cNvPr>
+          <p:cNvPicPr>
+            <a:picLocks noChangeAspect="1"/>
+          </p:cNvPicPr>
+          <p:nvPr/>
+        </p:nvPicPr>
+        <p:blipFill>
+          <a:blip r:embed="rId1"/>
+          <a:stretch>
+            <a:fillRect/>
+          </a:stretch>
+        </p:blipFill>
+        <p:spPr>
+          <a:xfrm>
+            <a:off x="274320" y="822960"/>
+            <a:ext cx="8595360" cy="3840480"/>
+          </a:xfrm>
+          <a:prstGeom prst="rect">
+            <a:avLst/>
+          </a:prstGeom>
+        </p:spPr>
+      </p:pic>
+      <p:sp>
+        <p:nvSpPr>
+          <p:cNvPr id="6" name="Text 3"/>
+          <p:cNvSpPr/>
+          <p:nvPr/>
+        </p:nvSpPr>
+        <p:spPr>
+          <a:xfrm>
+            <a:off x="274320" y="4709160"/>
+            <a:ext cx="8595360" cy="274320"/>
+          </a:xfrm>
+          <a:prstGeom prst="rect">
+            <a:avLst/>
+          </a:prstGeom>
+          <a:noFill/>
+          <a:ln/>
+        </p:spPr>
+        <p:txBody>
+          <a:bodyPr wrap="square" rtlCol="0" anchor="ctr"/>
+          <a:lstStyle/>
+          <a:p>
+            <a:pPr algn="ctr" indent="0" marL="0">
+              <a:buNone/>
+            </a:pPr>
+            <a:r>
+              <a:rPr lang="en-US" sz="1100" dirty="0">
+                <a:solidFill>
+                  <a:srgbClr val="1F2937"/>
+                </a:solidFill>
+                <a:latin typeface="Arial" pitchFamily="34" charset="0"/>
+                <a:ea typeface="Arial" pitchFamily="34" charset="-122"/>
+                <a:cs typeface="Arial" pitchFamily="34" charset="-120"/>
+              </a:rPr>
+              <a:t>Attendance Tracking • Fee Payments • Academic Progress • Direct Communication</a:t>
+            </a:r>
+            <a:endParaRPr lang="en-US" sz="1100" dirty="0"/>
+          </a:p>
+        </p:txBody>
+      </p:sp>
+    </p:spTree>
+  </p:cSld>
+  <p:clrMapOvr>
+    <a:masterClrMapping/>
+  </p:clrMapOvr>
+</p:sld>
+</file>
+
+<file path=ppt/slides/slide14.xml><?xml version="1.0" encoding="utf-8"?>
+<p:sld xmlns:a="http://schemas.openxmlformats.org/drawingml/2006/main" xmlns:r="http://schemas.openxmlformats.org/officeDocument/2006/relationships" xmlns:p="http://schemas.openxmlformats.org/presentationml/2006/main">
+  <p:cSld name="Slide 14">
+    <p:spTree>
+      <p:nvGrpSpPr>
+        <p:cNvPr id="1" name=""/>
+        <p:cNvGrpSpPr/>
+        <p:nvPr/>
+      </p:nvGrpSpPr>
+      <p:grpSpPr>
+        <a:xfrm>
+          <a:off x="0" y="0"/>
+          <a:ext cx="0" cy="0"/>
+          <a:chOff x="0" y="0"/>
+          <a:chExt cx="0" cy="0"/>
+        </a:xfrm>
+      </p:grpSpPr>
+      <p:sp>
+        <p:nvSpPr>
+          <p:cNvPr id="2" name="Shape 0"/>
+          <p:cNvSpPr/>
+          <p:nvPr/>
+        </p:nvSpPr>
+        <p:spPr>
+          <a:xfrm>
+            <a:off x="0" y="0"/>
+            <a:ext cx="9144000" cy="1097280"/>
+          </a:xfrm>
+          <a:prstGeom prst="rect">
+            <a:avLst/>
+          </a:prstGeom>
+          <a:solidFill>
+            <a:srgbClr val="1E40AF"/>
+          </a:solidFill>
+          <a:ln/>
+        </p:spPr>
+      </p:sp>
+      <p:sp>
+        <p:nvSpPr>
+          <p:cNvPr id="3" name="Text 1"/>
+          <p:cNvSpPr/>
+          <p:nvPr/>
+        </p:nvSpPr>
+        <p:spPr>
+          <a:xfrm>
+            <a:off x="457200" y="320040"/>
+            <a:ext cx="8229600" cy="457200"/>
+          </a:xfrm>
+          <a:prstGeom prst="rect">
+            <a:avLst/>
+          </a:prstGeom>
+          <a:noFill/>
+          <a:ln/>
+        </p:spPr>
+        <p:txBody>
+          <a:bodyPr wrap="square" rtlCol="0" anchor="ctr"/>
+          <a:lstStyle/>
+          <a:p>
+            <a:pPr indent="0" marL="0">
+              <a:buNone/>
+            </a:pPr>
+            <a:r>
+              <a:rPr lang="en-US" sz="3200" b="1" dirty="0">
+                <a:solidFill>
+                  <a:srgbClr val="FFFFFF"/>
+                </a:solidFill>
+                <a:latin typeface="Arial" pitchFamily="34" charset="0"/>
+                <a:ea typeface="Arial" pitchFamily="34" charset="-122"/>
+                <a:cs typeface="Arial" pitchFamily="34" charset="-120"/>
+              </a:rPr>
+              <a:t>Admin Staff: Biggest Impact</a:t>
+            </a:r>
+            <a:endParaRPr lang="en-US" sz="3200" dirty="0"/>
+          </a:p>
+        </p:txBody>
+      </p:sp>
+      <p:sp>
+        <p:nvSpPr>
+          <p:cNvPr id="4" name="Text 2"/>
+          <p:cNvSpPr/>
+          <p:nvPr/>
+        </p:nvSpPr>
+        <p:spPr>
+          <a:xfrm>
+            <a:off x="457200" y="1280160"/>
+            <a:ext cx="8229600" cy="365760"/>
+          </a:xfrm>
+          <a:prstGeom prst="rect">
+            <a:avLst/>
+          </a:prstGeom>
+          <a:noFill/>
+          <a:ln/>
+        </p:spPr>
+        <p:txBody>
+          <a:bodyPr wrap="square" rtlCol="0" anchor="ctr"/>
+          <a:lstStyle/>
+          <a:p>
+            <a:pPr indent="0" marL="0">
+              <a:buNone/>
+            </a:pPr>
+            <a:r>
+              <a:rPr lang="en-US" sz="1800" b="1" dirty="0">
+                <a:solidFill>
+                  <a:srgbClr val="059669"/>
+                </a:solidFill>
+                <a:latin typeface="Arial" pitchFamily="34" charset="0"/>
+                <a:ea typeface="Arial" pitchFamily="34" charset="-122"/>
+                <a:cs typeface="Arial" pitchFamily="34" charset="-120"/>
+              </a:rPr>
+              <a:t>120 hours saved per month!</a:t>
+            </a:r>
+            <a:endParaRPr lang="en-US" sz="1800" dirty="0"/>
+          </a:p>
+        </p:txBody>
+      </p:sp>
+      <p:graphicFrame>
+        <p:nvGraphicFramePr>
+          <p:cNvPr id="15" name="Table 0"/>
+          <p:cNvGraphicFramePr>
+            <a:graphicFrameLocks noGrp="1"/>
+          </p:cNvGraphicFramePr>
+          <p:nvPr>
+            <p:extLst>
+              <p:ext uri="{D42A27DB-BD31-4B8C-83A1-F6EECF244321}">
+                <p14:modId xmlns:p14="http://schemas.microsoft.com/office/powerpoint/2010/main" val="1579011935"/>
+              </p:ext>
+            </p:extLst>
+          </p:nvPr>
+        </p:nvGraphicFramePr>
+        <p:xfrm>
+          <a:off x="457200" y="1737360"/>
+          <a:ext cx="8229600" cy="2560320"/>
+        </p:xfrm>
+        <a:graphic>
+          <a:graphicData uri="http://schemas.openxmlformats.org/drawingml/2006/table">
+            <a:tbl>
+              <a:tblPr/>
+              <a:tblGrid>
+                <a:gridCol w="3200400"/>
+                <a:gridCol w="1645920"/>
+                <a:gridCol w="1645920"/>
+                <a:gridCol w="1737360"/>
+              </a:tblGrid>
+              <a:tr h="365760">
+                <a:tc>
+                  <a:txBody>
+                    <a:bodyPr/>
+                    <a:lstStyle/>
+                    <a:p>
+                      <a:pPr algn="ctr" indent="0" marL="0">
+                        <a:buNone/>
+                      </a:pPr>
+                      <a:r>
+                        <a:rPr lang="en-US" sz="1200" b="1" dirty="0">
+                          <a:solidFill>
+                            <a:srgbClr val="FFFFFF"/>
+                          </a:solidFill>
+                        </a:rPr>
+                        <a:t>Task</a:t>
+                      </a:r>
+                      <a:endParaRPr lang="en-US" sz="1200" dirty="0"/>
+                    </a:p>
+                  </a:txBody>
+                  <a:tcPr marL="91440" marR="91440" marT="45720" marB="45720" anchor="ctr">
+                    <a:lnL w="6350" cap="flat" cmpd="sng" algn="ctr">
+                      <a:solidFill>
+                        <a:srgbClr val="CCCCCC"/>
+                      </a:solidFill>
+                      <a:prstDash val="solid"/>
+                      <a:round/>
+                      <a:headEnd type="none" w="med" len="med"/>
+                      <a:tailEnd type="none" w="med" len="med"/>
+                    </a:lnL>
+                    <a:lnR w="6350" cap="flat" cmpd="sng" algn="ctr">
+                      <a:solidFill>
+                        <a:srgbClr val="CCCCCC"/>
+                      </a:solidFill>
+                      <a:prstDash val="solid"/>
+                      <a:round/>
+                      <a:headEnd type="none" w="med" len="med"/>
+                      <a:tailEnd type="none" w="med" len="med"/>
+                    </a:lnR>
+                    <a:lnT w="6350" cap="flat" cmpd="sng" algn="ctr">
+                      <a:solidFill>
+                        <a:srgbClr val="CCCCCC"/>
+                      </a:solidFill>
+                      <a:prstDash val="solid"/>
+                      <a:round/>
+                      <a:headEnd type="none" w="med" len="med"/>
+                      <a:tailEnd type="none" w="med" len="med"/>
+                    </a:lnT>
+                    <a:lnB w="6350" cap="flat" cmpd="sng" algn="ctr">
+                      <a:solidFill>
+                        <a:srgbClr val="CCCCCC"/>
+                      </a:solidFill>
+                      <a:prstDash val="solid"/>
+                      <a:round/>
+                      <a:headEnd type="none" w="med" len="med"/>
+                      <a:tailEnd type="none" w="med" len="med"/>
+                    </a:lnB>
+                    <a:solidFill>
+                      <a:srgbClr val="059669"/>
+                    </a:solidFill>
+                  </a:tcPr>
+                </a:tc>
+                <a:tc>
+                  <a:txBody>
+                    <a:bodyPr/>
+                    <a:lstStyle/>
+                    <a:p>
+                      <a:pPr algn="ctr" indent="0" marL="0">
+                        <a:buNone/>
+                      </a:pPr>
+                      <a:r>
+                        <a:rPr lang="en-US" sz="1200" b="1" dirty="0">
+                          <a:solidFill>
+                            <a:srgbClr val="FFFFFF"/>
+                          </a:solidFill>
+                        </a:rPr>
+                        <a:t>Before</a:t>
+                      </a:r>
+                      <a:endParaRPr lang="en-US" sz="1200" dirty="0"/>
+                    </a:p>
+                  </a:txBody>
+                  <a:tcPr marL="91440" marR="91440" marT="45720" marB="45720" anchor="ctr">
+                    <a:lnL w="6350" cap="flat" cmpd="sng" algn="ctr">
+                      <a:solidFill>
+                        <a:srgbClr val="CCCCCC"/>
+                      </a:solidFill>
+                      <a:prstDash val="solid"/>
+                      <a:round/>
+                      <a:headEnd type="none" w="med" len="med"/>
+                      <a:tailEnd type="none" w="med" len="med"/>
+                    </a:lnL>
+                    <a:lnR w="6350" cap="flat" cmpd="sng" algn="ctr">
+                      <a:solidFill>
+                        <a:srgbClr val="CCCCCC"/>
+                      </a:solidFill>
+                      <a:prstDash val="solid"/>
+                      <a:round/>
+                      <a:headEnd type="none" w="med" len="med"/>
+                      <a:tailEnd type="none" w="med" len="med"/>
+                    </a:lnR>
+                    <a:lnT w="6350" cap="flat" cmpd="sng" algn="ctr">
+                      <a:solidFill>
+                        <a:srgbClr val="CCCCCC"/>
+                      </a:solidFill>
+                      <a:prstDash val="solid"/>
+                      <a:round/>
+                      <a:headEnd type="none" w="med" len="med"/>
+                      <a:tailEnd type="none" w="med" len="med"/>
+                    </a:lnT>
+                    <a:lnB w="6350" cap="flat" cmpd="sng" algn="ctr">
+                      <a:solidFill>
+                        <a:srgbClr val="CCCCCC"/>
+                      </a:solidFill>
+                      <a:prstDash val="solid"/>
+                      <a:round/>
+                      <a:headEnd type="none" w="med" len="med"/>
+                      <a:tailEnd type="none" w="med" len="med"/>
+                    </a:lnB>
+                    <a:solidFill>
+                      <a:srgbClr val="059669"/>
+                    </a:solidFill>
+                  </a:tcPr>
+                </a:tc>
+                <a:tc>
+                  <a:txBody>
+                    <a:bodyPr/>
+                    <a:lstStyle/>
+                    <a:p>
+                      <a:pPr algn="ctr" indent="0" marL="0">
+                        <a:buNone/>
+                      </a:pPr>
+                      <a:r>
+                        <a:rPr lang="en-US" sz="1200" b="1" dirty="0">
+                          <a:solidFill>
+                            <a:srgbClr val="FFFFFF"/>
+                          </a:solidFill>
+                        </a:rPr>
+                        <a:t>After</a:t>
+                      </a:r>
+                      <a:endParaRPr lang="en-US" sz="1200" dirty="0"/>
+                    </a:p>
+                  </a:txBody>
+                  <a:tcPr marL="91440" marR="91440" marT="45720" marB="45720" anchor="ctr">
+                    <a:lnL w="6350" cap="flat" cmpd="sng" algn="ctr">
+                      <a:solidFill>
+                        <a:srgbClr val="CCCCCC"/>
+                      </a:solidFill>
+                      <a:prstDash val="solid"/>
+                      <a:round/>
+                      <a:headEnd type="none" w="med" len="med"/>
+                      <a:tailEnd type="none" w="med" len="med"/>
+                    </a:lnL>
+                    <a:lnR w="6350" cap="flat" cmpd="sng" algn="ctr">
+                      <a:solidFill>
+                        <a:srgbClr val="CCCCCC"/>
+                      </a:solidFill>
+                      <a:prstDash val="solid"/>
+                      <a:round/>
+                      <a:headEnd type="none" w="med" len="med"/>
+                      <a:tailEnd type="none" w="med" len="med"/>
+                    </a:lnR>
+                    <a:lnT w="6350" cap="flat" cmpd="sng" algn="ctr">
+                      <a:solidFill>
+                        <a:srgbClr val="CCCCCC"/>
+                      </a:solidFill>
+                      <a:prstDash val="solid"/>
+                      <a:round/>
+                      <a:headEnd type="none" w="med" len="med"/>
+                      <a:tailEnd type="none" w="med" len="med"/>
+                    </a:lnT>
+                    <a:lnB w="6350" cap="flat" cmpd="sng" algn="ctr">
+                      <a:solidFill>
+                        <a:srgbClr val="CCCCCC"/>
+                      </a:solidFill>
+                      <a:prstDash val="solid"/>
+                      <a:round/>
+                      <a:headEnd type="none" w="med" len="med"/>
+                      <a:tailEnd type="none" w="med" len="med"/>
+                    </a:lnB>
+                    <a:solidFill>
+                      <a:srgbClr val="059669"/>
+                    </a:solidFill>
+                  </a:tcPr>
+                </a:tc>
+                <a:tc>
+                  <a:txBody>
+                    <a:bodyPr/>
+                    <a:lstStyle/>
+                    <a:p>
+                      <a:pPr algn="ctr" indent="0" marL="0">
+                        <a:buNone/>
+                      </a:pPr>
+                      <a:r>
+                        <a:rPr lang="en-US" sz="1200" b="1" dirty="0">
+                          <a:solidFill>
+                            <a:srgbClr val="FFFFFF"/>
+                          </a:solidFill>
+                        </a:rPr>
+                        <a:t>Saved/Month</a:t>
+                      </a:r>
+                      <a:endParaRPr lang="en-US" sz="1200" dirty="0"/>
+                    </a:p>
+                  </a:txBody>
+                  <a:tcPr marL="91440" marR="91440" marT="45720" marB="45720" anchor="ctr">
+                    <a:lnL w="6350" cap="flat" cmpd="sng" algn="ctr">
+                      <a:solidFill>
+                        <a:srgbClr val="CCCCCC"/>
+                      </a:solidFill>
+                      <a:prstDash val="solid"/>
+                      <a:round/>
+                      <a:headEnd type="none" w="med" len="med"/>
+                      <a:tailEnd type="none" w="med" len="med"/>
+                    </a:lnL>
+                    <a:lnR w="6350" cap="flat" cmpd="sng" algn="ctr">
+                      <a:solidFill>
+                        <a:srgbClr val="CCCCCC"/>
+                      </a:solidFill>
+                      <a:prstDash val="solid"/>
+                      <a:round/>
+                      <a:headEnd type="none" w="med" len="med"/>
+                      <a:tailEnd type="none" w="med" len="med"/>
+                    </a:lnR>
+                    <a:lnT w="6350" cap="flat" cmpd="sng" algn="ctr">
+                      <a:solidFill>
+                        <a:srgbClr val="CCCCCC"/>
+                      </a:solidFill>
+                      <a:prstDash val="solid"/>
+                      <a:round/>
+                      <a:headEnd type="none" w="med" len="med"/>
+                      <a:tailEnd type="none" w="med" len="med"/>
+                    </a:lnT>
+                    <a:lnB w="6350" cap="flat" cmpd="sng" algn="ctr">
+                      <a:solidFill>
+                        <a:srgbClr val="CCCCCC"/>
+                      </a:solidFill>
+                      <a:prstDash val="solid"/>
+                      <a:round/>
+                      <a:headEnd type="none" w="med" len="med"/>
+                      <a:tailEnd type="none" w="med" len="med"/>
+                    </a:lnB>
+                    <a:solidFill>
+                      <a:srgbClr val="059669"/>
+                    </a:solidFill>
+                  </a:tcPr>
+                </a:tc>
+              </a:tr>
+              <a:tr h="365760">
+                <a:tc>
+                  <a:txBody>
+                    <a:bodyPr/>
+                    <a:lstStyle/>
+                    <a:p>
+                      <a:pPr algn="ctr" indent="0" marL="0">
+                        <a:buNone/>
+                      </a:pPr>
+                      <a:r>
+                        <a:rPr lang="en-US" sz="1200" dirty="0">
+                          <a:solidFill>
+                            <a:srgbClr val="000000"/>
+                          </a:solidFill>
+                        </a:rPr>
+                        <a:t>Fee collection &amp; receipts</a:t>
+                      </a:r>
+                      <a:endParaRPr lang="en-US" sz="1200" dirty="0"/>
+                    </a:p>
+                  </a:txBody>
+                  <a:tcPr marL="91440" marR="91440" marT="45720" marB="45720" anchor="ctr">
+                    <a:lnL w="6350" cap="flat" cmpd="sng" algn="ctr">
+                      <a:solidFill>
+                        <a:srgbClr val="CCCCCC"/>
+                      </a:solidFill>
+                      <a:prstDash val="solid"/>
+                      <a:round/>
+                      <a:headEnd type="none" w="med" len="med"/>
+                      <a:tailEnd type="none" w="med" len="med"/>
+                    </a:lnL>
+                    <a:lnR w="6350" cap="flat" cmpd="sng" algn="ctr">
+                      <a:solidFill>
+                        <a:srgbClr val="CCCCCC"/>
+                      </a:solidFill>
+                      <a:prstDash val="solid"/>
+                      <a:round/>
+                      <a:headEnd type="none" w="med" len="med"/>
+                      <a:tailEnd type="none" w="med" len="med"/>
+                    </a:lnR>
+                    <a:lnT w="6350" cap="flat" cmpd="sng" algn="ctr">
+                      <a:solidFill>
+                        <a:srgbClr val="CCCCCC"/>
+                      </a:solidFill>
+                      <a:prstDash val="solid"/>
+                      <a:round/>
+                      <a:headEnd type="none" w="med" len="med"/>
+                      <a:tailEnd type="none" w="med" len="med"/>
+                    </a:lnT>
+                    <a:lnB w="6350" cap="flat" cmpd="sng" algn="ctr">
+                      <a:solidFill>
+                        <a:srgbClr val="CCCCCC"/>
+                      </a:solidFill>
+                      <a:prstDash val="solid"/>
+                      <a:round/>
+                      <a:headEnd type="none" w="med" len="med"/>
+                      <a:tailEnd type="none" w="med" len="med"/>
+                    </a:lnB>
+                  </a:tcPr>
+                </a:tc>
+                <a:tc>
+                  <a:txBody>
+                    <a:bodyPr/>
+                    <a:lstStyle/>
+                    <a:p>
+                      <a:pPr algn="ctr" indent="0" marL="0">
+                        <a:buNone/>
+                      </a:pPr>
+                      <a:r>
+                        <a:rPr lang="en-US" sz="1200" dirty="0">
+                          <a:solidFill>
+                            <a:srgbClr val="000000"/>
+                          </a:solidFill>
+                        </a:rPr>
+                        <a:t>40 hrs</a:t>
+                      </a:r>
+                      <a:endParaRPr lang="en-US" sz="1200" dirty="0"/>
+                    </a:p>
+                  </a:txBody>
+                  <a:tcPr marL="91440" marR="91440" marT="45720" marB="45720" anchor="ctr">
+                    <a:lnL w="6350" cap="flat" cmpd="sng" algn="ctr">
+                      <a:solidFill>
+                        <a:srgbClr val="CCCCCC"/>
+                      </a:solidFill>
+                      <a:prstDash val="solid"/>
+                      <a:round/>
+                      <a:headEnd type="none" w="med" len="med"/>
+                      <a:tailEnd type="none" w="med" len="med"/>
+                    </a:lnL>
+                    <a:lnR w="6350" cap="flat" cmpd="sng" algn="ctr">
+                      <a:solidFill>
+                        <a:srgbClr val="CCCCCC"/>
+                      </a:solidFill>
+                      <a:prstDash val="solid"/>
+                      <a:round/>
+                      <a:headEnd type="none" w="med" len="med"/>
+                      <a:tailEnd type="none" w="med" len="med"/>
+                    </a:lnR>
+                    <a:lnT w="6350" cap="flat" cmpd="sng" algn="ctr">
+                      <a:solidFill>
+                        <a:srgbClr val="CCCCCC"/>
+                      </a:solidFill>
+                      <a:prstDash val="solid"/>
+                      <a:round/>
+                      <a:headEnd type="none" w="med" len="med"/>
+                      <a:tailEnd type="none" w="med" len="med"/>
+                    </a:lnT>
+                    <a:lnB w="6350" cap="flat" cmpd="sng" algn="ctr">
+                      <a:solidFill>
+                        <a:srgbClr val="CCCCCC"/>
+                      </a:solidFill>
+                      <a:prstDash val="solid"/>
+                      <a:round/>
+                      <a:headEnd type="none" w="med" len="med"/>
+                      <a:tailEnd type="none" w="med" len="med"/>
+                    </a:lnB>
+                  </a:tcPr>
+                </a:tc>
+                <a:tc>
+                  <a:txBody>
+                    <a:bodyPr/>
+                    <a:lstStyle/>
+                    <a:p>
+                      <a:pPr algn="ctr" indent="0" marL="0">
+                        <a:buNone/>
+                      </a:pPr>
+                      <a:r>
+                        <a:rPr lang="en-US" sz="1200" dirty="0">
+                          <a:solidFill>
+                            <a:srgbClr val="000000"/>
+                          </a:solidFill>
+                        </a:rPr>
+                        <a:t>5 hrs</a:t>
+                      </a:r>
+                      <a:endParaRPr lang="en-US" sz="1200" dirty="0"/>
+                    </a:p>
+                  </a:txBody>
+                  <a:tcPr marL="91440" marR="91440" marT="45720" marB="45720" anchor="ctr">
+                    <a:lnL w="6350" cap="flat" cmpd="sng" algn="ctr">
+                      <a:solidFill>
+                        <a:srgbClr val="CCCCCC"/>
+                      </a:solidFill>
+                      <a:prstDash val="solid"/>
+                      <a:round/>
+                      <a:headEnd type="none" w="med" len="med"/>
+                      <a:tailEnd type="none" w="med" len="med"/>
+                    </a:lnL>
+                    <a:lnR w="6350" cap="flat" cmpd="sng" algn="ctr">
+                      <a:solidFill>
+                        <a:srgbClr val="CCCCCC"/>
+                      </a:solidFill>
+                      <a:prstDash val="solid"/>
+                      <a:round/>
+                      <a:headEnd type="none" w="med" len="med"/>
+                      <a:tailEnd type="none" w="med" len="med"/>
+                    </a:lnR>
+                    <a:lnT w="6350" cap="flat" cmpd="sng" algn="ctr">
+                      <a:solidFill>
+                        <a:srgbClr val="CCCCCC"/>
+                      </a:solidFill>
+                      <a:prstDash val="solid"/>
+                      <a:round/>
+                      <a:headEnd type="none" w="med" len="med"/>
+                      <a:tailEnd type="none" w="med" len="med"/>
+                    </a:lnT>
+                    <a:lnB w="6350" cap="flat" cmpd="sng" algn="ctr">
+                      <a:solidFill>
+                        <a:srgbClr val="CCCCCC"/>
+                      </a:solidFill>
+                      <a:prstDash val="solid"/>
+                      <a:round/>
+                      <a:headEnd type="none" w="med" len="med"/>
+                      <a:tailEnd type="none" w="med" len="med"/>
+                    </a:lnB>
+                  </a:tcPr>
+                </a:tc>
+                <a:tc>
+                  <a:txBody>
+                    <a:bodyPr/>
+                    <a:lstStyle/>
+                    <a:p>
+                      <a:pPr algn="ctr" indent="0" marL="0">
+                        <a:buNone/>
+                      </a:pPr>
+                      <a:r>
+                        <a:rPr lang="en-US" sz="1200" dirty="0">
+                          <a:solidFill>
+                            <a:srgbClr val="000000"/>
+                          </a:solidFill>
+                        </a:rPr>
+                        <a:t>35 hrs</a:t>
+                      </a:r>
+                      <a:endParaRPr lang="en-US" sz="1200" dirty="0"/>
+                    </a:p>
+                  </a:txBody>
+                  <a:tcPr marL="91440" marR="91440" marT="45720" marB="45720" anchor="ctr">
+                    <a:lnL w="6350" cap="flat" cmpd="sng" algn="ctr">
+                      <a:solidFill>
+                        <a:srgbClr val="CCCCCC"/>
+                      </a:solidFill>
+                      <a:prstDash val="solid"/>
+                      <a:round/>
+                      <a:headEnd type="none" w="med" len="med"/>
+                      <a:tailEnd type="none" w="med" len="med"/>
+                    </a:lnL>
+                    <a:lnR w="6350" cap="flat" cmpd="sng" algn="ctr">
+                      <a:solidFill>
+                        <a:srgbClr val="CCCCCC"/>
+                      </a:solidFill>
+                      <a:prstDash val="solid"/>
+                      <a:round/>
+                      <a:headEnd type="none" w="med" len="med"/>
+                      <a:tailEnd type="none" w="med" len="med"/>
+                    </a:lnR>
+                    <a:lnT w="6350" cap="flat" cmpd="sng" algn="ctr">
+                      <a:solidFill>
+                        <a:srgbClr val="CCCCCC"/>
+                      </a:solidFill>
+                      <a:prstDash val="solid"/>
+                      <a:round/>
+                      <a:headEnd type="none" w="med" len="med"/>
+                      <a:tailEnd type="none" w="med" len="med"/>
+                    </a:lnT>
+                    <a:lnB w="6350" cap="flat" cmpd="sng" algn="ctr">
+                      <a:solidFill>
+                        <a:srgbClr val="CCCCCC"/>
+                      </a:solidFill>
+                      <a:prstDash val="solid"/>
+                      <a:round/>
+                      <a:headEnd type="none" w="med" len="med"/>
+                      <a:tailEnd type="none" w="med" len="med"/>
+                    </a:lnB>
+                  </a:tcPr>
+                </a:tc>
+              </a:tr>
+              <a:tr h="365760">
+                <a:tc>
+                  <a:txBody>
+                    <a:bodyPr/>
+                    <a:lstStyle/>
+                    <a:p>
+                      <a:pPr algn="ctr" indent="0" marL="0">
+                        <a:buNone/>
+                      </a:pPr>
+                      <a:r>
+                        <a:rPr lang="en-US" sz="1200" dirty="0">
+                          <a:solidFill>
+                            <a:srgbClr val="000000"/>
+                          </a:solidFill>
+                        </a:rPr>
+                        <a:t>Attendance compilation</a:t>
+                      </a:r>
+                      <a:endParaRPr lang="en-US" sz="1200" dirty="0"/>
+                    </a:p>
+                  </a:txBody>
+                  <a:tcPr marL="91440" marR="91440" marT="45720" marB="45720" anchor="ctr">
+                    <a:lnL w="6350" cap="flat" cmpd="sng" algn="ctr">
+                      <a:solidFill>
+                        <a:srgbClr val="CCCCCC"/>
+                      </a:solidFill>
+                      <a:prstDash val="solid"/>
+                      <a:round/>
+                      <a:headEnd type="none" w="med" len="med"/>
+                      <a:tailEnd type="none" w="med" len="med"/>
+                    </a:lnL>
+                    <a:lnR w="6350" cap="flat" cmpd="sng" algn="ctr">
+                      <a:solidFill>
+                        <a:srgbClr val="CCCCCC"/>
+                      </a:solidFill>
+                      <a:prstDash val="solid"/>
+                      <a:round/>
+                      <a:headEnd type="none" w="med" len="med"/>
+                      <a:tailEnd type="none" w="med" len="med"/>
+                    </a:lnR>
+                    <a:lnT w="6350" cap="flat" cmpd="sng" algn="ctr">
+                      <a:solidFill>
+                        <a:srgbClr val="CCCCCC"/>
+                      </a:solidFill>
+                      <a:prstDash val="solid"/>
+                      <a:round/>
+                      <a:headEnd type="none" w="med" len="med"/>
+                      <a:tailEnd type="none" w="med" len="med"/>
+                    </a:lnT>
+                    <a:lnB w="6350" cap="flat" cmpd="sng" algn="ctr">
+                      <a:solidFill>
+                        <a:srgbClr val="CCCCCC"/>
+                      </a:solidFill>
+                      <a:prstDash val="solid"/>
+                      <a:round/>
+                      <a:headEnd type="none" w="med" len="med"/>
+                      <a:tailEnd type="none" w="med" len="med"/>
+                    </a:lnB>
+                  </a:tcPr>
+                </a:tc>
+                <a:tc>
+                  <a:txBody>
+                    <a:bodyPr/>
+                    <a:lstStyle/>
+                    <a:p>
+                      <a:pPr algn="ctr" indent="0" marL="0">
+                        <a:buNone/>
+                      </a:pPr>
+                      <a:r>
+                        <a:rPr lang="en-US" sz="1200" dirty="0">
+                          <a:solidFill>
+                            <a:srgbClr val="000000"/>
+                          </a:solidFill>
+                        </a:rPr>
+                        <a:t>20 hrs</a:t>
+                      </a:r>
+                      <a:endParaRPr lang="en-US" sz="1200" dirty="0"/>
+                    </a:p>
+                  </a:txBody>
+                  <a:tcPr marL="91440" marR="91440" marT="45720" marB="45720" anchor="ctr">
+                    <a:lnL w="6350" cap="flat" cmpd="sng" algn="ctr">
+                      <a:solidFill>
+                        <a:srgbClr val="CCCCCC"/>
+                      </a:solidFill>
+                      <a:prstDash val="solid"/>
+                      <a:round/>
+                      <a:headEnd type="none" w="med" len="med"/>
+                      <a:tailEnd type="none" w="med" len="med"/>
+                    </a:lnL>
+                    <a:lnR w="6350" cap="flat" cmpd="sng" algn="ctr">
+                      <a:solidFill>
+                        <a:srgbClr val="CCCCCC"/>
+                      </a:solidFill>
+                      <a:prstDash val="solid"/>
+                      <a:round/>
+                      <a:headEnd type="none" w="med" len="med"/>
+                      <a:tailEnd type="none" w="med" len="med"/>
+                    </a:lnR>
+                    <a:lnT w="6350" cap="flat" cmpd="sng" algn="ctr">
+                      <a:solidFill>
+                        <a:srgbClr val="CCCCCC"/>
+                      </a:solidFill>
+                      <a:prstDash val="solid"/>
+                      <a:round/>
+                      <a:headEnd type="none" w="med" len="med"/>
+                      <a:tailEnd type="none" w="med" len="med"/>
+                    </a:lnT>
+                    <a:lnB w="6350" cap="flat" cmpd="sng" algn="ctr">
+                      <a:solidFill>
+                        <a:srgbClr val="CCCCCC"/>
+                      </a:solidFill>
+                      <a:prstDash val="solid"/>
+                      <a:round/>
+                      <a:headEnd type="none" w="med" len="med"/>
+                      <a:tailEnd type="none" w="med" len="med"/>
+                    </a:lnB>
+                  </a:tcPr>
+                </a:tc>
+                <a:tc>
+                  <a:txBody>
+                    <a:bodyPr/>
+                    <a:lstStyle/>
+                    <a:p>
+                      <a:pPr algn="ctr" indent="0" marL="0">
+                        <a:buNone/>
+                      </a:pPr>
+                      <a:r>
+                        <a:rPr lang="en-US" sz="1200" dirty="0">
+                          <a:solidFill>
+                            <a:srgbClr val="000000"/>
+                          </a:solidFill>
+                        </a:rPr>
+                        <a:t>1 hr</a:t>
+                      </a:r>
+                      <a:endParaRPr lang="en-US" sz="1200" dirty="0"/>
+                    </a:p>
+                  </a:txBody>
+                  <a:tcPr marL="91440" marR="91440" marT="45720" marB="45720" anchor="ctr">
+                    <a:lnL w="6350" cap="flat" cmpd="sng" algn="ctr">
+                      <a:solidFill>
+                        <a:srgbClr val="CCCCCC"/>
+                      </a:solidFill>
+                      <a:prstDash val="solid"/>
+                      <a:round/>
+                      <a:headEnd type="none" w="med" len="med"/>
+                      <a:tailEnd type="none" w="med" len="med"/>
+                    </a:lnL>
+                    <a:lnR w="6350" cap="flat" cmpd="sng" algn="ctr">
+                      <a:solidFill>
+                        <a:srgbClr val="CCCCCC"/>
+                      </a:solidFill>
+                      <a:prstDash val="solid"/>
+                      <a:round/>
+                      <a:headEnd type="none" w="med" len="med"/>
+                      <a:tailEnd type="none" w="med" len="med"/>
+                    </a:lnR>
+                    <a:lnT w="6350" cap="flat" cmpd="sng" algn="ctr">
+                      <a:solidFill>
+                        <a:srgbClr val="CCCCCC"/>
+                      </a:solidFill>
+                      <a:prstDash val="solid"/>
+                      <a:round/>
+                      <a:headEnd type="none" w="med" len="med"/>
+                      <a:tailEnd type="none" w="med" len="med"/>
+                    </a:lnT>
+                    <a:lnB w="6350" cap="flat" cmpd="sng" algn="ctr">
+                      <a:solidFill>
+                        <a:srgbClr val="CCCCCC"/>
+                      </a:solidFill>
+                      <a:prstDash val="solid"/>
+                      <a:round/>
+                      <a:headEnd type="none" w="med" len="med"/>
+                      <a:tailEnd type="none" w="med" len="med"/>
+                    </a:lnB>
+                  </a:tcPr>
+                </a:tc>
+                <a:tc>
+                  <a:txBody>
+                    <a:bodyPr/>
+                    <a:lstStyle/>
+                    <a:p>
+                      <a:pPr algn="ctr" indent="0" marL="0">
+                        <a:buNone/>
+                      </a:pPr>
+                      <a:r>
+                        <a:rPr lang="en-US" sz="1200" dirty="0">
+                          <a:solidFill>
+                            <a:srgbClr val="000000"/>
+                          </a:solidFill>
+                        </a:rPr>
+                        <a:t>19 hrs</a:t>
+                      </a:r>
+                      <a:endParaRPr lang="en-US" sz="1200" dirty="0"/>
+                    </a:p>
+                  </a:txBody>
+                  <a:tcPr marL="91440" marR="91440" marT="45720" marB="45720" anchor="ctr">
+                    <a:lnL w="6350" cap="flat" cmpd="sng" algn="ctr">
+                      <a:solidFill>
+                        <a:srgbClr val="CCCCCC"/>
+                      </a:solidFill>
+                      <a:prstDash val="solid"/>
+                      <a:round/>
+                      <a:headEnd type="none" w="med" len="med"/>
+                      <a:tailEnd type="none" w="med" len="med"/>
+                    </a:lnL>
+                    <a:lnR w="6350" cap="flat" cmpd="sng" algn="ctr">
+                      <a:solidFill>
+                        <a:srgbClr val="CCCCCC"/>
+                      </a:solidFill>
+                      <a:prstDash val="solid"/>
+                      <a:round/>
+                      <a:headEnd type="none" w="med" len="med"/>
+                      <a:tailEnd type="none" w="med" len="med"/>
+                    </a:lnR>
+                    <a:lnT w="6350" cap="flat" cmpd="sng" algn="ctr">
+                      <a:solidFill>
+                        <a:srgbClr val="CCCCCC"/>
+                      </a:solidFill>
+                      <a:prstDash val="solid"/>
+                      <a:round/>
+                      <a:headEnd type="none" w="med" len="med"/>
+                      <a:tailEnd type="none" w="med" len="med"/>
+                    </a:lnT>
+                    <a:lnB w="6350" cap="flat" cmpd="sng" algn="ctr">
+                      <a:solidFill>
+                        <a:srgbClr val="CCCCCC"/>
+                      </a:solidFill>
+                      <a:prstDash val="solid"/>
+                      <a:round/>
+                      <a:headEnd type="none" w="med" len="med"/>
+                      <a:tailEnd type="none" w="med" len="med"/>
+                    </a:lnB>
+                  </a:tcPr>
+                </a:tc>
+              </a:tr>
+              <a:tr h="365760">
+                <a:tc>
+                  <a:txBody>
+                    <a:bodyPr/>
+                    <a:lstStyle/>
+                    <a:p>
+                      <a:pPr algn="ctr" indent="0" marL="0">
+                        <a:buNone/>
+                      </a:pPr>
+                      <a:r>
+                        <a:rPr lang="en-US" sz="1200" dirty="0">
+                          <a:solidFill>
+                            <a:srgbClr val="000000"/>
+                          </a:solidFill>
+                        </a:rPr>
+                        <a:t>Report generation</a:t>
+                      </a:r>
+                      <a:endParaRPr lang="en-US" sz="1200" dirty="0"/>
+                    </a:p>
+                  </a:txBody>
+                  <a:tcPr marL="91440" marR="91440" marT="45720" marB="45720" anchor="ctr">
+                    <a:lnL w="6350" cap="flat" cmpd="sng" algn="ctr">
+                      <a:solidFill>
+                        <a:srgbClr val="CCCCCC"/>
+                      </a:solidFill>
+                      <a:prstDash val="solid"/>
+                      <a:round/>
+                      <a:headEnd type="none" w="med" len="med"/>
+                      <a:tailEnd type="none" w="med" len="med"/>
+                    </a:lnL>
+                    <a:lnR w="6350" cap="flat" cmpd="sng" algn="ctr">
+                      <a:solidFill>
+                        <a:srgbClr val="CCCCCC"/>
+                      </a:solidFill>
+                      <a:prstDash val="solid"/>
+                      <a:round/>
+                      <a:headEnd type="none" w="med" len="med"/>
+                      <a:tailEnd type="none" w="med" len="med"/>
+                    </a:lnR>
+                    <a:lnT w="6350" cap="flat" cmpd="sng" algn="ctr">
+                      <a:solidFill>
+                        <a:srgbClr val="CCCCCC"/>
+                      </a:solidFill>
+                      <a:prstDash val="solid"/>
+                      <a:round/>
+                      <a:headEnd type="none" w="med" len="med"/>
+                      <a:tailEnd type="none" w="med" len="med"/>
+                    </a:lnT>
+                    <a:lnB w="6350" cap="flat" cmpd="sng" algn="ctr">
+                      <a:solidFill>
+                        <a:srgbClr val="CCCCCC"/>
+                      </a:solidFill>
+                      <a:prstDash val="solid"/>
+                      <a:round/>
+                      <a:headEnd type="none" w="med" len="med"/>
+                      <a:tailEnd type="none" w="med" len="med"/>
+                    </a:lnB>
+                  </a:tcPr>
+                </a:tc>
+                <a:tc>
+                  <a:txBody>
+                    <a:bodyPr/>
+                    <a:lstStyle/>
+                    <a:p>
+                      <a:pPr algn="ctr" indent="0" marL="0">
+                        <a:buNone/>
+                      </a:pPr>
+                      <a:r>
+                        <a:rPr lang="en-US" sz="1200" dirty="0">
+                          <a:solidFill>
+                            <a:srgbClr val="000000"/>
+                          </a:solidFill>
+                        </a:rPr>
+                        <a:t>16 hrs</a:t>
+                      </a:r>
+                      <a:endParaRPr lang="en-US" sz="1200" dirty="0"/>
+                    </a:p>
+                  </a:txBody>
+                  <a:tcPr marL="91440" marR="91440" marT="45720" marB="45720" anchor="ctr">
+                    <a:lnL w="6350" cap="flat" cmpd="sng" algn="ctr">
+                      <a:solidFill>
+                        <a:srgbClr val="CCCCCC"/>
+                      </a:solidFill>
+                      <a:prstDash val="solid"/>
+                      <a:round/>
+                      <a:headEnd type="none" w="med" len="med"/>
+                      <a:tailEnd type="none" w="med" len="med"/>
+                    </a:lnL>
+                    <a:lnR w="6350" cap="flat" cmpd="sng" algn="ctr">
+                      <a:solidFill>
+                        <a:srgbClr val="CCCCCC"/>
+                      </a:solidFill>
+                      <a:prstDash val="solid"/>
+                      <a:round/>
+                      <a:headEnd type="none" w="med" len="med"/>
+                      <a:tailEnd type="none" w="med" len="med"/>
+                    </a:lnR>
+                    <a:lnT w="6350" cap="flat" cmpd="sng" algn="ctr">
+                      <a:solidFill>
+                        <a:srgbClr val="CCCCCC"/>
+                      </a:solidFill>
+                      <a:prstDash val="solid"/>
+                      <a:round/>
+                      <a:headEnd type="none" w="med" len="med"/>
+                      <a:tailEnd type="none" w="med" len="med"/>
+                    </a:lnT>
+                    <a:lnB w="6350" cap="flat" cmpd="sng" algn="ctr">
+                      <a:solidFill>
+                        <a:srgbClr val="CCCCCC"/>
+                      </a:solidFill>
+                      <a:prstDash val="solid"/>
+                      <a:round/>
+                      <a:headEnd type="none" w="med" len="med"/>
+                      <a:tailEnd type="none" w="med" len="med"/>
+                    </a:lnB>
+                  </a:tcPr>
+                </a:tc>
+                <a:tc>
+                  <a:txBody>
+                    <a:bodyPr/>
+                    <a:lstStyle/>
+                    <a:p>
+                      <a:pPr algn="ctr" indent="0" marL="0">
+                        <a:buNone/>
+                      </a:pPr>
+                      <a:r>
+                        <a:rPr lang="en-US" sz="1200" dirty="0">
+                          <a:solidFill>
+                            <a:srgbClr val="000000"/>
+                          </a:solidFill>
+                        </a:rPr>
+                        <a:t>2 hrs</a:t>
+                      </a:r>
+                      <a:endParaRPr lang="en-US" sz="1200" dirty="0"/>
+                    </a:p>
+                  </a:txBody>
+                  <a:tcPr marL="91440" marR="91440" marT="45720" marB="45720" anchor="ctr">
+                    <a:lnL w="6350" cap="flat" cmpd="sng" algn="ctr">
+                      <a:solidFill>
+                        <a:srgbClr val="CCCCCC"/>
+                      </a:solidFill>
+                      <a:prstDash val="solid"/>
+                      <a:round/>
+                      <a:headEnd type="none" w="med" len="med"/>
+                      <a:tailEnd type="none" w="med" len="med"/>
+                    </a:lnL>
+                    <a:lnR w="6350" cap="flat" cmpd="sng" algn="ctr">
+                      <a:solidFill>
+                        <a:srgbClr val="CCCCCC"/>
+                      </a:solidFill>
+                      <a:prstDash val="solid"/>
+                      <a:round/>
+                      <a:headEnd type="none" w="med" len="med"/>
+                      <a:tailEnd type="none" w="med" len="med"/>
+                    </a:lnR>
+                    <a:lnT w="6350" cap="flat" cmpd="sng" algn="ctr">
+                      <a:solidFill>
+                        <a:srgbClr val="CCCCCC"/>
+                      </a:solidFill>
+                      <a:prstDash val="solid"/>
+                      <a:round/>
+                      <a:headEnd type="none" w="med" len="med"/>
+                      <a:tailEnd type="none" w="med" len="med"/>
+                    </a:lnT>
+                    <a:lnB w="6350" cap="flat" cmpd="sng" algn="ctr">
+                      <a:solidFill>
+                        <a:srgbClr val="CCCCCC"/>
+                      </a:solidFill>
+                      <a:prstDash val="solid"/>
+                      <a:round/>
+                      <a:headEnd type="none" w="med" len="med"/>
+                      <a:tailEnd type="none" w="med" len="med"/>
+                    </a:lnB>
+                  </a:tcPr>
+                </a:tc>
+                <a:tc>
+                  <a:txBody>
+                    <a:bodyPr/>
+                    <a:lstStyle/>
+                    <a:p>
+                      <a:pPr algn="ctr" indent="0" marL="0">
+                        <a:buNone/>
+                      </a:pPr>
+                      <a:r>
+                        <a:rPr lang="en-US" sz="1200" dirty="0">
+                          <a:solidFill>
+                            <a:srgbClr val="000000"/>
+                          </a:solidFill>
+                        </a:rPr>
+                        <a:t>14 hrs</a:t>
+                      </a:r>
+                      <a:endParaRPr lang="en-US" sz="1200" dirty="0"/>
+                    </a:p>
+                  </a:txBody>
+                  <a:tcPr marL="91440" marR="91440" marT="45720" marB="45720" anchor="ctr">
+                    <a:lnL w="6350" cap="flat" cmpd="sng" algn="ctr">
+                      <a:solidFill>
+                        <a:srgbClr val="CCCCCC"/>
+                      </a:solidFill>
+                      <a:prstDash val="solid"/>
+                      <a:round/>
+                      <a:headEnd type="none" w="med" len="med"/>
+                      <a:tailEnd type="none" w="med" len="med"/>
+                    </a:lnL>
+                    <a:lnR w="6350" cap="flat" cmpd="sng" algn="ctr">
+                      <a:solidFill>
+                        <a:srgbClr val="CCCCCC"/>
+                      </a:solidFill>
+                      <a:prstDash val="solid"/>
+                      <a:round/>
+                      <a:headEnd type="none" w="med" len="med"/>
+                      <a:tailEnd type="none" w="med" len="med"/>
+                    </a:lnR>
+                    <a:lnT w="6350" cap="flat" cmpd="sng" algn="ctr">
+                      <a:solidFill>
+                        <a:srgbClr val="CCCCCC"/>
+                      </a:solidFill>
+                      <a:prstDash val="solid"/>
+                      <a:round/>
+                      <a:headEnd type="none" w="med" len="med"/>
+                      <a:tailEnd type="none" w="med" len="med"/>
+                    </a:lnT>
+                    <a:lnB w="6350" cap="flat" cmpd="sng" algn="ctr">
+                      <a:solidFill>
+                        <a:srgbClr val="CCCCCC"/>
+                      </a:solidFill>
+                      <a:prstDash val="solid"/>
+                      <a:round/>
+                      <a:headEnd type="none" w="med" len="med"/>
+                      <a:tailEnd type="none" w="med" len="med"/>
+                    </a:lnB>
+                  </a:tcPr>
+                </a:tc>
+              </a:tr>
+              <a:tr h="365760">
+                <a:tc>
+                  <a:txBody>
+                    <a:bodyPr/>
+                    <a:lstStyle/>
+                    <a:p>
+                      <a:pPr algn="ctr" indent="0" marL="0">
+                        <a:buNone/>
+                      </a:pPr>
+                      <a:r>
+                        <a:rPr lang="en-US" sz="1200" dirty="0">
+                          <a:solidFill>
+                            <a:srgbClr val="000000"/>
+                          </a:solidFill>
+                        </a:rPr>
+                        <a:t>Parent communication</a:t>
+                      </a:r>
+                      <a:endParaRPr lang="en-US" sz="1200" dirty="0"/>
+                    </a:p>
+                  </a:txBody>
+                  <a:tcPr marL="91440" marR="91440" marT="45720" marB="45720" anchor="ctr">
+                    <a:lnL w="6350" cap="flat" cmpd="sng" algn="ctr">
+                      <a:solidFill>
+                        <a:srgbClr val="CCCCCC"/>
+                      </a:solidFill>
+                      <a:prstDash val="solid"/>
+                      <a:round/>
+                      <a:headEnd type="none" w="med" len="med"/>
+                      <a:tailEnd type="none" w="med" len="med"/>
+                    </a:lnL>
+                    <a:lnR w="6350" cap="flat" cmpd="sng" algn="ctr">
+                      <a:solidFill>
+                        <a:srgbClr val="CCCCCC"/>
+                      </a:solidFill>
+                      <a:prstDash val="solid"/>
+                      <a:round/>
+                      <a:headEnd type="none" w="med" len="med"/>
+                      <a:tailEnd type="none" w="med" len="med"/>
+                    </a:lnR>
+                    <a:lnT w="6350" cap="flat" cmpd="sng" algn="ctr">
+                      <a:solidFill>
+                        <a:srgbClr val="CCCCCC"/>
+                      </a:solidFill>
+                      <a:prstDash val="solid"/>
+                      <a:round/>
+                      <a:headEnd type="none" w="med" len="med"/>
+                      <a:tailEnd type="none" w="med" len="med"/>
+                    </a:lnT>
+                    <a:lnB w="6350" cap="flat" cmpd="sng" algn="ctr">
+                      <a:solidFill>
+                        <a:srgbClr val="CCCCCC"/>
+                      </a:solidFill>
+                      <a:prstDash val="solid"/>
+                      <a:round/>
+                      <a:headEnd type="none" w="med" len="med"/>
+                      <a:tailEnd type="none" w="med" len="med"/>
+                    </a:lnB>
+                  </a:tcPr>
+                </a:tc>
+                <a:tc>
+                  <a:txBody>
+                    <a:bodyPr/>
+                    <a:lstStyle/>
+                    <a:p>
+                      <a:pPr algn="ctr" indent="0" marL="0">
+                        <a:buNone/>
+                      </a:pPr>
+                      <a:r>
+                        <a:rPr lang="en-US" sz="1200" dirty="0">
+                          <a:solidFill>
+                            <a:srgbClr val="000000"/>
+                          </a:solidFill>
+                        </a:rPr>
+                        <a:t>40 hrs</a:t>
+                      </a:r>
+                      <a:endParaRPr lang="en-US" sz="1200" dirty="0"/>
+                    </a:p>
+                  </a:txBody>
+                  <a:tcPr marL="91440" marR="91440" marT="45720" marB="45720" anchor="ctr">
+                    <a:lnL w="6350" cap="flat" cmpd="sng" algn="ctr">
+                      <a:solidFill>
+                        <a:srgbClr val="CCCCCC"/>
+                      </a:solidFill>
+                      <a:prstDash val="solid"/>
+                      <a:round/>
+                      <a:headEnd type="none" w="med" len="med"/>
+                      <a:tailEnd type="none" w="med" len="med"/>
+                    </a:lnL>
+                    <a:lnR w="6350" cap="flat" cmpd="sng" algn="ctr">
+                      <a:solidFill>
+                        <a:srgbClr val="CCCCCC"/>
+                      </a:solidFill>
+                      <a:prstDash val="solid"/>
+                      <a:round/>
+                      <a:headEnd type="none" w="med" len="med"/>
+                      <a:tailEnd type="none" w="med" len="med"/>
+                    </a:lnR>
+                    <a:lnT w="6350" cap="flat" cmpd="sng" algn="ctr">
+                      <a:solidFill>
+                        <a:srgbClr val="CCCCCC"/>
+                      </a:solidFill>
+                      <a:prstDash val="solid"/>
+                      <a:round/>
+                      <a:headEnd type="none" w="med" len="med"/>
+                      <a:tailEnd type="none" w="med" len="med"/>
+                    </a:lnT>
+                    <a:lnB w="6350" cap="flat" cmpd="sng" algn="ctr">
+                      <a:solidFill>
+                        <a:srgbClr val="CCCCCC"/>
+                      </a:solidFill>
+                      <a:prstDash val="solid"/>
+                      <a:round/>
+                      <a:headEnd type="none" w="med" len="med"/>
+                      <a:tailEnd type="none" w="med" len="med"/>
+                    </a:lnB>
+                  </a:tcPr>
+                </a:tc>
+                <a:tc>
+                  <a:txBody>
+                    <a:bodyPr/>
+                    <a:lstStyle/>
+                    <a:p>
+                      <a:pPr algn="ctr" indent="0" marL="0">
+                        <a:buNone/>
+                      </a:pPr>
+                      <a:r>
+                        <a:rPr lang="en-US" sz="1200" dirty="0">
+                          <a:solidFill>
+                            <a:srgbClr val="000000"/>
+                          </a:solidFill>
+                        </a:rPr>
+                        <a:t>8 hrs</a:t>
+                      </a:r>
+                      <a:endParaRPr lang="en-US" sz="1200" dirty="0"/>
+                    </a:p>
+                  </a:txBody>
+                  <a:tcPr marL="91440" marR="91440" marT="45720" marB="45720" anchor="ctr">
+                    <a:lnL w="6350" cap="flat" cmpd="sng" algn="ctr">
+                      <a:solidFill>
+                        <a:srgbClr val="CCCCCC"/>
+                      </a:solidFill>
+                      <a:prstDash val="solid"/>
+                      <a:round/>
+                      <a:headEnd type="none" w="med" len="med"/>
+                      <a:tailEnd type="none" w="med" len="med"/>
+                    </a:lnL>
+                    <a:lnR w="6350" cap="flat" cmpd="sng" algn="ctr">
+                      <a:solidFill>
+                        <a:srgbClr val="CCCCCC"/>
+                      </a:solidFill>
+                      <a:prstDash val="solid"/>
+                      <a:round/>
+                      <a:headEnd type="none" w="med" len="med"/>
+                      <a:tailEnd type="none" w="med" len="med"/>
+                    </a:lnR>
+                    <a:lnT w="6350" cap="flat" cmpd="sng" algn="ctr">
+                      <a:solidFill>
+                        <a:srgbClr val="CCCCCC"/>
+                      </a:solidFill>
+                      <a:prstDash val="solid"/>
+                      <a:round/>
+                      <a:headEnd type="none" w="med" len="med"/>
+                      <a:tailEnd type="none" w="med" len="med"/>
+                    </a:lnT>
+                    <a:lnB w="6350" cap="flat" cmpd="sng" algn="ctr">
+                      <a:solidFill>
+                        <a:srgbClr val="CCCCCC"/>
+                      </a:solidFill>
+                      <a:prstDash val="solid"/>
+                      <a:round/>
+                      <a:headEnd type="none" w="med" len="med"/>
+                      <a:tailEnd type="none" w="med" len="med"/>
+                    </a:lnB>
+                  </a:tcPr>
+                </a:tc>
+                <a:tc>
+                  <a:txBody>
+                    <a:bodyPr/>
+                    <a:lstStyle/>
+                    <a:p>
+                      <a:pPr algn="ctr" indent="0" marL="0">
+                        <a:buNone/>
+                      </a:pPr>
+                      <a:r>
+                        <a:rPr lang="en-US" sz="1200" dirty="0">
+                          <a:solidFill>
+                            <a:srgbClr val="000000"/>
+                          </a:solidFill>
+                        </a:rPr>
+                        <a:t>32 hrs</a:t>
+                      </a:r>
+                      <a:endParaRPr lang="en-US" sz="1200" dirty="0"/>
+                    </a:p>
+                  </a:txBody>
+                  <a:tcPr marL="91440" marR="91440" marT="45720" marB="45720" anchor="ctr">
+                    <a:lnL w="6350" cap="flat" cmpd="sng" algn="ctr">
+                      <a:solidFill>
+                        <a:srgbClr val="CCCCCC"/>
+                      </a:solidFill>
+                      <a:prstDash val="solid"/>
+                      <a:round/>
+                      <a:headEnd type="none" w="med" len="med"/>
+                      <a:tailEnd type="none" w="med" len="med"/>
+                    </a:lnL>
+                    <a:lnR w="6350" cap="flat" cmpd="sng" algn="ctr">
+                      <a:solidFill>
+                        <a:srgbClr val="CCCCCC"/>
+                      </a:solidFill>
+                      <a:prstDash val="solid"/>
+                      <a:round/>
+                      <a:headEnd type="none" w="med" len="med"/>
+                      <a:tailEnd type="none" w="med" len="med"/>
+                    </a:lnR>
+                    <a:lnT w="6350" cap="flat" cmpd="sng" algn="ctr">
+                      <a:solidFill>
+                        <a:srgbClr val="CCCCCC"/>
+                      </a:solidFill>
+                      <a:prstDash val="solid"/>
+                      <a:round/>
+                      <a:headEnd type="none" w="med" len="med"/>
+                      <a:tailEnd type="none" w="med" len="med"/>
+                    </a:lnT>
+                    <a:lnB w="6350" cap="flat" cmpd="sng" algn="ctr">
+                      <a:solidFill>
+                        <a:srgbClr val="CCCCCC"/>
+                      </a:solidFill>
+                      <a:prstDash val="solid"/>
+                      <a:round/>
+                      <a:headEnd type="none" w="med" len="med"/>
+                      <a:tailEnd type="none" w="med" len="med"/>
+                    </a:lnB>
+                  </a:tcPr>
+                </a:tc>
+              </a:tr>
+              <a:tr h="365760">
+                <a:tc>
+                  <a:txBody>
+                    <a:bodyPr/>
+                    <a:lstStyle/>
+                    <a:p>
+                      <a:pPr algn="ctr" indent="0" marL="0">
+                        <a:buNone/>
+                      </a:pPr>
+                      <a:r>
+                        <a:rPr lang="en-US" sz="1200" dirty="0">
+                          <a:solidFill>
+                            <a:srgbClr val="000000"/>
+                          </a:solidFill>
+                        </a:rPr>
+                        <a:t>Certificate processing</a:t>
+                      </a:r>
+                      <a:endParaRPr lang="en-US" sz="1200" dirty="0"/>
+                    </a:p>
+                  </a:txBody>
+                  <a:tcPr marL="91440" marR="91440" marT="45720" marB="45720" anchor="ctr">
+                    <a:lnL w="6350" cap="flat" cmpd="sng" algn="ctr">
+                      <a:solidFill>
+                        <a:srgbClr val="CCCCCC"/>
+                      </a:solidFill>
+                      <a:prstDash val="solid"/>
+                      <a:round/>
+                      <a:headEnd type="none" w="med" len="med"/>
+                      <a:tailEnd type="none" w="med" len="med"/>
+                    </a:lnL>
+                    <a:lnR w="6350" cap="flat" cmpd="sng" algn="ctr">
+                      <a:solidFill>
+                        <a:srgbClr val="CCCCCC"/>
+                      </a:solidFill>
+                      <a:prstDash val="solid"/>
+                      <a:round/>
+                      <a:headEnd type="none" w="med" len="med"/>
+                      <a:tailEnd type="none" w="med" len="med"/>
+                    </a:lnR>
+                    <a:lnT w="6350" cap="flat" cmpd="sng" algn="ctr">
+                      <a:solidFill>
+                        <a:srgbClr val="CCCCCC"/>
+                      </a:solidFill>
+                      <a:prstDash val="solid"/>
+                      <a:round/>
+                      <a:headEnd type="none" w="med" len="med"/>
+                      <a:tailEnd type="none" w="med" len="med"/>
+                    </a:lnT>
+                    <a:lnB w="6350" cap="flat" cmpd="sng" algn="ctr">
+                      <a:solidFill>
+                        <a:srgbClr val="CCCCCC"/>
+                      </a:solidFill>
+                      <a:prstDash val="solid"/>
+                      <a:round/>
+                      <a:headEnd type="none" w="med" len="med"/>
+                      <a:tailEnd type="none" w="med" len="med"/>
+                    </a:lnB>
+                  </a:tcPr>
+                </a:tc>
+                <a:tc>
+                  <a:txBody>
+                    <a:bodyPr/>
+                    <a:lstStyle/>
+                    <a:p>
+                      <a:pPr algn="ctr" indent="0" marL="0">
+                        <a:buNone/>
+                      </a:pPr>
+                      <a:r>
+                        <a:rPr lang="en-US" sz="1200" dirty="0">
+                          <a:solidFill>
+                            <a:srgbClr val="000000"/>
+                          </a:solidFill>
+                        </a:rPr>
+                        <a:t>25 hrs</a:t>
+                      </a:r>
+                      <a:endParaRPr lang="en-US" sz="1200" dirty="0"/>
+                    </a:p>
+                  </a:txBody>
+                  <a:tcPr marL="91440" marR="91440" marT="45720" marB="45720" anchor="ctr">
+                    <a:lnL w="6350" cap="flat" cmpd="sng" algn="ctr">
+                      <a:solidFill>
+                        <a:srgbClr val="CCCCCC"/>
+                      </a:solidFill>
+                      <a:prstDash val="solid"/>
+                      <a:round/>
+                      <a:headEnd type="none" w="med" len="med"/>
+                      <a:tailEnd type="none" w="med" len="med"/>
+                    </a:lnL>
+                    <a:lnR w="6350" cap="flat" cmpd="sng" algn="ctr">
+                      <a:solidFill>
+                        <a:srgbClr val="CCCCCC"/>
+                      </a:solidFill>
+                      <a:prstDash val="solid"/>
+                      <a:round/>
+                      <a:headEnd type="none" w="med" len="med"/>
+                      <a:tailEnd type="none" w="med" len="med"/>
+                    </a:lnR>
+                    <a:lnT w="6350" cap="flat" cmpd="sng" algn="ctr">
+                      <a:solidFill>
+                        <a:srgbClr val="CCCCCC"/>
+                      </a:solidFill>
+                      <a:prstDash val="solid"/>
+                      <a:round/>
+                      <a:headEnd type="none" w="med" len="med"/>
+                      <a:tailEnd type="none" w="med" len="med"/>
+                    </a:lnT>
+                    <a:lnB w="6350" cap="flat" cmpd="sng" algn="ctr">
+                      <a:solidFill>
+                        <a:srgbClr val="CCCCCC"/>
+                      </a:solidFill>
+                      <a:prstDash val="solid"/>
+                      <a:round/>
+                      <a:headEnd type="none" w="med" len="med"/>
+                      <a:tailEnd type="none" w="med" len="med"/>
+                    </a:lnB>
+                  </a:tcPr>
+                </a:tc>
+                <a:tc>
+                  <a:txBody>
+                    <a:bodyPr/>
+                    <a:lstStyle/>
+                    <a:p>
+                      <a:pPr algn="ctr" indent="0" marL="0">
+                        <a:buNone/>
+                      </a:pPr>
+                      <a:r>
+                        <a:rPr lang="en-US" sz="1200" dirty="0">
+                          <a:solidFill>
+                            <a:srgbClr val="000000"/>
+                          </a:solidFill>
+                        </a:rPr>
+                        <a:t>5 hrs</a:t>
+                      </a:r>
+                      <a:endParaRPr lang="en-US" sz="1200" dirty="0"/>
+                    </a:p>
+                  </a:txBody>
+                  <a:tcPr marL="91440" marR="91440" marT="45720" marB="45720" anchor="ctr">
+                    <a:lnL w="6350" cap="flat" cmpd="sng" algn="ctr">
+                      <a:solidFill>
+                        <a:srgbClr val="CCCCCC"/>
+                      </a:solidFill>
+                      <a:prstDash val="solid"/>
+                      <a:round/>
+                      <a:headEnd type="none" w="med" len="med"/>
+                      <a:tailEnd type="none" w="med" len="med"/>
+                    </a:lnL>
+                    <a:lnR w="6350" cap="flat" cmpd="sng" algn="ctr">
+                      <a:solidFill>
+                        <a:srgbClr val="CCCCCC"/>
+                      </a:solidFill>
+                      <a:prstDash val="solid"/>
+                      <a:round/>
+                      <a:headEnd type="none" w="med" len="med"/>
+                      <a:tailEnd type="none" w="med" len="med"/>
+                    </a:lnR>
+                    <a:lnT w="6350" cap="flat" cmpd="sng" algn="ctr">
+                      <a:solidFill>
+                        <a:srgbClr val="CCCCCC"/>
+                      </a:solidFill>
+                      <a:prstDash val="solid"/>
+                      <a:round/>
+                      <a:headEnd type="none" w="med" len="med"/>
+                      <a:tailEnd type="none" w="med" len="med"/>
+                    </a:lnT>
+                    <a:lnB w="6350" cap="flat" cmpd="sng" algn="ctr">
+                      <a:solidFill>
+                        <a:srgbClr val="CCCCCC"/>
+                      </a:solidFill>
+                      <a:prstDash val="solid"/>
+                      <a:round/>
+                      <a:headEnd type="none" w="med" len="med"/>
+                      <a:tailEnd type="none" w="med" len="med"/>
+                    </a:lnB>
+                  </a:tcPr>
+                </a:tc>
+                <a:tc>
+                  <a:txBody>
+                    <a:bodyPr/>
+                    <a:lstStyle/>
+                    <a:p>
+                      <a:pPr algn="ctr" indent="0" marL="0">
+                        <a:buNone/>
+                      </a:pPr>
+                      <a:r>
+                        <a:rPr lang="en-US" sz="1200" dirty="0">
+                          <a:solidFill>
+                            <a:srgbClr val="000000"/>
+                          </a:solidFill>
+                        </a:rPr>
+                        <a:t>20 hrs</a:t>
+                      </a:r>
+                      <a:endParaRPr lang="en-US" sz="1200" dirty="0"/>
+                    </a:p>
+                  </a:txBody>
+                  <a:tcPr marL="91440" marR="91440" marT="45720" marB="45720" anchor="ctr">
+                    <a:lnL w="6350" cap="flat" cmpd="sng" algn="ctr">
+                      <a:solidFill>
+                        <a:srgbClr val="CCCCCC"/>
+                      </a:solidFill>
+                      <a:prstDash val="solid"/>
+                      <a:round/>
+                      <a:headEnd type="none" w="med" len="med"/>
+                      <a:tailEnd type="none" w="med" len="med"/>
+                    </a:lnL>
+                    <a:lnR w="6350" cap="flat" cmpd="sng" algn="ctr">
+                      <a:solidFill>
+                        <a:srgbClr val="CCCCCC"/>
+                      </a:solidFill>
+                      <a:prstDash val="solid"/>
+                      <a:round/>
+                      <a:headEnd type="none" w="med" len="med"/>
+                      <a:tailEnd type="none" w="med" len="med"/>
+                    </a:lnR>
+                    <a:lnT w="6350" cap="flat" cmpd="sng" algn="ctr">
+                      <a:solidFill>
+                        <a:srgbClr val="CCCCCC"/>
+                      </a:solidFill>
+                      <a:prstDash val="solid"/>
+                      <a:round/>
+                      <a:headEnd type="none" w="med" len="med"/>
+                      <a:tailEnd type="none" w="med" len="med"/>
+                    </a:lnT>
+                    <a:lnB w="6350" cap="flat" cmpd="sng" algn="ctr">
+                      <a:solidFill>
+                        <a:srgbClr val="CCCCCC"/>
+                      </a:solidFill>
+                      <a:prstDash val="solid"/>
+                      <a:round/>
+                      <a:headEnd type="none" w="med" len="med"/>
+                      <a:tailEnd type="none" w="med" len="med"/>
+                    </a:lnB>
+                  </a:tcPr>
+                </a:tc>
+              </a:tr>
+              <a:tr h="365760">
+                <a:tc>
+                  <a:txBody>
+                    <a:bodyPr/>
+                    <a:lstStyle/>
+                    <a:p>
+                      <a:pPr algn="ctr" indent="0" marL="0">
+                        <a:buNone/>
+                      </a:pPr>
+                      <a:r>
+                        <a:rPr lang="en-US" sz="1200" b="1" dirty="0">
+                          <a:solidFill>
+                            <a:srgbClr val="000000"/>
+                          </a:solidFill>
+                        </a:rPr>
+                        <a:t>TOTAL</a:t>
+                      </a:r>
+                      <a:endParaRPr lang="en-US" sz="1200" dirty="0"/>
+                    </a:p>
+                  </a:txBody>
+                  <a:tcPr marL="91440" marR="91440" marT="45720" marB="45720" anchor="ctr">
+                    <a:lnL w="6350" cap="flat" cmpd="sng" algn="ctr">
+                      <a:solidFill>
+                        <a:srgbClr val="CCCCCC"/>
+                      </a:solidFill>
+                      <a:prstDash val="solid"/>
+                      <a:round/>
+                      <a:headEnd type="none" w="med" len="med"/>
+                      <a:tailEnd type="none" w="med" len="med"/>
+                    </a:lnL>
+                    <a:lnR w="6350" cap="flat" cmpd="sng" algn="ctr">
+                      <a:solidFill>
+                        <a:srgbClr val="CCCCCC"/>
+                      </a:solidFill>
+                      <a:prstDash val="solid"/>
+                      <a:round/>
+                      <a:headEnd type="none" w="med" len="med"/>
+                      <a:tailEnd type="none" w="med" len="med"/>
+                    </a:lnR>
+                    <a:lnT w="6350" cap="flat" cmpd="sng" algn="ctr">
+                      <a:solidFill>
+                        <a:srgbClr val="CCCCCC"/>
+                      </a:solidFill>
+                      <a:prstDash val="solid"/>
+                      <a:round/>
+                      <a:headEnd type="none" w="med" len="med"/>
+                      <a:tailEnd type="none" w="med" len="med"/>
+                    </a:lnT>
+                    <a:lnB w="6350" cap="flat" cmpd="sng" algn="ctr">
+                      <a:solidFill>
+                        <a:srgbClr val="CCCCCC"/>
+                      </a:solidFill>
+                      <a:prstDash val="solid"/>
+                      <a:round/>
+                      <a:headEnd type="none" w="med" len="med"/>
+                      <a:tailEnd type="none" w="med" len="med"/>
+                    </a:lnB>
+                  </a:tcPr>
+                </a:tc>
+                <a:tc>
+                  <a:txBody>
+                    <a:bodyPr/>
+                    <a:lstStyle/>
+                    <a:p>
+                      <a:pPr algn="ctr" indent="0" marL="0">
+                        <a:buNone/>
+                      </a:pPr>
+                      <a:r>
+                        <a:rPr lang="en-US" sz="1200" b="1" dirty="0">
+                          <a:solidFill>
+                            <a:srgbClr val="000000"/>
+                          </a:solidFill>
+                        </a:rPr>
+                        <a:t>141 hrs</a:t>
+                      </a:r>
+                      <a:endParaRPr lang="en-US" sz="1200" dirty="0"/>
+                    </a:p>
+                  </a:txBody>
+                  <a:tcPr marL="91440" marR="91440" marT="45720" marB="45720" anchor="ctr">
+                    <a:lnL w="6350" cap="flat" cmpd="sng" algn="ctr">
+                      <a:solidFill>
+                        <a:srgbClr val="CCCCCC"/>
+                      </a:solidFill>
+                      <a:prstDash val="solid"/>
+                      <a:round/>
+                      <a:headEnd type="none" w="med" len="med"/>
+                      <a:tailEnd type="none" w="med" len="med"/>
+                    </a:lnL>
+                    <a:lnR w="6350" cap="flat" cmpd="sng" algn="ctr">
+                      <a:solidFill>
+                        <a:srgbClr val="CCCCCC"/>
+                      </a:solidFill>
+                      <a:prstDash val="solid"/>
+                      <a:round/>
+                      <a:headEnd type="none" w="med" len="med"/>
+                      <a:tailEnd type="none" w="med" len="med"/>
+                    </a:lnR>
+                    <a:lnT w="6350" cap="flat" cmpd="sng" algn="ctr">
+                      <a:solidFill>
+                        <a:srgbClr val="CCCCCC"/>
+                      </a:solidFill>
+                      <a:prstDash val="solid"/>
+                      <a:round/>
+                      <a:headEnd type="none" w="med" len="med"/>
+                      <a:tailEnd type="none" w="med" len="med"/>
+                    </a:lnT>
+                    <a:lnB w="6350" cap="flat" cmpd="sng" algn="ctr">
+                      <a:solidFill>
+                        <a:srgbClr val="CCCCCC"/>
+                      </a:solidFill>
+                      <a:prstDash val="solid"/>
+                      <a:round/>
+                      <a:headEnd type="none" w="med" len="med"/>
+                      <a:tailEnd type="none" w="med" len="med"/>
+                    </a:lnB>
+                  </a:tcPr>
+                </a:tc>
+                <a:tc>
+                  <a:txBody>
+                    <a:bodyPr/>
+                    <a:lstStyle/>
+                    <a:p>
+                      <a:pPr algn="ctr" indent="0" marL="0">
+                        <a:buNone/>
+                      </a:pPr>
+                      <a:r>
+                        <a:rPr lang="en-US" sz="1200" b="1" dirty="0">
+                          <a:solidFill>
+                            <a:srgbClr val="000000"/>
+                          </a:solidFill>
+                        </a:rPr>
+                        <a:t>21 hrs</a:t>
+                      </a:r>
+                      <a:endParaRPr lang="en-US" sz="1200" dirty="0"/>
+                    </a:p>
+                  </a:txBody>
+                  <a:tcPr marL="91440" marR="91440" marT="45720" marB="45720" anchor="ctr">
+                    <a:lnL w="6350" cap="flat" cmpd="sng" algn="ctr">
+                      <a:solidFill>
+                        <a:srgbClr val="CCCCCC"/>
+                      </a:solidFill>
+                      <a:prstDash val="solid"/>
+                      <a:round/>
+                      <a:headEnd type="none" w="med" len="med"/>
+                      <a:tailEnd type="none" w="med" len="med"/>
+                    </a:lnL>
+                    <a:lnR w="6350" cap="flat" cmpd="sng" algn="ctr">
+                      <a:solidFill>
+                        <a:srgbClr val="CCCCCC"/>
+                      </a:solidFill>
+                      <a:prstDash val="solid"/>
+                      <a:round/>
+                      <a:headEnd type="none" w="med" len="med"/>
+                      <a:tailEnd type="none" w="med" len="med"/>
+                    </a:lnR>
+                    <a:lnT w="6350" cap="flat" cmpd="sng" algn="ctr">
+                      <a:solidFill>
+                        <a:srgbClr val="CCCCCC"/>
+                      </a:solidFill>
+                      <a:prstDash val="solid"/>
+                      <a:round/>
+                      <a:headEnd type="none" w="med" len="med"/>
+                      <a:tailEnd type="none" w="med" len="med"/>
+                    </a:lnT>
+                    <a:lnB w="6350" cap="flat" cmpd="sng" algn="ctr">
+                      <a:solidFill>
+                        <a:srgbClr val="CCCCCC"/>
+                      </a:solidFill>
+                      <a:prstDash val="solid"/>
+                      <a:round/>
+                      <a:headEnd type="none" w="med" len="med"/>
+                      <a:tailEnd type="none" w="med" len="med"/>
+                    </a:lnB>
+                  </a:tcPr>
+                </a:tc>
+                <a:tc>
+                  <a:txBody>
+                    <a:bodyPr/>
+                    <a:lstStyle/>
+                    <a:p>
+                      <a:pPr algn="ctr" indent="0" marL="0">
+                        <a:buNone/>
+                      </a:pPr>
+                      <a:r>
+                        <a:rPr lang="en-US" sz="1200" b="1" dirty="0">
+                          <a:solidFill>
+                            <a:srgbClr val="059669"/>
+                          </a:solidFill>
+                        </a:rPr>
+                        <a:t>120 hrs</a:t>
+                      </a:r>
+                      <a:endParaRPr lang="en-US" sz="1200" dirty="0"/>
+                    </a:p>
+                  </a:txBody>
+                  <a:tcPr marL="91440" marR="91440" marT="45720" marB="45720" anchor="ctr">
+                    <a:lnL w="6350" cap="flat" cmpd="sng" algn="ctr">
+                      <a:solidFill>
+                        <a:srgbClr val="CCCCCC"/>
+                      </a:solidFill>
+                      <a:prstDash val="solid"/>
+                      <a:round/>
+                      <a:headEnd type="none" w="med" len="med"/>
+                      <a:tailEnd type="none" w="med" len="med"/>
+                    </a:lnL>
+                    <a:lnR w="6350" cap="flat" cmpd="sng" algn="ctr">
+                      <a:solidFill>
+                        <a:srgbClr val="CCCCCC"/>
+                      </a:solidFill>
+                      <a:prstDash val="solid"/>
+                      <a:round/>
+                      <a:headEnd type="none" w="med" len="med"/>
+                      <a:tailEnd type="none" w="med" len="med"/>
+                    </a:lnR>
+                    <a:lnT w="6350" cap="flat" cmpd="sng" algn="ctr">
+                      <a:solidFill>
+                        <a:srgbClr val="CCCCCC"/>
+                      </a:solidFill>
+                      <a:prstDash val="solid"/>
+                      <a:round/>
+                      <a:headEnd type="none" w="med" len="med"/>
+                      <a:tailEnd type="none" w="med" len="med"/>
+                    </a:lnT>
+                    <a:lnB w="6350" cap="flat" cmpd="sng" algn="ctr">
+                      <a:solidFill>
+                        <a:srgbClr val="CCCCCC"/>
+                      </a:solidFill>
+                      <a:prstDash val="solid"/>
+                      <a:round/>
+                      <a:headEnd type="none" w="med" len="med"/>
+                      <a:tailEnd type="none" w="med" len="med"/>
+                    </a:lnB>
+                  </a:tcPr>
+                </a:tc>
+              </a:tr>
+            </a:tbl>
+          </a:graphicData>
+        </a:graphic>
+      </p:graphicFrame>
+    </p:spTree>
+  </p:cSld>
+  <p:clrMapOvr>
+    <a:masterClrMapping/>
+  </p:clrMapOvr>
+</p:sld>
+</file>
+
+<file path=ppt/slides/slide15.xml><?xml version="1.0" encoding="utf-8"?>
+<p:sld xmlns:a="http://schemas.openxmlformats.org/drawingml/2006/main" xmlns:r="http://schemas.openxmlformats.org/officeDocument/2006/relationships" xmlns:p="http://schemas.openxmlformats.org/presentationml/2006/main">
+  <p:cSld name="Slide 15">
+    <p:spTree>
+      <p:nvGrpSpPr>
+        <p:cNvPr id="1" name=""/>
+        <p:cNvGrpSpPr/>
+        <p:nvPr/>
+      </p:nvGrpSpPr>
+      <p:grpSpPr>
+        <a:xfrm>
+          <a:off x="0" y="0"/>
+          <a:ext cx="0" cy="0"/>
+          <a:chOff x="0" y="0"/>
+          <a:chExt cx="0" cy="0"/>
+        </a:xfrm>
+      </p:grpSpPr>
+      <p:sp>
+        <p:nvSpPr>
+          <p:cNvPr id="2" name="Shape 0"/>
+          <p:cNvSpPr/>
+          <p:nvPr/>
+        </p:nvSpPr>
+        <p:spPr>
+          <a:xfrm>
+            <a:off x="0" y="0"/>
+            <a:ext cx="9144000" cy="1097280"/>
+          </a:xfrm>
+          <a:prstGeom prst="rect">
+            <a:avLst/>
+          </a:prstGeom>
+          <a:solidFill>
+            <a:srgbClr val="1E40AF"/>
+          </a:solidFill>
+          <a:ln/>
+        </p:spPr>
+      </p:sp>
+      <p:sp>
+        <p:nvSpPr>
+          <p:cNvPr id="3" name="Text 1"/>
+          <p:cNvSpPr/>
+          <p:nvPr/>
+        </p:nvSpPr>
+        <p:spPr>
+          <a:xfrm>
+            <a:off x="457200" y="320040"/>
+            <a:ext cx="8229600" cy="457200"/>
+          </a:xfrm>
+          <a:prstGeom prst="rect">
+            <a:avLst/>
+          </a:prstGeom>
+          <a:noFill/>
+          <a:ln/>
+        </p:spPr>
+        <p:txBody>
+          <a:bodyPr wrap="square" rtlCol="0" anchor="ctr"/>
+          <a:lstStyle/>
+          <a:p>
+            <a:pPr indent="0" marL="0">
+              <a:buNone/>
+            </a:pPr>
+            <a:r>
+              <a:rPr lang="en-US" sz="3200" b="1" dirty="0">
+                <a:solidFill>
+                  <a:srgbClr val="FFFFFF"/>
+                </a:solidFill>
+                <a:latin typeface="Arial" pitchFamily="34" charset="0"/>
+                <a:ea typeface="Arial" pitchFamily="34" charset="-122"/>
+                <a:cs typeface="Arial" pitchFamily="34" charset="-120"/>
+              </a:rPr>
+              <a:t>Quality &amp; Reliability Assurance</a:t>
+            </a:r>
+            <a:endParaRPr lang="en-US" sz="3200" dirty="0"/>
+          </a:p>
+        </p:txBody>
+      </p:sp>
+      <p:sp>
+        <p:nvSpPr>
+          <p:cNvPr id="4" name="Text 2"/>
+          <p:cNvSpPr/>
+          <p:nvPr/>
+        </p:nvSpPr>
+        <p:spPr>
+          <a:xfrm>
+            <a:off x="457200" y="1280160"/>
+            <a:ext cx="3657600" cy="365760"/>
+          </a:xfrm>
+          <a:prstGeom prst="rect">
+            <a:avLst/>
+          </a:prstGeom>
+          <a:noFill/>
+          <a:ln/>
+        </p:spPr>
+        <p:txBody>
+          <a:bodyPr wrap="square" rtlCol="0" anchor="ctr"/>
+          <a:lstStyle/>
+          <a:p>
+            <a:pPr indent="0" marL="0">
+              <a:buNone/>
+            </a:pPr>
+            <a:r>
+              <a:rPr lang="en-US" sz="1600" b="1" dirty="0">
+                <a:solidFill>
+                  <a:srgbClr val="0D9488"/>
+                </a:solidFill>
+                <a:latin typeface="Arial" pitchFamily="34" charset="0"/>
+                <a:ea typeface="Arial" pitchFamily="34" charset="-122"/>
+                <a:cs typeface="Arial" pitchFamily="34" charset="-120"/>
+              </a:rPr>
+              <a:t>E2E Testing Verification</a:t>
+            </a:r>
+            <a:endParaRPr lang="en-US" sz="1600" dirty="0"/>
+          </a:p>
+        </p:txBody>
+      </p:sp>
+      <p:graphicFrame>
+        <p:nvGraphicFramePr>
+          <p:cNvPr id="16" name="Table 0"/>
+          <p:cNvGraphicFramePr>
+            <a:graphicFrameLocks noGrp="1"/>
+          </p:cNvGraphicFramePr>
+          <p:nvPr>
+            <p:extLst>
+              <p:ext uri="{D42A27DB-BD31-4B8C-83A1-F6EECF244321}">
+                <p14:modId xmlns:p14="http://schemas.microsoft.com/office/powerpoint/2010/main" val="1579011935"/>
+              </p:ext>
+            </p:extLst>
+          </p:nvPr>
+        </p:nvGraphicFramePr>
+        <p:xfrm>
+          <a:off x="457200" y="1645920"/>
+          <a:ext cx="3931920" cy="2286000"/>
+        </p:xfrm>
+        <a:graphic>
+          <a:graphicData uri="http://schemas.openxmlformats.org/drawingml/2006/table">
+            <a:tbl>
+              <a:tblPr/>
+              <a:tblGrid>
+                <a:gridCol w="1965960"/>
+                <a:gridCol w="1965960"/>
+              </a:tblGrid>
+              <a:tr h="326571">
+                <a:tc>
+                  <a:txBody>
+                    <a:bodyPr/>
+                    <a:lstStyle/>
+                    <a:p>
+                      <a:pPr algn="ctr" indent="0" marL="0">
+                        <a:buNone/>
+                      </a:pPr>
+                      <a:r>
+                        <a:rPr lang="en-US" sz="1100" b="1" dirty="0">
+                          <a:solidFill>
+                            <a:srgbClr val="FFFFFF"/>
+                          </a:solidFill>
+                        </a:rPr>
+                        <a:t>Metric</a:t>
+                      </a:r>
+                      <a:endParaRPr lang="en-US" sz="1100" dirty="0"/>
+                    </a:p>
+                  </a:txBody>
+                  <a:tcPr marL="91440" marR="91440" marT="45720" marB="45720" anchor="ctr">
+                    <a:lnL w="6350" cap="flat" cmpd="sng" algn="ctr">
+                      <a:solidFill>
+                        <a:srgbClr val="CCCCCC"/>
+                      </a:solidFill>
+                      <a:prstDash val="solid"/>
+                      <a:round/>
+                      <a:headEnd type="none" w="med" len="med"/>
+                      <a:tailEnd type="none" w="med" len="med"/>
+                    </a:lnL>
+                    <a:lnR w="6350" cap="flat" cmpd="sng" algn="ctr">
+                      <a:solidFill>
+                        <a:srgbClr val="CCCCCC"/>
+                      </a:solidFill>
+                      <a:prstDash val="solid"/>
+                      <a:round/>
+                      <a:headEnd type="none" w="med" len="med"/>
+                      <a:tailEnd type="none" w="med" len="med"/>
+                    </a:lnR>
+                    <a:lnT w="6350" cap="flat" cmpd="sng" algn="ctr">
+                      <a:solidFill>
+                        <a:srgbClr val="CCCCCC"/>
+                      </a:solidFill>
+                      <a:prstDash val="solid"/>
+                      <a:round/>
+                      <a:headEnd type="none" w="med" len="med"/>
+                      <a:tailEnd type="none" w="med" len="med"/>
+                    </a:lnT>
+                    <a:lnB w="6350" cap="flat" cmpd="sng" algn="ctr">
+                      <a:solidFill>
+                        <a:srgbClr val="CCCCCC"/>
+                      </a:solidFill>
+                      <a:prstDash val="solid"/>
+                      <a:round/>
+                      <a:headEnd type="none" w="med" len="med"/>
+                      <a:tailEnd type="none" w="med" len="med"/>
+                    </a:lnB>
+                    <a:solidFill>
+                      <a:srgbClr val="059669"/>
+                    </a:solidFill>
+                  </a:tcPr>
+                </a:tc>
+                <a:tc>
+                  <a:txBody>
+                    <a:bodyPr/>
+                    <a:lstStyle/>
+                    <a:p>
+                      <a:pPr algn="ctr" indent="0" marL="0">
+                        <a:buNone/>
+                      </a:pPr>
+                      <a:r>
+                        <a:rPr lang="en-US" sz="1100" b="1" dirty="0">
+                          <a:solidFill>
+                            <a:srgbClr val="FFFFFF"/>
+                          </a:solidFill>
+                        </a:rPr>
+                        <a:t>Result</a:t>
+                      </a:r>
+                      <a:endParaRPr lang="en-US" sz="1100" dirty="0"/>
+                    </a:p>
+                  </a:txBody>
+                  <a:tcPr marL="91440" marR="91440" marT="45720" marB="45720" anchor="ctr">
+                    <a:lnL w="6350" cap="flat" cmpd="sng" algn="ctr">
+                      <a:solidFill>
+                        <a:srgbClr val="CCCCCC"/>
+                      </a:solidFill>
+                      <a:prstDash val="solid"/>
+                      <a:round/>
+                      <a:headEnd type="none" w="med" len="med"/>
+                      <a:tailEnd type="none" w="med" len="med"/>
+                    </a:lnL>
+                    <a:lnR w="6350" cap="flat" cmpd="sng" algn="ctr">
+                      <a:solidFill>
+                        <a:srgbClr val="CCCCCC"/>
+                      </a:solidFill>
+                      <a:prstDash val="solid"/>
+                      <a:round/>
+                      <a:headEnd type="none" w="med" len="med"/>
+                      <a:tailEnd type="none" w="med" len="med"/>
+                    </a:lnR>
+                    <a:lnT w="6350" cap="flat" cmpd="sng" algn="ctr">
+                      <a:solidFill>
+                        <a:srgbClr val="CCCCCC"/>
+                      </a:solidFill>
+                      <a:prstDash val="solid"/>
+                      <a:round/>
+                      <a:headEnd type="none" w="med" len="med"/>
+                      <a:tailEnd type="none" w="med" len="med"/>
+                    </a:lnT>
+                    <a:lnB w="6350" cap="flat" cmpd="sng" algn="ctr">
+                      <a:solidFill>
+                        <a:srgbClr val="CCCCCC"/>
+                      </a:solidFill>
+                      <a:prstDash val="solid"/>
+                      <a:round/>
+                      <a:headEnd type="none" w="med" len="med"/>
+                      <a:tailEnd type="none" w="med" len="med"/>
+                    </a:lnB>
+                    <a:solidFill>
+                      <a:srgbClr val="059669"/>
+                    </a:solidFill>
+                  </a:tcPr>
+                </a:tc>
+              </a:tr>
+              <a:tr h="326571">
+                <a:tc>
+                  <a:txBody>
+                    <a:bodyPr/>
+                    <a:lstStyle/>
+                    <a:p>
+                      <a:pPr algn="ctr" indent="0" marL="0">
+                        <a:buNone/>
+                      </a:pPr>
+                      <a:r>
+                        <a:rPr lang="en-US" sz="1100" dirty="0">
+                          <a:solidFill>
+                            <a:srgbClr val="000000"/>
+                          </a:solidFill>
+                        </a:rPr>
+                        <a:t>Total Personas Tested</a:t>
+                      </a:r>
+                      <a:endParaRPr lang="en-US" sz="1100" dirty="0"/>
+                    </a:p>
+                  </a:txBody>
+                  <a:tcPr marL="91440" marR="91440" marT="45720" marB="45720" anchor="ctr">
+                    <a:lnL w="6350" cap="flat" cmpd="sng" algn="ctr">
+                      <a:solidFill>
+                        <a:srgbClr val="CCCCCC"/>
+                      </a:solidFill>
+                      <a:prstDash val="solid"/>
+                      <a:round/>
+                      <a:headEnd type="none" w="med" len="med"/>
+                      <a:tailEnd type="none" w="med" len="med"/>
+                    </a:lnL>
+                    <a:lnR w="6350" cap="flat" cmpd="sng" algn="ctr">
+                      <a:solidFill>
+                        <a:srgbClr val="CCCCCC"/>
+                      </a:solidFill>
+                      <a:prstDash val="solid"/>
+                      <a:round/>
+                      <a:headEnd type="none" w="med" len="med"/>
+                      <a:tailEnd type="none" w="med" len="med"/>
+                    </a:lnR>
+                    <a:lnT w="6350" cap="flat" cmpd="sng" algn="ctr">
+                      <a:solidFill>
+                        <a:srgbClr val="CCCCCC"/>
+                      </a:solidFill>
+                      <a:prstDash val="solid"/>
+                      <a:round/>
+                      <a:headEnd type="none" w="med" len="med"/>
+                      <a:tailEnd type="none" w="med" len="med"/>
+                    </a:lnT>
+                    <a:lnB w="6350" cap="flat" cmpd="sng" algn="ctr">
+                      <a:solidFill>
+                        <a:srgbClr val="CCCCCC"/>
+                      </a:solidFill>
+                      <a:prstDash val="solid"/>
+                      <a:round/>
+                      <a:headEnd type="none" w="med" len="med"/>
+                      <a:tailEnd type="none" w="med" len="med"/>
+                    </a:lnB>
+                  </a:tcPr>
+                </a:tc>
+                <a:tc>
+                  <a:txBody>
+                    <a:bodyPr/>
+                    <a:lstStyle/>
+                    <a:p>
+                      <a:pPr algn="ctr" indent="0" marL="0">
+                        <a:buNone/>
+                      </a:pPr>
+                      <a:r>
+                        <a:rPr lang="en-US" sz="1100" dirty="0">
+                          <a:solidFill>
+                            <a:srgbClr val="000000"/>
+                          </a:solidFill>
+                        </a:rPr>
+                        <a:t>21 (7 roles x 3 colleges)</a:t>
+                      </a:r>
+                      <a:endParaRPr lang="en-US" sz="1100" dirty="0"/>
+                    </a:p>
+                  </a:txBody>
+                  <a:tcPr marL="91440" marR="91440" marT="45720" marB="45720" anchor="ctr">
+                    <a:lnL w="6350" cap="flat" cmpd="sng" algn="ctr">
+                      <a:solidFill>
+                        <a:srgbClr val="CCCCCC"/>
+                      </a:solidFill>
+                      <a:prstDash val="solid"/>
+                      <a:round/>
+                      <a:headEnd type="none" w="med" len="med"/>
+                      <a:tailEnd type="none" w="med" len="med"/>
+                    </a:lnL>
+                    <a:lnR w="6350" cap="flat" cmpd="sng" algn="ctr">
+                      <a:solidFill>
+                        <a:srgbClr val="CCCCCC"/>
+                      </a:solidFill>
+                      <a:prstDash val="solid"/>
+                      <a:round/>
+                      <a:headEnd type="none" w="med" len="med"/>
+                      <a:tailEnd type="none" w="med" len="med"/>
+                    </a:lnR>
+                    <a:lnT w="6350" cap="flat" cmpd="sng" algn="ctr">
+                      <a:solidFill>
+                        <a:srgbClr val="CCCCCC"/>
+                      </a:solidFill>
+                      <a:prstDash val="solid"/>
+                      <a:round/>
+                      <a:headEnd type="none" w="med" len="med"/>
+                      <a:tailEnd type="none" w="med" len="med"/>
+                    </a:lnT>
+                    <a:lnB w="6350" cap="flat" cmpd="sng" algn="ctr">
+                      <a:solidFill>
+                        <a:srgbClr val="CCCCCC"/>
+                      </a:solidFill>
+                      <a:prstDash val="solid"/>
+                      <a:round/>
+                      <a:headEnd type="none" w="med" len="med"/>
+                      <a:tailEnd type="none" w="med" len="med"/>
+                    </a:lnB>
+                  </a:tcPr>
+                </a:tc>
+              </a:tr>
+              <a:tr h="326571">
+                <a:tc>
+                  <a:txBody>
+                    <a:bodyPr/>
+                    <a:lstStyle/>
+                    <a:p>
+                      <a:pPr algn="ctr" indent="0" marL="0">
+                        <a:buNone/>
+                      </a:pPr>
+                      <a:r>
+                        <a:rPr lang="en-US" sz="1100" dirty="0">
+                          <a:solidFill>
+                            <a:srgbClr val="000000"/>
+                          </a:solidFill>
+                        </a:rPr>
+                        <a:t>Test Scenarios</a:t>
+                      </a:r>
+                      <a:endParaRPr lang="en-US" sz="1100" dirty="0"/>
+                    </a:p>
+                  </a:txBody>
+                  <a:tcPr marL="91440" marR="91440" marT="45720" marB="45720" anchor="ctr">
+                    <a:lnL w="6350" cap="flat" cmpd="sng" algn="ctr">
+                      <a:solidFill>
+                        <a:srgbClr val="CCCCCC"/>
+                      </a:solidFill>
+                      <a:prstDash val="solid"/>
+                      <a:round/>
+                      <a:headEnd type="none" w="med" len="med"/>
+                      <a:tailEnd type="none" w="med" len="med"/>
+                    </a:lnL>
+                    <a:lnR w="6350" cap="flat" cmpd="sng" algn="ctr">
+                      <a:solidFill>
+                        <a:srgbClr val="CCCCCC"/>
+                      </a:solidFill>
+                      <a:prstDash val="solid"/>
+                      <a:round/>
+                      <a:headEnd type="none" w="med" len="med"/>
+                      <a:tailEnd type="none" w="med" len="med"/>
+                    </a:lnR>
+                    <a:lnT w="6350" cap="flat" cmpd="sng" algn="ctr">
+                      <a:solidFill>
+                        <a:srgbClr val="CCCCCC"/>
+                      </a:solidFill>
+                      <a:prstDash val="solid"/>
+                      <a:round/>
+                      <a:headEnd type="none" w="med" len="med"/>
+                      <a:tailEnd type="none" w="med" len="med"/>
+                    </a:lnT>
+                    <a:lnB w="6350" cap="flat" cmpd="sng" algn="ctr">
+                      <a:solidFill>
+                        <a:srgbClr val="CCCCCC"/>
+                      </a:solidFill>
+                      <a:prstDash val="solid"/>
+                      <a:round/>
+                      <a:headEnd type="none" w="med" len="med"/>
+                      <a:tailEnd type="none" w="med" len="med"/>
+                    </a:lnB>
+                  </a:tcPr>
+                </a:tc>
+                <a:tc>
+                  <a:txBody>
+                    <a:bodyPr/>
+                    <a:lstStyle/>
+                    <a:p>
+                      <a:pPr algn="ctr" indent="0" marL="0">
+                        <a:buNone/>
+                      </a:pPr>
+                      <a:r>
+                        <a:rPr lang="en-US" sz="1100" dirty="0">
+                          <a:solidFill>
+                            <a:srgbClr val="000000"/>
+                          </a:solidFill>
+                        </a:rPr>
+                        <a:t>100+ automated</a:t>
+                      </a:r>
+                      <a:endParaRPr lang="en-US" sz="1100" dirty="0"/>
+                    </a:p>
+                  </a:txBody>
+                  <a:tcPr marL="91440" marR="91440" marT="45720" marB="45720" anchor="ctr">
+                    <a:lnL w="6350" cap="flat" cmpd="sng" algn="ctr">
+                      <a:solidFill>
+                        <a:srgbClr val="CCCCCC"/>
+                      </a:solidFill>
+                      <a:prstDash val="solid"/>
+                      <a:round/>
+                      <a:headEnd type="none" w="med" len="med"/>
+                      <a:tailEnd type="none" w="med" len="med"/>
+                    </a:lnL>
+                    <a:lnR w="6350" cap="flat" cmpd="sng" algn="ctr">
+                      <a:solidFill>
+                        <a:srgbClr val="CCCCCC"/>
+                      </a:solidFill>
+                      <a:prstDash val="solid"/>
+                      <a:round/>
+                      <a:headEnd type="none" w="med" len="med"/>
+                      <a:tailEnd type="none" w="med" len="med"/>
+                    </a:lnR>
+                    <a:lnT w="6350" cap="flat" cmpd="sng" algn="ctr">
+                      <a:solidFill>
+                        <a:srgbClr val="CCCCCC"/>
+                      </a:solidFill>
+                      <a:prstDash val="solid"/>
+                      <a:round/>
+                      <a:headEnd type="none" w="med" len="med"/>
+                      <a:tailEnd type="none" w="med" len="med"/>
+                    </a:lnT>
+                    <a:lnB w="6350" cap="flat" cmpd="sng" algn="ctr">
+                      <a:solidFill>
+                        <a:srgbClr val="CCCCCC"/>
+                      </a:solidFill>
+                      <a:prstDash val="solid"/>
+                      <a:round/>
+                      <a:headEnd type="none" w="med" len="med"/>
+                      <a:tailEnd type="none" w="med" len="med"/>
+                    </a:lnB>
+                  </a:tcPr>
+                </a:tc>
+              </a:tr>
+              <a:tr h="326571">
+                <a:tc>
+                  <a:txBody>
+                    <a:bodyPr/>
+                    <a:lstStyle/>
+                    <a:p>
+                      <a:pPr algn="ctr" indent="0" marL="0">
+                        <a:buNone/>
+                      </a:pPr>
+                      <a:r>
+                        <a:rPr lang="en-US" sz="1100" dirty="0">
+                          <a:solidFill>
+                            <a:srgbClr val="000000"/>
+                          </a:solidFill>
+                        </a:rPr>
+                        <a:t>404 Errors Found</a:t>
+                      </a:r>
+                      <a:endParaRPr lang="en-US" sz="1100" dirty="0"/>
+                    </a:p>
+                  </a:txBody>
+                  <a:tcPr marL="91440" marR="91440" marT="45720" marB="45720" anchor="ctr">
+                    <a:lnL w="6350" cap="flat" cmpd="sng" algn="ctr">
+                      <a:solidFill>
+                        <a:srgbClr val="CCCCCC"/>
+                      </a:solidFill>
+                      <a:prstDash val="solid"/>
+                      <a:round/>
+                      <a:headEnd type="none" w="med" len="med"/>
+                      <a:tailEnd type="none" w="med" len="med"/>
+                    </a:lnL>
+                    <a:lnR w="6350" cap="flat" cmpd="sng" algn="ctr">
+                      <a:solidFill>
+                        <a:srgbClr val="CCCCCC"/>
+                      </a:solidFill>
+                      <a:prstDash val="solid"/>
+                      <a:round/>
+                      <a:headEnd type="none" w="med" len="med"/>
+                      <a:tailEnd type="none" w="med" len="med"/>
+                    </a:lnR>
+                    <a:lnT w="6350" cap="flat" cmpd="sng" algn="ctr">
+                      <a:solidFill>
+                        <a:srgbClr val="CCCCCC"/>
+                      </a:solidFill>
+                      <a:prstDash val="solid"/>
+                      <a:round/>
+                      <a:headEnd type="none" w="med" len="med"/>
+                      <a:tailEnd type="none" w="med" len="med"/>
+                    </a:lnT>
+                    <a:lnB w="6350" cap="flat" cmpd="sng" algn="ctr">
+                      <a:solidFill>
+                        <a:srgbClr val="CCCCCC"/>
+                      </a:solidFill>
+                      <a:prstDash val="solid"/>
+                      <a:round/>
+                      <a:headEnd type="none" w="med" len="med"/>
+                      <a:tailEnd type="none" w="med" len="med"/>
+                    </a:lnB>
+                  </a:tcPr>
+                </a:tc>
+                <a:tc>
+                  <a:txBody>
+                    <a:bodyPr/>
+                    <a:lstStyle/>
+                    <a:p>
+                      <a:pPr algn="ctr" indent="0" marL="0">
+                        <a:buNone/>
+                      </a:pPr>
+                      <a:r>
+                        <a:rPr lang="en-US" sz="1100" dirty="0">
+                          <a:solidFill>
+                            <a:srgbClr val="000000"/>
+                          </a:solidFill>
+                        </a:rPr>
+                        <a:t>0</a:t>
+                      </a:r>
+                      <a:endParaRPr lang="en-US" sz="1100" dirty="0"/>
+                    </a:p>
+                  </a:txBody>
+                  <a:tcPr marL="91440" marR="91440" marT="45720" marB="45720" anchor="ctr">
+                    <a:lnL w="6350" cap="flat" cmpd="sng" algn="ctr">
+                      <a:solidFill>
+                        <a:srgbClr val="CCCCCC"/>
+                      </a:solidFill>
+                      <a:prstDash val="solid"/>
+                      <a:round/>
+                      <a:headEnd type="none" w="med" len="med"/>
+                      <a:tailEnd type="none" w="med" len="med"/>
+                    </a:lnL>
+                    <a:lnR w="6350" cap="flat" cmpd="sng" algn="ctr">
+                      <a:solidFill>
+                        <a:srgbClr val="CCCCCC"/>
+                      </a:solidFill>
+                      <a:prstDash val="solid"/>
+                      <a:round/>
+                      <a:headEnd type="none" w="med" len="med"/>
+                      <a:tailEnd type="none" w="med" len="med"/>
+                    </a:lnR>
+                    <a:lnT w="6350" cap="flat" cmpd="sng" algn="ctr">
+                      <a:solidFill>
+                        <a:srgbClr val="CCCCCC"/>
+                      </a:solidFill>
+                      <a:prstDash val="solid"/>
+                      <a:round/>
+                      <a:headEnd type="none" w="med" len="med"/>
+                      <a:tailEnd type="none" w="med" len="med"/>
+                    </a:lnT>
+                    <a:lnB w="6350" cap="flat" cmpd="sng" algn="ctr">
+                      <a:solidFill>
+                        <a:srgbClr val="CCCCCC"/>
+                      </a:solidFill>
+                      <a:prstDash val="solid"/>
+                      <a:round/>
+                      <a:headEnd type="none" w="med" len="med"/>
+                      <a:tailEnd type="none" w="med" len="med"/>
+                    </a:lnB>
+                  </a:tcPr>
+                </a:tc>
+              </a:tr>
+              <a:tr h="326571">
+                <a:tc>
+                  <a:txBody>
+                    <a:bodyPr/>
+                    <a:lstStyle/>
+                    <a:p>
+                      <a:pPr algn="ctr" indent="0" marL="0">
+                        <a:buNone/>
+                      </a:pPr>
+                      <a:r>
+                        <a:rPr lang="en-US" sz="1100" dirty="0">
+                          <a:solidFill>
+                            <a:srgbClr val="000000"/>
+                          </a:solidFill>
+                        </a:rPr>
+                        <a:t>Access Denied Errors</a:t>
+                      </a:r>
+                      <a:endParaRPr lang="en-US" sz="1100" dirty="0"/>
+                    </a:p>
+                  </a:txBody>
+                  <a:tcPr marL="91440" marR="91440" marT="45720" marB="45720" anchor="ctr">
+                    <a:lnL w="6350" cap="flat" cmpd="sng" algn="ctr">
+                      <a:solidFill>
+                        <a:srgbClr val="CCCCCC"/>
+                      </a:solidFill>
+                      <a:prstDash val="solid"/>
+                      <a:round/>
+                      <a:headEnd type="none" w="med" len="med"/>
+                      <a:tailEnd type="none" w="med" len="med"/>
+                    </a:lnL>
+                    <a:lnR w="6350" cap="flat" cmpd="sng" algn="ctr">
+                      <a:solidFill>
+                        <a:srgbClr val="CCCCCC"/>
+                      </a:solidFill>
+                      <a:prstDash val="solid"/>
+                      <a:round/>
+                      <a:headEnd type="none" w="med" len="med"/>
+                      <a:tailEnd type="none" w="med" len="med"/>
+                    </a:lnR>
+                    <a:lnT w="6350" cap="flat" cmpd="sng" algn="ctr">
+                      <a:solidFill>
+                        <a:srgbClr val="CCCCCC"/>
+                      </a:solidFill>
+                      <a:prstDash val="solid"/>
+                      <a:round/>
+                      <a:headEnd type="none" w="med" len="med"/>
+                      <a:tailEnd type="none" w="med" len="med"/>
+                    </a:lnT>
+                    <a:lnB w="6350" cap="flat" cmpd="sng" algn="ctr">
+                      <a:solidFill>
+                        <a:srgbClr val="CCCCCC"/>
+                      </a:solidFill>
+                      <a:prstDash val="solid"/>
+                      <a:round/>
+                      <a:headEnd type="none" w="med" len="med"/>
+                      <a:tailEnd type="none" w="med" len="med"/>
+                    </a:lnB>
+                  </a:tcPr>
+                </a:tc>
+                <a:tc>
+                  <a:txBody>
+                    <a:bodyPr/>
+                    <a:lstStyle/>
+                    <a:p>
+                      <a:pPr algn="ctr" indent="0" marL="0">
+                        <a:buNone/>
+                      </a:pPr>
+                      <a:r>
+                        <a:rPr lang="en-US" sz="1100" dirty="0">
+                          <a:solidFill>
+                            <a:srgbClr val="000000"/>
+                          </a:solidFill>
+                        </a:rPr>
+                        <a:t>0</a:t>
+                      </a:r>
+                      <a:endParaRPr lang="en-US" sz="1100" dirty="0"/>
+                    </a:p>
+                  </a:txBody>
+                  <a:tcPr marL="91440" marR="91440" marT="45720" marB="45720" anchor="ctr">
+                    <a:lnL w="6350" cap="flat" cmpd="sng" algn="ctr">
+                      <a:solidFill>
+                        <a:srgbClr val="CCCCCC"/>
+                      </a:solidFill>
+                      <a:prstDash val="solid"/>
+                      <a:round/>
+                      <a:headEnd type="none" w="med" len="med"/>
+                      <a:tailEnd type="none" w="med" len="med"/>
+                    </a:lnL>
+                    <a:lnR w="6350" cap="flat" cmpd="sng" algn="ctr">
+                      <a:solidFill>
+                        <a:srgbClr val="CCCCCC"/>
+                      </a:solidFill>
+                      <a:prstDash val="solid"/>
+                      <a:round/>
+                      <a:headEnd type="none" w="med" len="med"/>
+                      <a:tailEnd type="none" w="med" len="med"/>
+                    </a:lnR>
+                    <a:lnT w="6350" cap="flat" cmpd="sng" algn="ctr">
+                      <a:solidFill>
+                        <a:srgbClr val="CCCCCC"/>
+                      </a:solidFill>
+                      <a:prstDash val="solid"/>
+                      <a:round/>
+                      <a:headEnd type="none" w="med" len="med"/>
+                      <a:tailEnd type="none" w="med" len="med"/>
+                    </a:lnT>
+                    <a:lnB w="6350" cap="flat" cmpd="sng" algn="ctr">
+                      <a:solidFill>
+                        <a:srgbClr val="CCCCCC"/>
+                      </a:solidFill>
+                      <a:prstDash val="solid"/>
+                      <a:round/>
+                      <a:headEnd type="none" w="med" len="med"/>
+                      <a:tailEnd type="none" w="med" len="med"/>
+                    </a:lnB>
+                  </a:tcPr>
+                </a:tc>
+              </a:tr>
+              <a:tr h="326571">
+                <a:tc>
+                  <a:txBody>
+                    <a:bodyPr/>
+                    <a:lstStyle/>
+                    <a:p>
+                      <a:pPr algn="ctr" indent="0" marL="0">
+                        <a:buNone/>
+                      </a:pPr>
+                      <a:r>
+                        <a:rPr lang="en-US" sz="1100" dirty="0">
+                          <a:solidFill>
+                            <a:srgbClr val="000000"/>
+                          </a:solidFill>
+                        </a:rPr>
+                        <a:t>Tenant Isolation</a:t>
+                      </a:r>
+                      <a:endParaRPr lang="en-US" sz="1100" dirty="0"/>
+                    </a:p>
+                  </a:txBody>
+                  <a:tcPr marL="91440" marR="91440" marT="45720" marB="45720" anchor="ctr">
+                    <a:lnL w="6350" cap="flat" cmpd="sng" algn="ctr">
+                      <a:solidFill>
+                        <a:srgbClr val="CCCCCC"/>
+                      </a:solidFill>
+                      <a:prstDash val="solid"/>
+                      <a:round/>
+                      <a:headEnd type="none" w="med" len="med"/>
+                      <a:tailEnd type="none" w="med" len="med"/>
+                    </a:lnL>
+                    <a:lnR w="6350" cap="flat" cmpd="sng" algn="ctr">
+                      <a:solidFill>
+                        <a:srgbClr val="CCCCCC"/>
+                      </a:solidFill>
+                      <a:prstDash val="solid"/>
+                      <a:round/>
+                      <a:headEnd type="none" w="med" len="med"/>
+                      <a:tailEnd type="none" w="med" len="med"/>
+                    </a:lnR>
+                    <a:lnT w="6350" cap="flat" cmpd="sng" algn="ctr">
+                      <a:solidFill>
+                        <a:srgbClr val="CCCCCC"/>
+                      </a:solidFill>
+                      <a:prstDash val="solid"/>
+                      <a:round/>
+                      <a:headEnd type="none" w="med" len="med"/>
+                      <a:tailEnd type="none" w="med" len="med"/>
+                    </a:lnT>
+                    <a:lnB w="6350" cap="flat" cmpd="sng" algn="ctr">
+                      <a:solidFill>
+                        <a:srgbClr val="CCCCCC"/>
+                      </a:solidFill>
+                      <a:prstDash val="solid"/>
+                      <a:round/>
+                      <a:headEnd type="none" w="med" len="med"/>
+                      <a:tailEnd type="none" w="med" len="med"/>
+                    </a:lnB>
+                  </a:tcPr>
+                </a:tc>
+                <a:tc>
+                  <a:txBody>
+                    <a:bodyPr/>
+                    <a:lstStyle/>
+                    <a:p>
+                      <a:pPr algn="ctr" indent="0" marL="0">
+                        <a:buNone/>
+                      </a:pPr>
+                      <a:r>
+                        <a:rPr lang="en-US" sz="1100" dirty="0">
+                          <a:solidFill>
+                            <a:srgbClr val="000000"/>
+                          </a:solidFill>
+                        </a:rPr>
+                        <a:t>Verified</a:t>
+                      </a:r>
+                      <a:endParaRPr lang="en-US" sz="1100" dirty="0"/>
+                    </a:p>
+                  </a:txBody>
+                  <a:tcPr marL="91440" marR="91440" marT="45720" marB="45720" anchor="ctr">
+                    <a:lnL w="6350" cap="flat" cmpd="sng" algn="ctr">
+                      <a:solidFill>
+                        <a:srgbClr val="CCCCCC"/>
+                      </a:solidFill>
+                      <a:prstDash val="solid"/>
+                      <a:round/>
+                      <a:headEnd type="none" w="med" len="med"/>
+                      <a:tailEnd type="none" w="med" len="med"/>
+                    </a:lnL>
+                    <a:lnR w="6350" cap="flat" cmpd="sng" algn="ctr">
+                      <a:solidFill>
+                        <a:srgbClr val="CCCCCC"/>
+                      </a:solidFill>
+                      <a:prstDash val="solid"/>
+                      <a:round/>
+                      <a:headEnd type="none" w="med" len="med"/>
+                      <a:tailEnd type="none" w="med" len="med"/>
+                    </a:lnR>
+                    <a:lnT w="6350" cap="flat" cmpd="sng" algn="ctr">
+                      <a:solidFill>
+                        <a:srgbClr val="CCCCCC"/>
+                      </a:solidFill>
+                      <a:prstDash val="solid"/>
+                      <a:round/>
+                      <a:headEnd type="none" w="med" len="med"/>
+                      <a:tailEnd type="none" w="med" len="med"/>
+                    </a:lnT>
+                    <a:lnB w="6350" cap="flat" cmpd="sng" algn="ctr">
+                      <a:solidFill>
+                        <a:srgbClr val="CCCCCC"/>
+                      </a:solidFill>
+                      <a:prstDash val="solid"/>
+                      <a:round/>
+                      <a:headEnd type="none" w="med" len="med"/>
+                      <a:tailEnd type="none" w="med" len="med"/>
+                    </a:lnB>
+                  </a:tcPr>
+                </a:tc>
+              </a:tr>
+              <a:tr h="326571">
+                <a:tc>
+                  <a:txBody>
+                    <a:bodyPr/>
+                    <a:lstStyle/>
+                    <a:p>
+                      <a:pPr algn="ctr" indent="0" marL="0">
+                        <a:buNone/>
+                      </a:pPr>
+                      <a:r>
+                        <a:rPr lang="en-US" sz="1100" dirty="0">
+                          <a:solidFill>
+                            <a:srgbClr val="000000"/>
+                          </a:solidFill>
+                        </a:rPr>
+                        <a:t>Overall Status</a:t>
+                      </a:r>
+                      <a:endParaRPr lang="en-US" sz="1100" dirty="0"/>
+                    </a:p>
+                  </a:txBody>
+                  <a:tcPr marL="91440" marR="91440" marT="45720" marB="45720" anchor="ctr">
+                    <a:lnL w="6350" cap="flat" cmpd="sng" algn="ctr">
+                      <a:solidFill>
+                        <a:srgbClr val="CCCCCC"/>
+                      </a:solidFill>
+                      <a:prstDash val="solid"/>
+                      <a:round/>
+                      <a:headEnd type="none" w="med" len="med"/>
+                      <a:tailEnd type="none" w="med" len="med"/>
+                    </a:lnL>
+                    <a:lnR w="6350" cap="flat" cmpd="sng" algn="ctr">
+                      <a:solidFill>
+                        <a:srgbClr val="CCCCCC"/>
+                      </a:solidFill>
+                      <a:prstDash val="solid"/>
+                      <a:round/>
+                      <a:headEnd type="none" w="med" len="med"/>
+                      <a:tailEnd type="none" w="med" len="med"/>
+                    </a:lnR>
+                    <a:lnT w="6350" cap="flat" cmpd="sng" algn="ctr">
+                      <a:solidFill>
+                        <a:srgbClr val="CCCCCC"/>
+                      </a:solidFill>
+                      <a:prstDash val="solid"/>
+                      <a:round/>
+                      <a:headEnd type="none" w="med" len="med"/>
+                      <a:tailEnd type="none" w="med" len="med"/>
+                    </a:lnT>
+                    <a:lnB w="6350" cap="flat" cmpd="sng" algn="ctr">
+                      <a:solidFill>
+                        <a:srgbClr val="CCCCCC"/>
+                      </a:solidFill>
+                      <a:prstDash val="solid"/>
+                      <a:round/>
+                      <a:headEnd type="none" w="med" len="med"/>
+                      <a:tailEnd type="none" w="med" len="med"/>
+                    </a:lnB>
+                  </a:tcPr>
+                </a:tc>
+                <a:tc>
+                  <a:txBody>
+                    <a:bodyPr/>
+                    <a:lstStyle/>
+                    <a:p>
+                      <a:pPr algn="ctr" indent="0" marL="0">
+                        <a:buNone/>
+                      </a:pPr>
+                      <a:r>
+                        <a:rPr lang="en-US" sz="1100" dirty="0">
+                          <a:solidFill>
+                            <a:srgbClr val="000000"/>
+                          </a:solidFill>
+                        </a:rPr>
+                        <a:t>PASS</a:t>
+                      </a:r>
+                      <a:endParaRPr lang="en-US" sz="1100" dirty="0"/>
+                    </a:p>
+                  </a:txBody>
+                  <a:tcPr marL="91440" marR="91440" marT="45720" marB="45720" anchor="ctr">
+                    <a:lnL w="6350" cap="flat" cmpd="sng" algn="ctr">
+                      <a:solidFill>
+                        <a:srgbClr val="CCCCCC"/>
+                      </a:solidFill>
+                      <a:prstDash val="solid"/>
+                      <a:round/>
+                      <a:headEnd type="none" w="med" len="med"/>
+                      <a:tailEnd type="none" w="med" len="med"/>
+                    </a:lnL>
+                    <a:lnR w="6350" cap="flat" cmpd="sng" algn="ctr">
+                      <a:solidFill>
+                        <a:srgbClr val="CCCCCC"/>
+                      </a:solidFill>
+                      <a:prstDash val="solid"/>
+                      <a:round/>
+                      <a:headEnd type="none" w="med" len="med"/>
+                      <a:tailEnd type="none" w="med" len="med"/>
+                    </a:lnR>
+                    <a:lnT w="6350" cap="flat" cmpd="sng" algn="ctr">
+                      <a:solidFill>
+                        <a:srgbClr val="CCCCCC"/>
+                      </a:solidFill>
+                      <a:prstDash val="solid"/>
+                      <a:round/>
+                      <a:headEnd type="none" w="med" len="med"/>
+                      <a:tailEnd type="none" w="med" len="med"/>
+                    </a:lnT>
+                    <a:lnB w="6350" cap="flat" cmpd="sng" algn="ctr">
+                      <a:solidFill>
+                        <a:srgbClr val="CCCCCC"/>
+                      </a:solidFill>
+                      <a:prstDash val="solid"/>
+                      <a:round/>
+                      <a:headEnd type="none" w="med" len="med"/>
+                      <a:tailEnd type="none" w="med" len="med"/>
+                    </a:lnB>
+                  </a:tcPr>
+                </a:tc>
+              </a:tr>
+            </a:tbl>
+          </a:graphicData>
+        </a:graphic>
+      </p:graphicFrame>
+      <p:sp>
+        <p:nvSpPr>
+          <p:cNvPr id="6" name="Text 3"/>
+          <p:cNvSpPr/>
+          <p:nvPr/>
+        </p:nvSpPr>
+        <p:spPr>
+          <a:xfrm>
+            <a:off x="4572000" y="1280160"/>
+            <a:ext cx="4114800" cy="365760"/>
+          </a:xfrm>
+          <a:prstGeom prst="rect">
+            <a:avLst/>
+          </a:prstGeom>
+          <a:noFill/>
+          <a:ln/>
+        </p:spPr>
+        <p:txBody>
+          <a:bodyPr wrap="square" rtlCol="0" anchor="ctr"/>
+          <a:lstStyle/>
+          <a:p>
+            <a:pPr indent="0" marL="0">
+              <a:buNone/>
+            </a:pPr>
+            <a:r>
+              <a:rPr lang="en-US" sz="1600" b="1" dirty="0">
+                <a:solidFill>
+                  <a:srgbClr val="0D9488"/>
+                </a:solidFill>
+                <a:latin typeface="Arial" pitchFamily="34" charset="0"/>
+                <a:ea typeface="Arial" pitchFamily="34" charset="-122"/>
+                <a:cs typeface="Arial" pitchFamily="34" charset="-120"/>
+              </a:rPr>
+              <a:t>Performance &amp; Security</a:t>
+            </a:r>
+            <a:endParaRPr lang="en-US" sz="1600" dirty="0"/>
+          </a:p>
+        </p:txBody>
+      </p:sp>
+      <p:graphicFrame>
+        <p:nvGraphicFramePr>
+          <p:cNvPr id="31" name="Table 1"/>
+          <p:cNvGraphicFramePr>
+            <a:graphicFrameLocks noGrp="1"/>
+          </p:cNvGraphicFramePr>
+          <p:nvPr>
+            <p:extLst>
+              <p:ext uri="{D42A27DB-BD31-4B8C-83A1-F6EECF244321}">
+                <p14:modId xmlns:p14="http://schemas.microsoft.com/office/powerpoint/2010/main" val="1579011935"/>
+              </p:ext>
+            </p:extLst>
+          </p:nvPr>
+        </p:nvGraphicFramePr>
+        <p:xfrm>
+          <a:off x="4572000" y="1645920"/>
+          <a:ext cx="4114800" cy="2286000"/>
+        </p:xfrm>
+        <a:graphic>
+          <a:graphicData uri="http://schemas.openxmlformats.org/drawingml/2006/table">
+            <a:tbl>
+              <a:tblPr/>
+              <a:tblGrid>
+                <a:gridCol w="2057400"/>
+                <a:gridCol w="2057400"/>
+              </a:tblGrid>
+              <a:tr h="326571">
+                <a:tc>
+                  <a:txBody>
+                    <a:bodyPr/>
+                    <a:lstStyle/>
+                    <a:p>
+                      <a:pPr algn="ctr" indent="0" marL="0">
+                        <a:buNone/>
+                      </a:pPr>
+                      <a:r>
+                        <a:rPr lang="en-US" sz="1100" b="1" dirty="0">
+                          <a:solidFill>
+                            <a:srgbClr val="FFFFFF"/>
+                          </a:solidFill>
+                        </a:rPr>
+                        <a:t>Aspect</a:t>
+                      </a:r>
+                      <a:endParaRPr lang="en-US" sz="1100" dirty="0"/>
+                    </a:p>
+                  </a:txBody>
+                  <a:tcPr marL="91440" marR="91440" marT="45720" marB="45720" anchor="ctr">
+                    <a:lnL w="6350" cap="flat" cmpd="sng" algn="ctr">
+                      <a:solidFill>
+                        <a:srgbClr val="CCCCCC"/>
+                      </a:solidFill>
+                      <a:prstDash val="solid"/>
+                      <a:round/>
+                      <a:headEnd type="none" w="med" len="med"/>
+                      <a:tailEnd type="none" w="med" len="med"/>
+                    </a:lnL>
+                    <a:lnR w="6350" cap="flat" cmpd="sng" algn="ctr">
+                      <a:solidFill>
+                        <a:srgbClr val="CCCCCC"/>
+                      </a:solidFill>
+                      <a:prstDash val="solid"/>
+                      <a:round/>
+                      <a:headEnd type="none" w="med" len="med"/>
+                      <a:tailEnd type="none" w="med" len="med"/>
+                    </a:lnR>
+                    <a:lnT w="6350" cap="flat" cmpd="sng" algn="ctr">
+                      <a:solidFill>
+                        <a:srgbClr val="CCCCCC"/>
+                      </a:solidFill>
+                      <a:prstDash val="solid"/>
+                      <a:round/>
+                      <a:headEnd type="none" w="med" len="med"/>
+                      <a:tailEnd type="none" w="med" len="med"/>
+                    </a:lnT>
+                    <a:lnB w="6350" cap="flat" cmpd="sng" algn="ctr">
+                      <a:solidFill>
+                        <a:srgbClr val="CCCCCC"/>
+                      </a:solidFill>
+                      <a:prstDash val="solid"/>
+                      <a:round/>
+                      <a:headEnd type="none" w="med" len="med"/>
+                      <a:tailEnd type="none" w="med" len="med"/>
+                    </a:lnB>
+                    <a:solidFill>
+                      <a:srgbClr val="1E40AF"/>
+                    </a:solidFill>
+                  </a:tcPr>
+                </a:tc>
+                <a:tc>
+                  <a:txBody>
+                    <a:bodyPr/>
+                    <a:lstStyle/>
+                    <a:p>
+                      <a:pPr algn="ctr" indent="0" marL="0">
+                        <a:buNone/>
+                      </a:pPr>
+                      <a:r>
+                        <a:rPr lang="en-US" sz="1100" b="1" dirty="0">
+                          <a:solidFill>
+                            <a:srgbClr val="FFFFFF"/>
+                          </a:solidFill>
+                        </a:rPr>
+                        <a:t>Status</a:t>
+                      </a:r>
+                      <a:endParaRPr lang="en-US" sz="1100" dirty="0"/>
+                    </a:p>
+                  </a:txBody>
+                  <a:tcPr marL="91440" marR="91440" marT="45720" marB="45720" anchor="ctr">
+                    <a:lnL w="6350" cap="flat" cmpd="sng" algn="ctr">
+                      <a:solidFill>
+                        <a:srgbClr val="CCCCCC"/>
+                      </a:solidFill>
+                      <a:prstDash val="solid"/>
+                      <a:round/>
+                      <a:headEnd type="none" w="med" len="med"/>
+                      <a:tailEnd type="none" w="med" len="med"/>
+                    </a:lnL>
+                    <a:lnR w="6350" cap="flat" cmpd="sng" algn="ctr">
+                      <a:solidFill>
+                        <a:srgbClr val="CCCCCC"/>
+                      </a:solidFill>
+                      <a:prstDash val="solid"/>
+                      <a:round/>
+                      <a:headEnd type="none" w="med" len="med"/>
+                      <a:tailEnd type="none" w="med" len="med"/>
+                    </a:lnR>
+                    <a:lnT w="6350" cap="flat" cmpd="sng" algn="ctr">
+                      <a:solidFill>
+                        <a:srgbClr val="CCCCCC"/>
+                      </a:solidFill>
+                      <a:prstDash val="solid"/>
+                      <a:round/>
+                      <a:headEnd type="none" w="med" len="med"/>
+                      <a:tailEnd type="none" w="med" len="med"/>
+                    </a:lnT>
+                    <a:lnB w="6350" cap="flat" cmpd="sng" algn="ctr">
+                      <a:solidFill>
+                        <a:srgbClr val="CCCCCC"/>
+                      </a:solidFill>
+                      <a:prstDash val="solid"/>
+                      <a:round/>
+                      <a:headEnd type="none" w="med" len="med"/>
+                      <a:tailEnd type="none" w="med" len="med"/>
+                    </a:lnB>
+                    <a:solidFill>
+                      <a:srgbClr val="1E40AF"/>
+                    </a:solidFill>
+                  </a:tcPr>
+                </a:tc>
+              </a:tr>
+              <a:tr h="326571">
+                <a:tc>
+                  <a:txBody>
+                    <a:bodyPr/>
+                    <a:lstStyle/>
+                    <a:p>
+                      <a:pPr algn="ctr" indent="0" marL="0">
+                        <a:buNone/>
+                      </a:pPr>
+                      <a:r>
+                        <a:rPr lang="en-US" sz="1100" dirty="0">
+                          <a:solidFill>
+                            <a:srgbClr val="000000"/>
+                          </a:solidFill>
+                        </a:rPr>
+                        <a:t>Dashboard Load</a:t>
+                      </a:r>
+                      <a:endParaRPr lang="en-US" sz="1100" dirty="0"/>
+                    </a:p>
+                  </a:txBody>
+                  <a:tcPr marL="91440" marR="91440" marT="45720" marB="45720" anchor="ctr">
+                    <a:lnL w="6350" cap="flat" cmpd="sng" algn="ctr">
+                      <a:solidFill>
+                        <a:srgbClr val="CCCCCC"/>
+                      </a:solidFill>
+                      <a:prstDash val="solid"/>
+                      <a:round/>
+                      <a:headEnd type="none" w="med" len="med"/>
+                      <a:tailEnd type="none" w="med" len="med"/>
+                    </a:lnL>
+                    <a:lnR w="6350" cap="flat" cmpd="sng" algn="ctr">
+                      <a:solidFill>
+                        <a:srgbClr val="CCCCCC"/>
+                      </a:solidFill>
+                      <a:prstDash val="solid"/>
+                      <a:round/>
+                      <a:headEnd type="none" w="med" len="med"/>
+                      <a:tailEnd type="none" w="med" len="med"/>
+                    </a:lnR>
+                    <a:lnT w="6350" cap="flat" cmpd="sng" algn="ctr">
+                      <a:solidFill>
+                        <a:srgbClr val="CCCCCC"/>
+                      </a:solidFill>
+                      <a:prstDash val="solid"/>
+                      <a:round/>
+                      <a:headEnd type="none" w="med" len="med"/>
+                      <a:tailEnd type="none" w="med" len="med"/>
+                    </a:lnT>
+                    <a:lnB w="6350" cap="flat" cmpd="sng" algn="ctr">
+                      <a:solidFill>
+                        <a:srgbClr val="CCCCCC"/>
+                      </a:solidFill>
+                      <a:prstDash val="solid"/>
+                      <a:round/>
+                      <a:headEnd type="none" w="med" len="med"/>
+                      <a:tailEnd type="none" w="med" len="med"/>
+                    </a:lnB>
+                  </a:tcPr>
+                </a:tc>
+                <a:tc>
+                  <a:txBody>
+                    <a:bodyPr/>
+                    <a:lstStyle/>
+                    <a:p>
+                      <a:pPr algn="ctr" indent="0" marL="0">
+                        <a:buNone/>
+                      </a:pPr>
+                      <a:r>
+                        <a:rPr lang="en-US" sz="1100" dirty="0">
+                          <a:solidFill>
+                            <a:srgbClr val="000000"/>
+                          </a:solidFill>
+                        </a:rPr>
+                        <a:t>&lt; 3 seconds</a:t>
+                      </a:r>
+                      <a:endParaRPr lang="en-US" sz="1100" dirty="0"/>
+                    </a:p>
+                  </a:txBody>
+                  <a:tcPr marL="91440" marR="91440" marT="45720" marB="45720" anchor="ctr">
+                    <a:lnL w="6350" cap="flat" cmpd="sng" algn="ctr">
+                      <a:solidFill>
+                        <a:srgbClr val="CCCCCC"/>
+                      </a:solidFill>
+                      <a:prstDash val="solid"/>
+                      <a:round/>
+                      <a:headEnd type="none" w="med" len="med"/>
+                      <a:tailEnd type="none" w="med" len="med"/>
+                    </a:lnL>
+                    <a:lnR w="6350" cap="flat" cmpd="sng" algn="ctr">
+                      <a:solidFill>
+                        <a:srgbClr val="CCCCCC"/>
+                      </a:solidFill>
+                      <a:prstDash val="solid"/>
+                      <a:round/>
+                      <a:headEnd type="none" w="med" len="med"/>
+                      <a:tailEnd type="none" w="med" len="med"/>
+                    </a:lnR>
+                    <a:lnT w="6350" cap="flat" cmpd="sng" algn="ctr">
+                      <a:solidFill>
+                        <a:srgbClr val="CCCCCC"/>
+                      </a:solidFill>
+                      <a:prstDash val="solid"/>
+                      <a:round/>
+                      <a:headEnd type="none" w="med" len="med"/>
+                      <a:tailEnd type="none" w="med" len="med"/>
+                    </a:lnT>
+                    <a:lnB w="6350" cap="flat" cmpd="sng" algn="ctr">
+                      <a:solidFill>
+                        <a:srgbClr val="CCCCCC"/>
+                      </a:solidFill>
+                      <a:prstDash val="solid"/>
+                      <a:round/>
+                      <a:headEnd type="none" w="med" len="med"/>
+                      <a:tailEnd type="none" w="med" len="med"/>
+                    </a:lnB>
+                  </a:tcPr>
+                </a:tc>
+              </a:tr>
+              <a:tr h="326571">
+                <a:tc>
+                  <a:txBody>
+                    <a:bodyPr/>
+                    <a:lstStyle/>
+                    <a:p>
+                      <a:pPr algn="ctr" indent="0" marL="0">
+                        <a:buNone/>
+                      </a:pPr>
+                      <a:r>
+                        <a:rPr lang="en-US" sz="1100" dirty="0">
+                          <a:solidFill>
+                            <a:srgbClr val="000000"/>
+                          </a:solidFill>
+                        </a:rPr>
+                        <a:t>API Response (p95)</a:t>
+                      </a:r>
+                      <a:endParaRPr lang="en-US" sz="1100" dirty="0"/>
+                    </a:p>
+                  </a:txBody>
+                  <a:tcPr marL="91440" marR="91440" marT="45720" marB="45720" anchor="ctr">
+                    <a:lnL w="6350" cap="flat" cmpd="sng" algn="ctr">
+                      <a:solidFill>
+                        <a:srgbClr val="CCCCCC"/>
+                      </a:solidFill>
+                      <a:prstDash val="solid"/>
+                      <a:round/>
+                      <a:headEnd type="none" w="med" len="med"/>
+                      <a:tailEnd type="none" w="med" len="med"/>
+                    </a:lnL>
+                    <a:lnR w="6350" cap="flat" cmpd="sng" algn="ctr">
+                      <a:solidFill>
+                        <a:srgbClr val="CCCCCC"/>
+                      </a:solidFill>
+                      <a:prstDash val="solid"/>
+                      <a:round/>
+                      <a:headEnd type="none" w="med" len="med"/>
+                      <a:tailEnd type="none" w="med" len="med"/>
+                    </a:lnR>
+                    <a:lnT w="6350" cap="flat" cmpd="sng" algn="ctr">
+                      <a:solidFill>
+                        <a:srgbClr val="CCCCCC"/>
+                      </a:solidFill>
+                      <a:prstDash val="solid"/>
+                      <a:round/>
+                      <a:headEnd type="none" w="med" len="med"/>
+                      <a:tailEnd type="none" w="med" len="med"/>
+                    </a:lnT>
+                    <a:lnB w="6350" cap="flat" cmpd="sng" algn="ctr">
+                      <a:solidFill>
+                        <a:srgbClr val="CCCCCC"/>
+                      </a:solidFill>
+                      <a:prstDash val="solid"/>
+                      <a:round/>
+                      <a:headEnd type="none" w="med" len="med"/>
+                      <a:tailEnd type="none" w="med" len="med"/>
+                    </a:lnB>
+                  </a:tcPr>
+                </a:tc>
+                <a:tc>
+                  <a:txBody>
+                    <a:bodyPr/>
+                    <a:lstStyle/>
+                    <a:p>
+                      <a:pPr algn="ctr" indent="0" marL="0">
+                        <a:buNone/>
+                      </a:pPr>
+                      <a:r>
+                        <a:rPr lang="en-US" sz="1100" dirty="0">
+                          <a:solidFill>
+                            <a:srgbClr val="000000"/>
+                          </a:solidFill>
+                        </a:rPr>
+                        <a:t>&lt; 200ms</a:t>
+                      </a:r>
+                      <a:endParaRPr lang="en-US" sz="1100" dirty="0"/>
+                    </a:p>
+                  </a:txBody>
+                  <a:tcPr marL="91440" marR="91440" marT="45720" marB="45720" anchor="ctr">
+                    <a:lnL w="6350" cap="flat" cmpd="sng" algn="ctr">
+                      <a:solidFill>
+                        <a:srgbClr val="CCCCCC"/>
+                      </a:solidFill>
+                      <a:prstDash val="solid"/>
+                      <a:round/>
+                      <a:headEnd type="none" w="med" len="med"/>
+                      <a:tailEnd type="none" w="med" len="med"/>
+                    </a:lnL>
+                    <a:lnR w="6350" cap="flat" cmpd="sng" algn="ctr">
+                      <a:solidFill>
+                        <a:srgbClr val="CCCCCC"/>
+                      </a:solidFill>
+                      <a:prstDash val="solid"/>
+                      <a:round/>
+                      <a:headEnd type="none" w="med" len="med"/>
+                      <a:tailEnd type="none" w="med" len="med"/>
+                    </a:lnR>
+                    <a:lnT w="6350" cap="flat" cmpd="sng" algn="ctr">
+                      <a:solidFill>
+                        <a:srgbClr val="CCCCCC"/>
+                      </a:solidFill>
+                      <a:prstDash val="solid"/>
+                      <a:round/>
+                      <a:headEnd type="none" w="med" len="med"/>
+                      <a:tailEnd type="none" w="med" len="med"/>
+                    </a:lnT>
+                    <a:lnB w="6350" cap="flat" cmpd="sng" algn="ctr">
+                      <a:solidFill>
+                        <a:srgbClr val="CCCCCC"/>
+                      </a:solidFill>
+                      <a:prstDash val="solid"/>
+                      <a:round/>
+                      <a:headEnd type="none" w="med" len="med"/>
+                      <a:tailEnd type="none" w="med" len="med"/>
+                    </a:lnB>
+                  </a:tcPr>
+                </a:tc>
+              </a:tr>
+              <a:tr h="326571">
+                <a:tc>
+                  <a:txBody>
+                    <a:bodyPr/>
+                    <a:lstStyle/>
+                    <a:p>
+                      <a:pPr algn="ctr" indent="0" marL="0">
+                        <a:buNone/>
+                      </a:pPr>
+                      <a:r>
+                        <a:rPr lang="en-US" sz="1100" dirty="0">
+                          <a:solidFill>
+                            <a:srgbClr val="000000"/>
+                          </a:solidFill>
+                        </a:rPr>
+                        <a:t>Uptime SLA</a:t>
+                      </a:r>
+                      <a:endParaRPr lang="en-US" sz="1100" dirty="0"/>
+                    </a:p>
+                  </a:txBody>
+                  <a:tcPr marL="91440" marR="91440" marT="45720" marB="45720" anchor="ctr">
+                    <a:lnL w="6350" cap="flat" cmpd="sng" algn="ctr">
+                      <a:solidFill>
+                        <a:srgbClr val="CCCCCC"/>
+                      </a:solidFill>
+                      <a:prstDash val="solid"/>
+                      <a:round/>
+                      <a:headEnd type="none" w="med" len="med"/>
+                      <a:tailEnd type="none" w="med" len="med"/>
+                    </a:lnL>
+                    <a:lnR w="6350" cap="flat" cmpd="sng" algn="ctr">
+                      <a:solidFill>
+                        <a:srgbClr val="CCCCCC"/>
+                      </a:solidFill>
+                      <a:prstDash val="solid"/>
+                      <a:round/>
+                      <a:headEnd type="none" w="med" len="med"/>
+                      <a:tailEnd type="none" w="med" len="med"/>
+                    </a:lnR>
+                    <a:lnT w="6350" cap="flat" cmpd="sng" algn="ctr">
+                      <a:solidFill>
+                        <a:srgbClr val="CCCCCC"/>
+                      </a:solidFill>
+                      <a:prstDash val="solid"/>
+                      <a:round/>
+                      <a:headEnd type="none" w="med" len="med"/>
+                      <a:tailEnd type="none" w="med" len="med"/>
+                    </a:lnT>
+                    <a:lnB w="6350" cap="flat" cmpd="sng" algn="ctr">
+                      <a:solidFill>
+                        <a:srgbClr val="CCCCCC"/>
+                      </a:solidFill>
+                      <a:prstDash val="solid"/>
+                      <a:round/>
+                      <a:headEnd type="none" w="med" len="med"/>
+                      <a:tailEnd type="none" w="med" len="med"/>
+                    </a:lnB>
+                  </a:tcPr>
+                </a:tc>
+                <a:tc>
+                  <a:txBody>
+                    <a:bodyPr/>
+                    <a:lstStyle/>
+                    <a:p>
+                      <a:pPr algn="ctr" indent="0" marL="0">
+                        <a:buNone/>
+                      </a:pPr>
+                      <a:r>
+                        <a:rPr lang="en-US" sz="1100" dirty="0">
+                          <a:solidFill>
+                            <a:srgbClr val="000000"/>
+                          </a:solidFill>
+                        </a:rPr>
+                        <a:t>99.9%</a:t>
+                      </a:r>
+                      <a:endParaRPr lang="en-US" sz="1100" dirty="0"/>
+                    </a:p>
+                  </a:txBody>
+                  <a:tcPr marL="91440" marR="91440" marT="45720" marB="45720" anchor="ctr">
+                    <a:lnL w="6350" cap="flat" cmpd="sng" algn="ctr">
+                      <a:solidFill>
+                        <a:srgbClr val="CCCCCC"/>
+                      </a:solidFill>
+                      <a:prstDash val="solid"/>
+                      <a:round/>
+                      <a:headEnd type="none" w="med" len="med"/>
+                      <a:tailEnd type="none" w="med" len="med"/>
+                    </a:lnL>
+                    <a:lnR w="6350" cap="flat" cmpd="sng" algn="ctr">
+                      <a:solidFill>
+                        <a:srgbClr val="CCCCCC"/>
+                      </a:solidFill>
+                      <a:prstDash val="solid"/>
+                      <a:round/>
+                      <a:headEnd type="none" w="med" len="med"/>
+                      <a:tailEnd type="none" w="med" len="med"/>
+                    </a:lnR>
+                    <a:lnT w="6350" cap="flat" cmpd="sng" algn="ctr">
+                      <a:solidFill>
+                        <a:srgbClr val="CCCCCC"/>
+                      </a:solidFill>
+                      <a:prstDash val="solid"/>
+                      <a:round/>
+                      <a:headEnd type="none" w="med" len="med"/>
+                      <a:tailEnd type="none" w="med" len="med"/>
+                    </a:lnT>
+                    <a:lnB w="6350" cap="flat" cmpd="sng" algn="ctr">
+                      <a:solidFill>
+                        <a:srgbClr val="CCCCCC"/>
+                      </a:solidFill>
+                      <a:prstDash val="solid"/>
+                      <a:round/>
+                      <a:headEnd type="none" w="med" len="med"/>
+                      <a:tailEnd type="none" w="med" len="med"/>
+                    </a:lnB>
+                  </a:tcPr>
+                </a:tc>
+              </a:tr>
+              <a:tr h="326571">
+                <a:tc>
+                  <a:txBody>
+                    <a:bodyPr/>
+                    <a:lstStyle/>
+                    <a:p>
+                      <a:pPr algn="ctr" indent="0" marL="0">
+                        <a:buNone/>
+                      </a:pPr>
+                      <a:r>
+                        <a:rPr lang="en-US" sz="1100" dirty="0">
+                          <a:solidFill>
+                            <a:srgbClr val="000000"/>
+                          </a:solidFill>
+                        </a:rPr>
+                        <a:t>Encryption</a:t>
+                      </a:r>
+                      <a:endParaRPr lang="en-US" sz="1100" dirty="0"/>
+                    </a:p>
+                  </a:txBody>
+                  <a:tcPr marL="91440" marR="91440" marT="45720" marB="45720" anchor="ctr">
+                    <a:lnL w="6350" cap="flat" cmpd="sng" algn="ctr">
+                      <a:solidFill>
+                        <a:srgbClr val="CCCCCC"/>
+                      </a:solidFill>
+                      <a:prstDash val="solid"/>
+                      <a:round/>
+                      <a:headEnd type="none" w="med" len="med"/>
+                      <a:tailEnd type="none" w="med" len="med"/>
+                    </a:lnL>
+                    <a:lnR w="6350" cap="flat" cmpd="sng" algn="ctr">
+                      <a:solidFill>
+                        <a:srgbClr val="CCCCCC"/>
+                      </a:solidFill>
+                      <a:prstDash val="solid"/>
+                      <a:round/>
+                      <a:headEnd type="none" w="med" len="med"/>
+                      <a:tailEnd type="none" w="med" len="med"/>
+                    </a:lnR>
+                    <a:lnT w="6350" cap="flat" cmpd="sng" algn="ctr">
+                      <a:solidFill>
+                        <a:srgbClr val="CCCCCC"/>
+                      </a:solidFill>
+                      <a:prstDash val="solid"/>
+                      <a:round/>
+                      <a:headEnd type="none" w="med" len="med"/>
+                      <a:tailEnd type="none" w="med" len="med"/>
+                    </a:lnT>
+                    <a:lnB w="6350" cap="flat" cmpd="sng" algn="ctr">
+                      <a:solidFill>
+                        <a:srgbClr val="CCCCCC"/>
+                      </a:solidFill>
+                      <a:prstDash val="solid"/>
+                      <a:round/>
+                      <a:headEnd type="none" w="med" len="med"/>
+                      <a:tailEnd type="none" w="med" len="med"/>
+                    </a:lnB>
+                  </a:tcPr>
+                </a:tc>
+                <a:tc>
+                  <a:txBody>
+                    <a:bodyPr/>
+                    <a:lstStyle/>
+                    <a:p>
+                      <a:pPr algn="ctr" indent="0" marL="0">
+                        <a:buNone/>
+                      </a:pPr>
+                      <a:r>
+                        <a:rPr lang="en-US" sz="1100" dirty="0">
+                          <a:solidFill>
+                            <a:srgbClr val="000000"/>
+                          </a:solidFill>
+                        </a:rPr>
+                        <a:t>AES-256 + TLS 1.3</a:t>
+                      </a:r>
+                      <a:endParaRPr lang="en-US" sz="1100" dirty="0"/>
+                    </a:p>
+                  </a:txBody>
+                  <a:tcPr marL="91440" marR="91440" marT="45720" marB="45720" anchor="ctr">
+                    <a:lnL w="6350" cap="flat" cmpd="sng" algn="ctr">
+                      <a:solidFill>
+                        <a:srgbClr val="CCCCCC"/>
+                      </a:solidFill>
+                      <a:prstDash val="solid"/>
+                      <a:round/>
+                      <a:headEnd type="none" w="med" len="med"/>
+                      <a:tailEnd type="none" w="med" len="med"/>
+                    </a:lnL>
+                    <a:lnR w="6350" cap="flat" cmpd="sng" algn="ctr">
+                      <a:solidFill>
+                        <a:srgbClr val="CCCCCC"/>
+                      </a:solidFill>
+                      <a:prstDash val="solid"/>
+                      <a:round/>
+                      <a:headEnd type="none" w="med" len="med"/>
+                      <a:tailEnd type="none" w="med" len="med"/>
+                    </a:lnR>
+                    <a:lnT w="6350" cap="flat" cmpd="sng" algn="ctr">
+                      <a:solidFill>
+                        <a:srgbClr val="CCCCCC"/>
+                      </a:solidFill>
+                      <a:prstDash val="solid"/>
+                      <a:round/>
+                      <a:headEnd type="none" w="med" len="med"/>
+                      <a:tailEnd type="none" w="med" len="med"/>
+                    </a:lnT>
+                    <a:lnB w="6350" cap="flat" cmpd="sng" algn="ctr">
+                      <a:solidFill>
+                        <a:srgbClr val="CCCCCC"/>
+                      </a:solidFill>
+                      <a:prstDash val="solid"/>
+                      <a:round/>
+                      <a:headEnd type="none" w="med" len="med"/>
+                      <a:tailEnd type="none" w="med" len="med"/>
+                    </a:lnB>
+                  </a:tcPr>
+                </a:tc>
+              </a:tr>
+              <a:tr h="326571">
+                <a:tc>
+                  <a:txBody>
+                    <a:bodyPr/>
+                    <a:lstStyle/>
+                    <a:p>
+                      <a:pPr algn="ctr" indent="0" marL="0">
+                        <a:buNone/>
+                      </a:pPr>
+                      <a:r>
+                        <a:rPr lang="en-US" sz="1100" dirty="0">
+                          <a:solidFill>
+                            <a:srgbClr val="000000"/>
+                          </a:solidFill>
+                        </a:rPr>
+                        <a:t>Data Location</a:t>
+                      </a:r>
+                      <a:endParaRPr lang="en-US" sz="1100" dirty="0"/>
+                    </a:p>
+                  </a:txBody>
+                  <a:tcPr marL="91440" marR="91440" marT="45720" marB="45720" anchor="ctr">
+                    <a:lnL w="6350" cap="flat" cmpd="sng" algn="ctr">
+                      <a:solidFill>
+                        <a:srgbClr val="CCCCCC"/>
+                      </a:solidFill>
+                      <a:prstDash val="solid"/>
+                      <a:round/>
+                      <a:headEnd type="none" w="med" len="med"/>
+                      <a:tailEnd type="none" w="med" len="med"/>
+                    </a:lnL>
+                    <a:lnR w="6350" cap="flat" cmpd="sng" algn="ctr">
+                      <a:solidFill>
+                        <a:srgbClr val="CCCCCC"/>
+                      </a:solidFill>
+                      <a:prstDash val="solid"/>
+                      <a:round/>
+                      <a:headEnd type="none" w="med" len="med"/>
+                      <a:tailEnd type="none" w="med" len="med"/>
+                    </a:lnR>
+                    <a:lnT w="6350" cap="flat" cmpd="sng" algn="ctr">
+                      <a:solidFill>
+                        <a:srgbClr val="CCCCCC"/>
+                      </a:solidFill>
+                      <a:prstDash val="solid"/>
+                      <a:round/>
+                      <a:headEnd type="none" w="med" len="med"/>
+                      <a:tailEnd type="none" w="med" len="med"/>
+                    </a:lnT>
+                    <a:lnB w="6350" cap="flat" cmpd="sng" algn="ctr">
+                      <a:solidFill>
+                        <a:srgbClr val="CCCCCC"/>
+                      </a:solidFill>
+                      <a:prstDash val="solid"/>
+                      <a:round/>
+                      <a:headEnd type="none" w="med" len="med"/>
+                      <a:tailEnd type="none" w="med" len="med"/>
+                    </a:lnB>
+                  </a:tcPr>
+                </a:tc>
+                <a:tc>
+                  <a:txBody>
+                    <a:bodyPr/>
+                    <a:lstStyle/>
+                    <a:p>
+                      <a:pPr algn="ctr" indent="0" marL="0">
+                        <a:buNone/>
+                      </a:pPr>
+                      <a:r>
+                        <a:rPr lang="en-US" sz="1100" dirty="0">
+                          <a:solidFill>
+                            <a:srgbClr val="000000"/>
+                          </a:solidFill>
+                        </a:rPr>
+                        <a:t>AWS Mumbai (India)</a:t>
+                      </a:r>
+                      <a:endParaRPr lang="en-US" sz="1100" dirty="0"/>
+                    </a:p>
+                  </a:txBody>
+                  <a:tcPr marL="91440" marR="91440" marT="45720" marB="45720" anchor="ctr">
+                    <a:lnL w="6350" cap="flat" cmpd="sng" algn="ctr">
+                      <a:solidFill>
+                        <a:srgbClr val="CCCCCC"/>
+                      </a:solidFill>
+                      <a:prstDash val="solid"/>
+                      <a:round/>
+                      <a:headEnd type="none" w="med" len="med"/>
+                      <a:tailEnd type="none" w="med" len="med"/>
+                    </a:lnL>
+                    <a:lnR w="6350" cap="flat" cmpd="sng" algn="ctr">
+                      <a:solidFill>
+                        <a:srgbClr val="CCCCCC"/>
+                      </a:solidFill>
+                      <a:prstDash val="solid"/>
+                      <a:round/>
+                      <a:headEnd type="none" w="med" len="med"/>
+                      <a:tailEnd type="none" w="med" len="med"/>
+                    </a:lnR>
+                    <a:lnT w="6350" cap="flat" cmpd="sng" algn="ctr">
+                      <a:solidFill>
+                        <a:srgbClr val="CCCCCC"/>
+                      </a:solidFill>
+                      <a:prstDash val="solid"/>
+                      <a:round/>
+                      <a:headEnd type="none" w="med" len="med"/>
+                      <a:tailEnd type="none" w="med" len="med"/>
+                    </a:lnT>
+                    <a:lnB w="6350" cap="flat" cmpd="sng" algn="ctr">
+                      <a:solidFill>
+                        <a:srgbClr val="CCCCCC"/>
+                      </a:solidFill>
+                      <a:prstDash val="solid"/>
+                      <a:round/>
+                      <a:headEnd type="none" w="med" len="med"/>
+                      <a:tailEnd type="none" w="med" len="med"/>
+                    </a:lnB>
+                  </a:tcPr>
+                </a:tc>
+              </a:tr>
+              <a:tr h="326571">
+                <a:tc>
+                  <a:txBody>
+                    <a:bodyPr/>
+                    <a:lstStyle/>
+                    <a:p>
+                      <a:pPr algn="ctr" indent="0" marL="0">
+                        <a:buNone/>
+                      </a:pPr>
+                      <a:r>
+                        <a:rPr lang="en-US" sz="1100" dirty="0">
+                          <a:solidFill>
+                            <a:srgbClr val="000000"/>
+                          </a:solidFill>
+                        </a:rPr>
+                        <a:t>Compliance</a:t>
+                      </a:r>
+                      <a:endParaRPr lang="en-US" sz="1100" dirty="0"/>
+                    </a:p>
+                  </a:txBody>
+                  <a:tcPr marL="91440" marR="91440" marT="45720" marB="45720" anchor="ctr">
+                    <a:lnL w="6350" cap="flat" cmpd="sng" algn="ctr">
+                      <a:solidFill>
+                        <a:srgbClr val="CCCCCC"/>
+                      </a:solidFill>
+                      <a:prstDash val="solid"/>
+                      <a:round/>
+                      <a:headEnd type="none" w="med" len="med"/>
+                      <a:tailEnd type="none" w="med" len="med"/>
+                    </a:lnL>
+                    <a:lnR w="6350" cap="flat" cmpd="sng" algn="ctr">
+                      <a:solidFill>
+                        <a:srgbClr val="CCCCCC"/>
+                      </a:solidFill>
+                      <a:prstDash val="solid"/>
+                      <a:round/>
+                      <a:headEnd type="none" w="med" len="med"/>
+                      <a:tailEnd type="none" w="med" len="med"/>
+                    </a:lnR>
+                    <a:lnT w="6350" cap="flat" cmpd="sng" algn="ctr">
+                      <a:solidFill>
+                        <a:srgbClr val="CCCCCC"/>
+                      </a:solidFill>
+                      <a:prstDash val="solid"/>
+                      <a:round/>
+                      <a:headEnd type="none" w="med" len="med"/>
+                      <a:tailEnd type="none" w="med" len="med"/>
+                    </a:lnT>
+                    <a:lnB w="6350" cap="flat" cmpd="sng" algn="ctr">
+                      <a:solidFill>
+                        <a:srgbClr val="CCCCCC"/>
+                      </a:solidFill>
+                      <a:prstDash val="solid"/>
+                      <a:round/>
+                      <a:headEnd type="none" w="med" len="med"/>
+                      <a:tailEnd type="none" w="med" len="med"/>
+                    </a:lnB>
+                  </a:tcPr>
+                </a:tc>
+                <a:tc>
+                  <a:txBody>
+                    <a:bodyPr/>
+                    <a:lstStyle/>
+                    <a:p>
+                      <a:pPr algn="ctr" indent="0" marL="0">
+                        <a:buNone/>
+                      </a:pPr>
+                      <a:r>
+                        <a:rPr lang="en-US" sz="1100" dirty="0">
+                          <a:solidFill>
+                            <a:srgbClr val="000000"/>
+                          </a:solidFill>
+                        </a:rPr>
+                        <a:t>AICTE Ready</a:t>
+                      </a:r>
+                      <a:endParaRPr lang="en-US" sz="1100" dirty="0"/>
+                    </a:p>
+                  </a:txBody>
+                  <a:tcPr marL="91440" marR="91440" marT="45720" marB="45720" anchor="ctr">
+                    <a:lnL w="6350" cap="flat" cmpd="sng" algn="ctr">
+                      <a:solidFill>
+                        <a:srgbClr val="CCCCCC"/>
+                      </a:solidFill>
+                      <a:prstDash val="solid"/>
+                      <a:round/>
+                      <a:headEnd type="none" w="med" len="med"/>
+                      <a:tailEnd type="none" w="med" len="med"/>
+                    </a:lnL>
+                    <a:lnR w="6350" cap="flat" cmpd="sng" algn="ctr">
+                      <a:solidFill>
+                        <a:srgbClr val="CCCCCC"/>
+                      </a:solidFill>
+                      <a:prstDash val="solid"/>
+                      <a:round/>
+                      <a:headEnd type="none" w="med" len="med"/>
+                      <a:tailEnd type="none" w="med" len="med"/>
+                    </a:lnR>
+                    <a:lnT w="6350" cap="flat" cmpd="sng" algn="ctr">
+                      <a:solidFill>
+                        <a:srgbClr val="CCCCCC"/>
+                      </a:solidFill>
+                      <a:prstDash val="solid"/>
+                      <a:round/>
+                      <a:headEnd type="none" w="med" len="med"/>
+                      <a:tailEnd type="none" w="med" len="med"/>
+                    </a:lnT>
+                    <a:lnB w="6350" cap="flat" cmpd="sng" algn="ctr">
+                      <a:solidFill>
+                        <a:srgbClr val="CCCCCC"/>
+                      </a:solidFill>
+                      <a:prstDash val="solid"/>
+                      <a:round/>
+                      <a:headEnd type="none" w="med" len="med"/>
+                      <a:tailEnd type="none" w="med" len="med"/>
+                    </a:lnB>
+                  </a:tcPr>
+                </a:tc>
+              </a:tr>
+            </a:tbl>
+          </a:graphicData>
+        </a:graphic>
+      </p:graphicFrame>
+    </p:spTree>
+  </p:cSld>
+  <p:clrMapOvr>
+    <a:masterClrMapping/>
+  </p:clrMapOvr>
+</p:sld>
+</file>
+
+<file path=ppt/slides/slide16.xml><?xml version="1.0" encoding="utf-8"?>
+<p:sld xmlns:a="http://schemas.openxmlformats.org/drawingml/2006/main" xmlns:r="http://schemas.openxmlformats.org/officeDocument/2006/relationships" xmlns:p="http://schemas.openxmlformats.org/presentationml/2006/main">
+  <p:cSld name="Slide 16">
+    <p:spTree>
+      <p:nvGrpSpPr>
+        <p:cNvPr id="1" name=""/>
+        <p:cNvGrpSpPr/>
+        <p:nvPr/>
+      </p:nvGrpSpPr>
+      <p:grpSpPr>
+        <a:xfrm>
+          <a:off x="0" y="0"/>
+          <a:ext cx="0" cy="0"/>
+          <a:chOff x="0" y="0"/>
+          <a:chExt cx="0" cy="0"/>
+        </a:xfrm>
+      </p:grpSpPr>
+      <p:sp>
+        <p:nvSpPr>
+          <p:cNvPr id="2" name="Shape 0"/>
+          <p:cNvSpPr/>
+          <p:nvPr/>
+        </p:nvSpPr>
+        <p:spPr>
+          <a:xfrm>
+            <a:off x="0" y="0"/>
             <a:ext cx="9144000" cy="1097280"/>
           </a:xfrm>
           <a:prstGeom prst="rect">
@@ -2620,7 +7589,7 @@
       </p:sp>
       <p:graphicFrame>
         <p:nvGraphicFramePr>
-          <p:cNvPr id="11" name="Table 0"/>
+          <p:cNvPr id="17" name="Table 0"/>
           <p:cNvGraphicFramePr>
             <a:graphicFrameLocks noGrp="1"/>
           </p:cNvGraphicFramePr>
@@ -3937,9 +8906,9 @@
 </p:sld>
 </file>
 
-<file path=ppt/slides/slide11.xml><?xml version="1.0" encoding="utf-8"?>
+<file path=ppt/slides/slide17.xml><?xml version="1.0" encoding="utf-8"?>
 <p:sld xmlns:a="http://schemas.openxmlformats.org/drawingml/2006/main" xmlns:r="http://schemas.openxmlformats.org/officeDocument/2006/relationships" xmlns:p="http://schemas.openxmlformats.org/presentationml/2006/main">
-  <p:cSld name="Slide 11">
+  <p:cSld name="Slide 17">
     <p:spTree>
       <p:nvGrpSpPr>
         <p:cNvPr id="1" name=""/>
@@ -4054,7 +9023,7 @@
       </p:sp>
       <p:graphicFrame>
         <p:nvGraphicFramePr>
-          <p:cNvPr id="12" name="Table 0"/>
+          <p:cNvPr id="18" name="Table 0"/>
           <p:cNvGraphicFramePr>
             <a:graphicFrameLocks noGrp="1"/>
           </p:cNvGraphicFramePr>
@@ -5541,7 +10510,7 @@
       </p:sp>
       <p:graphicFrame>
         <p:nvGraphicFramePr>
-          <p:cNvPr id="23" name="Table 1"/>
+          <p:cNvPr id="35" name="Table 1"/>
           <p:cNvGraphicFramePr>
             <a:graphicFrameLocks noGrp="1"/>
           </p:cNvGraphicFramePr>
@@ -6352,9 +11321,9 @@
 </p:sld>
 </file>
 
-<file path=ppt/slides/slide12.xml><?xml version="1.0" encoding="utf-8"?>
+<file path=ppt/slides/slide18.xml><?xml version="1.0" encoding="utf-8"?>
 <p:sld xmlns:a="http://schemas.openxmlformats.org/drawingml/2006/main" xmlns:r="http://schemas.openxmlformats.org/officeDocument/2006/relationships" xmlns:p="http://schemas.openxmlformats.org/presentationml/2006/main">
-  <p:cSld name="Slide 12">
+  <p:cSld name="Slide 18">
     <p:spTree>
       <p:nvGrpSpPr>
         <p:cNvPr id="1" name=""/>
@@ -6430,7 +11399,7 @@
       </p:sp>
       <p:graphicFrame>
         <p:nvGraphicFramePr>
-          <p:cNvPr id="13" name="Table 0"/>
+          <p:cNvPr id="19" name="Table 0"/>
           <p:cNvGraphicFramePr>
             <a:graphicFrameLocks noGrp="1"/>
           </p:cNvGraphicFramePr>
@@ -7786,9 +12755,9 @@
 </p:sld>
 </file>
 
-<file path=ppt/slides/slide13.xml><?xml version="1.0" encoding="utf-8"?>
+<file path=ppt/slides/slide19.xml><?xml version="1.0" encoding="utf-8"?>
 <p:sld xmlns:a="http://schemas.openxmlformats.org/drawingml/2006/main" xmlns:r="http://schemas.openxmlformats.org/officeDocument/2006/relationships" xmlns:p="http://schemas.openxmlformats.org/presentationml/2006/main">
-  <p:cSld name="Slide 13">
+  <p:cSld name="Slide 19">
     <p:spTree>
       <p:nvGrpSpPr>
         <p:cNvPr id="1" name=""/>
@@ -8354,7 +13323,7 @@
       </p:sp>
       <p:graphicFrame>
         <p:nvGraphicFramePr>
-          <p:cNvPr id="14" name="Table 0"/>
+          <p:cNvPr id="20" name="Table 0"/>
           <p:cNvGraphicFramePr>
             <a:graphicFrameLocks noGrp="1"/>
           </p:cNvGraphicFramePr>
@@ -9280,9 +14249,405 @@
 </p:sld>
 </file>
 
-<file path=ppt/slides/slide14.xml><?xml version="1.0" encoding="utf-8"?>
+<file path=ppt/slides/slide2.xml><?xml version="1.0" encoding="utf-8"?>
 <p:sld xmlns:a="http://schemas.openxmlformats.org/drawingml/2006/main" xmlns:r="http://schemas.openxmlformats.org/officeDocument/2006/relationships" xmlns:p="http://schemas.openxmlformats.org/presentationml/2006/main">
-  <p:cSld name="Slide 14">
+  <p:cSld name="Slide 2">
+    <p:spTree>
+      <p:nvGrpSpPr>
+        <p:cNvPr id="1" name=""/>
+        <p:cNvGrpSpPr/>
+        <p:nvPr/>
+      </p:nvGrpSpPr>
+      <p:grpSpPr>
+        <a:xfrm>
+          <a:off x="0" y="0"/>
+          <a:ext cx="0" cy="0"/>
+          <a:chOff x="0" y="0"/>
+          <a:chExt cx="0" cy="0"/>
+        </a:xfrm>
+      </p:grpSpPr>
+      <p:sp>
+        <p:nvSpPr>
+          <p:cNvPr id="2" name="Shape 0"/>
+          <p:cNvSpPr/>
+          <p:nvPr/>
+        </p:nvSpPr>
+        <p:spPr>
+          <a:xfrm>
+            <a:off x="0" y="0"/>
+            <a:ext cx="9144000" cy="1097280"/>
+          </a:xfrm>
+          <a:prstGeom prst="rect">
+            <a:avLst/>
+          </a:prstGeom>
+          <a:solidFill>
+            <a:srgbClr val="1E40AF"/>
+          </a:solidFill>
+          <a:ln/>
+        </p:spPr>
+      </p:sp>
+      <p:sp>
+        <p:nvSpPr>
+          <p:cNvPr id="3" name="Text 1"/>
+          <p:cNvSpPr/>
+          <p:nvPr/>
+        </p:nvSpPr>
+        <p:spPr>
+          <a:xfrm>
+            <a:off x="457200" y="320040"/>
+            <a:ext cx="8229600" cy="457200"/>
+          </a:xfrm>
+          <a:prstGeom prst="rect">
+            <a:avLst/>
+          </a:prstGeom>
+          <a:noFill/>
+          <a:ln/>
+        </p:spPr>
+        <p:txBody>
+          <a:bodyPr wrap="square" rtlCol="0" anchor="ctr"/>
+          <a:lstStyle/>
+          <a:p>
+            <a:pPr indent="0" marL="0">
+              <a:buNone/>
+            </a:pPr>
+            <a:r>
+              <a:rPr lang="en-US" sz="3200" b="1" dirty="0">
+                <a:solidFill>
+                  <a:srgbClr val="FFFFFF"/>
+                </a:solidFill>
+                <a:latin typeface="Arial" pitchFamily="34" charset="0"/>
+                <a:ea typeface="Arial" pitchFamily="34" charset="-122"/>
+                <a:cs typeface="Arial" pitchFamily="34" charset="-120"/>
+              </a:rPr>
+              <a:t>Agenda</a:t>
+            </a:r>
+            <a:endParaRPr lang="en-US" sz="3200" dirty="0"/>
+          </a:p>
+        </p:txBody>
+      </p:sp>
+      <p:sp>
+        <p:nvSpPr>
+          <p:cNvPr id="4" name="Text 2"/>
+          <p:cNvSpPr/>
+          <p:nvPr/>
+        </p:nvSpPr>
+        <p:spPr>
+          <a:xfrm>
+            <a:off x="731520" y="1371600"/>
+            <a:ext cx="7772400" cy="457200"/>
+          </a:xfrm>
+          <a:prstGeom prst="rect">
+            <a:avLst/>
+          </a:prstGeom>
+          <a:noFill/>
+          <a:ln/>
+        </p:spPr>
+        <p:txBody>
+          <a:bodyPr wrap="square" rtlCol="0" anchor="ctr"/>
+          <a:lstStyle/>
+          <a:p>
+            <a:pPr indent="0" marL="0">
+              <a:buNone/>
+            </a:pPr>
+            <a:r>
+              <a:rPr lang="en-US" sz="1800" dirty="0">
+                <a:solidFill>
+                  <a:srgbClr val="1F2937"/>
+                </a:solidFill>
+                <a:latin typeface="Arial" pitchFamily="34" charset="0"/>
+                <a:ea typeface="Arial" pitchFamily="34" charset="-122"/>
+                <a:cs typeface="Arial" pitchFamily="34" charset="-120"/>
+              </a:rPr>
+              <a:t>1. Executive Summary - ROI &amp; Key Differentiators</a:t>
+            </a:r>
+            <a:endParaRPr lang="en-US" sz="1800" dirty="0"/>
+          </a:p>
+        </p:txBody>
+      </p:sp>
+      <p:sp>
+        <p:nvSpPr>
+          <p:cNvPr id="5" name="Text 3"/>
+          <p:cNvSpPr/>
+          <p:nvPr/>
+        </p:nvSpPr>
+        <p:spPr>
+          <a:xfrm>
+            <a:off x="731520" y="1874520"/>
+            <a:ext cx="7772400" cy="457200"/>
+          </a:xfrm>
+          <a:prstGeom prst="rect">
+            <a:avLst/>
+          </a:prstGeom>
+          <a:noFill/>
+          <a:ln/>
+        </p:spPr>
+        <p:txBody>
+          <a:bodyPr wrap="square" rtlCol="0" anchor="ctr"/>
+          <a:lstStyle/>
+          <a:p>
+            <a:pPr indent="0" marL="0">
+              <a:buNone/>
+            </a:pPr>
+            <a:r>
+              <a:rPr lang="en-US" sz="1800" dirty="0">
+                <a:solidFill>
+                  <a:srgbClr val="1F2937"/>
+                </a:solidFill>
+                <a:latin typeface="Arial" pitchFamily="34" charset="0"/>
+                <a:ea typeface="Arial" pitchFamily="34" charset="-122"/>
+                <a:cs typeface="Arial" pitchFamily="34" charset="-120"/>
+              </a:rPr>
+              <a:t>2. The Problem We Solve - Pain Points by Persona</a:t>
+            </a:r>
+            <a:endParaRPr lang="en-US" sz="1800" dirty="0"/>
+          </a:p>
+        </p:txBody>
+      </p:sp>
+      <p:sp>
+        <p:nvSpPr>
+          <p:cNvPr id="6" name="Text 4"/>
+          <p:cNvSpPr/>
+          <p:nvPr/>
+        </p:nvSpPr>
+        <p:spPr>
+          <a:xfrm>
+            <a:off x="731520" y="2377440"/>
+            <a:ext cx="7772400" cy="457200"/>
+          </a:xfrm>
+          <a:prstGeom prst="rect">
+            <a:avLst/>
+          </a:prstGeom>
+          <a:noFill/>
+          <a:ln/>
+        </p:spPr>
+        <p:txBody>
+          <a:bodyPr wrap="square" rtlCol="0" anchor="ctr"/>
+          <a:lstStyle/>
+          <a:p>
+            <a:pPr indent="0" marL="0">
+              <a:buNone/>
+            </a:pPr>
+            <a:r>
+              <a:rPr lang="en-US" sz="1800" dirty="0">
+                <a:solidFill>
+                  <a:srgbClr val="1F2937"/>
+                </a:solidFill>
+                <a:latin typeface="Arial" pitchFamily="34" charset="0"/>
+                <a:ea typeface="Arial" pitchFamily="34" charset="-122"/>
+                <a:cs typeface="Arial" pitchFamily="34" charset="-120"/>
+              </a:rPr>
+              <a:t>3. Our Solution - EduNexus Platform Overview</a:t>
+            </a:r>
+            <a:endParaRPr lang="en-US" sz="1800" dirty="0"/>
+          </a:p>
+        </p:txBody>
+      </p:sp>
+      <p:sp>
+        <p:nvSpPr>
+          <p:cNvPr id="7" name="Text 5"/>
+          <p:cNvSpPr/>
+          <p:nvPr/>
+        </p:nvSpPr>
+        <p:spPr>
+          <a:xfrm>
+            <a:off x="731520" y="2880360"/>
+            <a:ext cx="7772400" cy="457200"/>
+          </a:xfrm>
+          <a:prstGeom prst="rect">
+            <a:avLst/>
+          </a:prstGeom>
+          <a:noFill/>
+          <a:ln/>
+        </p:spPr>
+        <p:txBody>
+          <a:bodyPr wrap="square" rtlCol="0" anchor="ctr"/>
+          <a:lstStyle/>
+          <a:p>
+            <a:pPr indent="0" marL="0">
+              <a:buNone/>
+            </a:pPr>
+            <a:r>
+              <a:rPr lang="en-US" sz="1800" dirty="0">
+                <a:solidFill>
+                  <a:srgbClr val="1F2937"/>
+                </a:solidFill>
+                <a:latin typeface="Arial" pitchFamily="34" charset="0"/>
+                <a:ea typeface="Arial" pitchFamily="34" charset="-122"/>
+                <a:cs typeface="Arial" pitchFamily="34" charset="-120"/>
+              </a:rPr>
+              <a:t>4. Persona-Wise Features &amp; Benefits</a:t>
+            </a:r>
+            <a:endParaRPr lang="en-US" sz="1800" dirty="0"/>
+          </a:p>
+        </p:txBody>
+      </p:sp>
+      <p:sp>
+        <p:nvSpPr>
+          <p:cNvPr id="8" name="Text 6"/>
+          <p:cNvSpPr/>
+          <p:nvPr/>
+        </p:nvSpPr>
+        <p:spPr>
+          <a:xfrm>
+            <a:off x="731520" y="3383280"/>
+            <a:ext cx="7772400" cy="457200"/>
+          </a:xfrm>
+          <a:prstGeom prst="rect">
+            <a:avLst/>
+          </a:prstGeom>
+          <a:noFill/>
+          <a:ln/>
+        </p:spPr>
+        <p:txBody>
+          <a:bodyPr wrap="square" rtlCol="0" anchor="ctr"/>
+          <a:lstStyle/>
+          <a:p>
+            <a:pPr indent="0" marL="0">
+              <a:buNone/>
+            </a:pPr>
+            <a:r>
+              <a:rPr lang="en-US" sz="1800" dirty="0">
+                <a:solidFill>
+                  <a:srgbClr val="1F2937"/>
+                </a:solidFill>
+                <a:latin typeface="Arial" pitchFamily="34" charset="0"/>
+                <a:ea typeface="Arial" pitchFamily="34" charset="-122"/>
+                <a:cs typeface="Arial" pitchFamily="34" charset="-120"/>
+              </a:rPr>
+              <a:t>5. Quality &amp; Reliability Assurance</a:t>
+            </a:r>
+            <a:endParaRPr lang="en-US" sz="1800" dirty="0"/>
+          </a:p>
+        </p:txBody>
+      </p:sp>
+      <p:sp>
+        <p:nvSpPr>
+          <p:cNvPr id="9" name="Text 7"/>
+          <p:cNvSpPr/>
+          <p:nvPr/>
+        </p:nvSpPr>
+        <p:spPr>
+          <a:xfrm>
+            <a:off x="731520" y="3886200"/>
+            <a:ext cx="7772400" cy="457200"/>
+          </a:xfrm>
+          <a:prstGeom prst="rect">
+            <a:avLst/>
+          </a:prstGeom>
+          <a:noFill/>
+          <a:ln/>
+        </p:spPr>
+        <p:txBody>
+          <a:bodyPr wrap="square" rtlCol="0" anchor="ctr"/>
+          <a:lstStyle/>
+          <a:p>
+            <a:pPr indent="0" marL="0">
+              <a:buNone/>
+            </a:pPr>
+            <a:r>
+              <a:rPr lang="en-US" sz="1800" dirty="0">
+                <a:solidFill>
+                  <a:srgbClr val="1F2937"/>
+                </a:solidFill>
+                <a:latin typeface="Arial" pitchFamily="34" charset="0"/>
+                <a:ea typeface="Arial" pitchFamily="34" charset="-122"/>
+                <a:cs typeface="Arial" pitchFamily="34" charset="-120"/>
+              </a:rPr>
+              <a:t>6. AI-Powered Capabilities</a:t>
+            </a:r>
+            <a:endParaRPr lang="en-US" sz="1800" dirty="0"/>
+          </a:p>
+        </p:txBody>
+      </p:sp>
+      <p:sp>
+        <p:nvSpPr>
+          <p:cNvPr id="10" name="Text 8"/>
+          <p:cNvSpPr/>
+          <p:nvPr/>
+        </p:nvSpPr>
+        <p:spPr>
+          <a:xfrm>
+            <a:off x="731520" y="4389120"/>
+            <a:ext cx="7772400" cy="457200"/>
+          </a:xfrm>
+          <a:prstGeom prst="rect">
+            <a:avLst/>
+          </a:prstGeom>
+          <a:noFill/>
+          <a:ln/>
+        </p:spPr>
+        <p:txBody>
+          <a:bodyPr wrap="square" rtlCol="0" anchor="ctr"/>
+          <a:lstStyle/>
+          <a:p>
+            <a:pPr indent="0" marL="0">
+              <a:buNone/>
+            </a:pPr>
+            <a:r>
+              <a:rPr lang="en-US" sz="1800" dirty="0">
+                <a:solidFill>
+                  <a:srgbClr val="1F2937"/>
+                </a:solidFill>
+                <a:latin typeface="Arial" pitchFamily="34" charset="0"/>
+                <a:ea typeface="Arial" pitchFamily="34" charset="-122"/>
+                <a:cs typeface="Arial" pitchFamily="34" charset="-120"/>
+              </a:rPr>
+              <a:t>7. ROI &amp; Time Savings Analysis</a:t>
+            </a:r>
+            <a:endParaRPr lang="en-US" sz="1800" dirty="0"/>
+          </a:p>
+        </p:txBody>
+      </p:sp>
+      <p:sp>
+        <p:nvSpPr>
+          <p:cNvPr id="11" name="Text 9"/>
+          <p:cNvSpPr/>
+          <p:nvPr/>
+        </p:nvSpPr>
+        <p:spPr>
+          <a:xfrm>
+            <a:off x="731520" y="4892040"/>
+            <a:ext cx="7772400" cy="457200"/>
+          </a:xfrm>
+          <a:prstGeom prst="rect">
+            <a:avLst/>
+          </a:prstGeom>
+          <a:noFill/>
+          <a:ln/>
+        </p:spPr>
+        <p:txBody>
+          <a:bodyPr wrap="square" rtlCol="0" anchor="ctr"/>
+          <a:lstStyle/>
+          <a:p>
+            <a:pPr indent="0" marL="0">
+              <a:buNone/>
+            </a:pPr>
+            <a:r>
+              <a:rPr lang="en-US" sz="1800" dirty="0">
+                <a:solidFill>
+                  <a:srgbClr val="1F2937"/>
+                </a:solidFill>
+                <a:latin typeface="Arial" pitchFamily="34" charset="0"/>
+                <a:ea typeface="Arial" pitchFamily="34" charset="-122"/>
+                <a:cs typeface="Arial" pitchFamily="34" charset="-120"/>
+              </a:rPr>
+              <a:t>8. Implementation &amp; Pricing</a:t>
+            </a:r>
+            <a:endParaRPr lang="en-US" sz="1800" dirty="0"/>
+          </a:p>
+        </p:txBody>
+      </p:sp>
+    </p:spTree>
+  </p:cSld>
+  <p:clrMapOvr>
+    <a:masterClrMapping/>
+  </p:clrMapOvr>
+</p:sld>
+</file>
+
+<file path=ppt/slides/slide20.xml><?xml version="1.0" encoding="utf-8"?>
+<p:sld xmlns:a="http://schemas.openxmlformats.org/drawingml/2006/main" xmlns:r="http://schemas.openxmlformats.org/officeDocument/2006/relationships" xmlns:p="http://schemas.openxmlformats.org/presentationml/2006/main">
+  <p:cSld name="Slide 20">
     <p:spTree>
       <p:nvGrpSpPr>
         <p:cNvPr id="1" name=""/>
@@ -9980,9 +15345,9 @@
 </p:sld>
 </file>
 
-<file path=ppt/slides/slide15.xml><?xml version="1.0" encoding="utf-8"?>
+<file path=ppt/slides/slide21.xml><?xml version="1.0" encoding="utf-8"?>
 <p:sld xmlns:a="http://schemas.openxmlformats.org/drawingml/2006/main" xmlns:r="http://schemas.openxmlformats.org/officeDocument/2006/relationships" xmlns:p="http://schemas.openxmlformats.org/presentationml/2006/main">
-  <p:cSld name="Slide 15">
+  <p:cSld name="Slide 21">
     <p:spTree>
       <p:nvGrpSpPr>
         <p:cNvPr id="1" name=""/>
@@ -10376,402 +15741,6 @@
 </p:sld>
 </file>
 
-<file path=ppt/slides/slide2.xml><?xml version="1.0" encoding="utf-8"?>
-<p:sld xmlns:a="http://schemas.openxmlformats.org/drawingml/2006/main" xmlns:r="http://schemas.openxmlformats.org/officeDocument/2006/relationships" xmlns:p="http://schemas.openxmlformats.org/presentationml/2006/main">
-  <p:cSld name="Slide 2">
-    <p:spTree>
-      <p:nvGrpSpPr>
-        <p:cNvPr id="1" name=""/>
-        <p:cNvGrpSpPr/>
-        <p:nvPr/>
-      </p:nvGrpSpPr>
-      <p:grpSpPr>
-        <a:xfrm>
-          <a:off x="0" y="0"/>
-          <a:ext cx="0" cy="0"/>
-          <a:chOff x="0" y="0"/>
-          <a:chExt cx="0" cy="0"/>
-        </a:xfrm>
-      </p:grpSpPr>
-      <p:sp>
-        <p:nvSpPr>
-          <p:cNvPr id="2" name="Shape 0"/>
-          <p:cNvSpPr/>
-          <p:nvPr/>
-        </p:nvSpPr>
-        <p:spPr>
-          <a:xfrm>
-            <a:off x="0" y="0"/>
-            <a:ext cx="9144000" cy="1097280"/>
-          </a:xfrm>
-          <a:prstGeom prst="rect">
-            <a:avLst/>
-          </a:prstGeom>
-          <a:solidFill>
-            <a:srgbClr val="1E40AF"/>
-          </a:solidFill>
-          <a:ln/>
-        </p:spPr>
-      </p:sp>
-      <p:sp>
-        <p:nvSpPr>
-          <p:cNvPr id="3" name="Text 1"/>
-          <p:cNvSpPr/>
-          <p:nvPr/>
-        </p:nvSpPr>
-        <p:spPr>
-          <a:xfrm>
-            <a:off x="457200" y="320040"/>
-            <a:ext cx="8229600" cy="457200"/>
-          </a:xfrm>
-          <a:prstGeom prst="rect">
-            <a:avLst/>
-          </a:prstGeom>
-          <a:noFill/>
-          <a:ln/>
-        </p:spPr>
-        <p:txBody>
-          <a:bodyPr wrap="square" rtlCol="0" anchor="ctr"/>
-          <a:lstStyle/>
-          <a:p>
-            <a:pPr indent="0" marL="0">
-              <a:buNone/>
-            </a:pPr>
-            <a:r>
-              <a:rPr lang="en-US" sz="3200" b="1" dirty="0">
-                <a:solidFill>
-                  <a:srgbClr val="FFFFFF"/>
-                </a:solidFill>
-                <a:latin typeface="Arial" pitchFamily="34" charset="0"/>
-                <a:ea typeface="Arial" pitchFamily="34" charset="-122"/>
-                <a:cs typeface="Arial" pitchFamily="34" charset="-120"/>
-              </a:rPr>
-              <a:t>Agenda</a:t>
-            </a:r>
-            <a:endParaRPr lang="en-US" sz="3200" dirty="0"/>
-          </a:p>
-        </p:txBody>
-      </p:sp>
-      <p:sp>
-        <p:nvSpPr>
-          <p:cNvPr id="4" name="Text 2"/>
-          <p:cNvSpPr/>
-          <p:nvPr/>
-        </p:nvSpPr>
-        <p:spPr>
-          <a:xfrm>
-            <a:off x="731520" y="1371600"/>
-            <a:ext cx="7772400" cy="457200"/>
-          </a:xfrm>
-          <a:prstGeom prst="rect">
-            <a:avLst/>
-          </a:prstGeom>
-          <a:noFill/>
-          <a:ln/>
-        </p:spPr>
-        <p:txBody>
-          <a:bodyPr wrap="square" rtlCol="0" anchor="ctr"/>
-          <a:lstStyle/>
-          <a:p>
-            <a:pPr indent="0" marL="0">
-              <a:buNone/>
-            </a:pPr>
-            <a:r>
-              <a:rPr lang="en-US" sz="1800" dirty="0">
-                <a:solidFill>
-                  <a:srgbClr val="1F2937"/>
-                </a:solidFill>
-                <a:latin typeface="Arial" pitchFamily="34" charset="0"/>
-                <a:ea typeface="Arial" pitchFamily="34" charset="-122"/>
-                <a:cs typeface="Arial" pitchFamily="34" charset="-120"/>
-              </a:rPr>
-              <a:t>1. Executive Summary - ROI &amp; Key Differentiators</a:t>
-            </a:r>
-            <a:endParaRPr lang="en-US" sz="1800" dirty="0"/>
-          </a:p>
-        </p:txBody>
-      </p:sp>
-      <p:sp>
-        <p:nvSpPr>
-          <p:cNvPr id="5" name="Text 3"/>
-          <p:cNvSpPr/>
-          <p:nvPr/>
-        </p:nvSpPr>
-        <p:spPr>
-          <a:xfrm>
-            <a:off x="731520" y="1874520"/>
-            <a:ext cx="7772400" cy="457200"/>
-          </a:xfrm>
-          <a:prstGeom prst="rect">
-            <a:avLst/>
-          </a:prstGeom>
-          <a:noFill/>
-          <a:ln/>
-        </p:spPr>
-        <p:txBody>
-          <a:bodyPr wrap="square" rtlCol="0" anchor="ctr"/>
-          <a:lstStyle/>
-          <a:p>
-            <a:pPr indent="0" marL="0">
-              <a:buNone/>
-            </a:pPr>
-            <a:r>
-              <a:rPr lang="en-US" sz="1800" dirty="0">
-                <a:solidFill>
-                  <a:srgbClr val="1F2937"/>
-                </a:solidFill>
-                <a:latin typeface="Arial" pitchFamily="34" charset="0"/>
-                <a:ea typeface="Arial" pitchFamily="34" charset="-122"/>
-                <a:cs typeface="Arial" pitchFamily="34" charset="-120"/>
-              </a:rPr>
-              <a:t>2. The Problem We Solve - Pain Points by Persona</a:t>
-            </a:r>
-            <a:endParaRPr lang="en-US" sz="1800" dirty="0"/>
-          </a:p>
-        </p:txBody>
-      </p:sp>
-      <p:sp>
-        <p:nvSpPr>
-          <p:cNvPr id="6" name="Text 4"/>
-          <p:cNvSpPr/>
-          <p:nvPr/>
-        </p:nvSpPr>
-        <p:spPr>
-          <a:xfrm>
-            <a:off x="731520" y="2377440"/>
-            <a:ext cx="7772400" cy="457200"/>
-          </a:xfrm>
-          <a:prstGeom prst="rect">
-            <a:avLst/>
-          </a:prstGeom>
-          <a:noFill/>
-          <a:ln/>
-        </p:spPr>
-        <p:txBody>
-          <a:bodyPr wrap="square" rtlCol="0" anchor="ctr"/>
-          <a:lstStyle/>
-          <a:p>
-            <a:pPr indent="0" marL="0">
-              <a:buNone/>
-            </a:pPr>
-            <a:r>
-              <a:rPr lang="en-US" sz="1800" dirty="0">
-                <a:solidFill>
-                  <a:srgbClr val="1F2937"/>
-                </a:solidFill>
-                <a:latin typeface="Arial" pitchFamily="34" charset="0"/>
-                <a:ea typeface="Arial" pitchFamily="34" charset="-122"/>
-                <a:cs typeface="Arial" pitchFamily="34" charset="-120"/>
-              </a:rPr>
-              <a:t>3. Our Solution - EduNexus Platform Overview</a:t>
-            </a:r>
-            <a:endParaRPr lang="en-US" sz="1800" dirty="0"/>
-          </a:p>
-        </p:txBody>
-      </p:sp>
-      <p:sp>
-        <p:nvSpPr>
-          <p:cNvPr id="7" name="Text 5"/>
-          <p:cNvSpPr/>
-          <p:nvPr/>
-        </p:nvSpPr>
-        <p:spPr>
-          <a:xfrm>
-            <a:off x="731520" y="2880360"/>
-            <a:ext cx="7772400" cy="457200"/>
-          </a:xfrm>
-          <a:prstGeom prst="rect">
-            <a:avLst/>
-          </a:prstGeom>
-          <a:noFill/>
-          <a:ln/>
-        </p:spPr>
-        <p:txBody>
-          <a:bodyPr wrap="square" rtlCol="0" anchor="ctr"/>
-          <a:lstStyle/>
-          <a:p>
-            <a:pPr indent="0" marL="0">
-              <a:buNone/>
-            </a:pPr>
-            <a:r>
-              <a:rPr lang="en-US" sz="1800" dirty="0">
-                <a:solidFill>
-                  <a:srgbClr val="1F2937"/>
-                </a:solidFill>
-                <a:latin typeface="Arial" pitchFamily="34" charset="0"/>
-                <a:ea typeface="Arial" pitchFamily="34" charset="-122"/>
-                <a:cs typeface="Arial" pitchFamily="34" charset="-120"/>
-              </a:rPr>
-              <a:t>4. Persona-Wise Features &amp; Benefits</a:t>
-            </a:r>
-            <a:endParaRPr lang="en-US" sz="1800" dirty="0"/>
-          </a:p>
-        </p:txBody>
-      </p:sp>
-      <p:sp>
-        <p:nvSpPr>
-          <p:cNvPr id="8" name="Text 6"/>
-          <p:cNvSpPr/>
-          <p:nvPr/>
-        </p:nvSpPr>
-        <p:spPr>
-          <a:xfrm>
-            <a:off x="731520" y="3383280"/>
-            <a:ext cx="7772400" cy="457200"/>
-          </a:xfrm>
-          <a:prstGeom prst="rect">
-            <a:avLst/>
-          </a:prstGeom>
-          <a:noFill/>
-          <a:ln/>
-        </p:spPr>
-        <p:txBody>
-          <a:bodyPr wrap="square" rtlCol="0" anchor="ctr"/>
-          <a:lstStyle/>
-          <a:p>
-            <a:pPr indent="0" marL="0">
-              <a:buNone/>
-            </a:pPr>
-            <a:r>
-              <a:rPr lang="en-US" sz="1800" dirty="0">
-                <a:solidFill>
-                  <a:srgbClr val="1F2937"/>
-                </a:solidFill>
-                <a:latin typeface="Arial" pitchFamily="34" charset="0"/>
-                <a:ea typeface="Arial" pitchFamily="34" charset="-122"/>
-                <a:cs typeface="Arial" pitchFamily="34" charset="-120"/>
-              </a:rPr>
-              <a:t>5. Quality &amp; Reliability Assurance</a:t>
-            </a:r>
-            <a:endParaRPr lang="en-US" sz="1800" dirty="0"/>
-          </a:p>
-        </p:txBody>
-      </p:sp>
-      <p:sp>
-        <p:nvSpPr>
-          <p:cNvPr id="9" name="Text 7"/>
-          <p:cNvSpPr/>
-          <p:nvPr/>
-        </p:nvSpPr>
-        <p:spPr>
-          <a:xfrm>
-            <a:off x="731520" y="3886200"/>
-            <a:ext cx="7772400" cy="457200"/>
-          </a:xfrm>
-          <a:prstGeom prst="rect">
-            <a:avLst/>
-          </a:prstGeom>
-          <a:noFill/>
-          <a:ln/>
-        </p:spPr>
-        <p:txBody>
-          <a:bodyPr wrap="square" rtlCol="0" anchor="ctr"/>
-          <a:lstStyle/>
-          <a:p>
-            <a:pPr indent="0" marL="0">
-              <a:buNone/>
-            </a:pPr>
-            <a:r>
-              <a:rPr lang="en-US" sz="1800" dirty="0">
-                <a:solidFill>
-                  <a:srgbClr val="1F2937"/>
-                </a:solidFill>
-                <a:latin typeface="Arial" pitchFamily="34" charset="0"/>
-                <a:ea typeface="Arial" pitchFamily="34" charset="-122"/>
-                <a:cs typeface="Arial" pitchFamily="34" charset="-120"/>
-              </a:rPr>
-              <a:t>6. AI-Powered Capabilities</a:t>
-            </a:r>
-            <a:endParaRPr lang="en-US" sz="1800" dirty="0"/>
-          </a:p>
-        </p:txBody>
-      </p:sp>
-      <p:sp>
-        <p:nvSpPr>
-          <p:cNvPr id="10" name="Text 8"/>
-          <p:cNvSpPr/>
-          <p:nvPr/>
-        </p:nvSpPr>
-        <p:spPr>
-          <a:xfrm>
-            <a:off x="731520" y="4389120"/>
-            <a:ext cx="7772400" cy="457200"/>
-          </a:xfrm>
-          <a:prstGeom prst="rect">
-            <a:avLst/>
-          </a:prstGeom>
-          <a:noFill/>
-          <a:ln/>
-        </p:spPr>
-        <p:txBody>
-          <a:bodyPr wrap="square" rtlCol="0" anchor="ctr"/>
-          <a:lstStyle/>
-          <a:p>
-            <a:pPr indent="0" marL="0">
-              <a:buNone/>
-            </a:pPr>
-            <a:r>
-              <a:rPr lang="en-US" sz="1800" dirty="0">
-                <a:solidFill>
-                  <a:srgbClr val="1F2937"/>
-                </a:solidFill>
-                <a:latin typeface="Arial" pitchFamily="34" charset="0"/>
-                <a:ea typeface="Arial" pitchFamily="34" charset="-122"/>
-                <a:cs typeface="Arial" pitchFamily="34" charset="-120"/>
-              </a:rPr>
-              <a:t>7. ROI &amp; Time Savings Analysis</a:t>
-            </a:r>
-            <a:endParaRPr lang="en-US" sz="1800" dirty="0"/>
-          </a:p>
-        </p:txBody>
-      </p:sp>
-      <p:sp>
-        <p:nvSpPr>
-          <p:cNvPr id="11" name="Text 9"/>
-          <p:cNvSpPr/>
-          <p:nvPr/>
-        </p:nvSpPr>
-        <p:spPr>
-          <a:xfrm>
-            <a:off x="731520" y="4892040"/>
-            <a:ext cx="7772400" cy="457200"/>
-          </a:xfrm>
-          <a:prstGeom prst="rect">
-            <a:avLst/>
-          </a:prstGeom>
-          <a:noFill/>
-          <a:ln/>
-        </p:spPr>
-        <p:txBody>
-          <a:bodyPr wrap="square" rtlCol="0" anchor="ctr"/>
-          <a:lstStyle/>
-          <a:p>
-            <a:pPr indent="0" marL="0">
-              <a:buNone/>
-            </a:pPr>
-            <a:r>
-              <a:rPr lang="en-US" sz="1800" dirty="0">
-                <a:solidFill>
-                  <a:srgbClr val="1F2937"/>
-                </a:solidFill>
-                <a:latin typeface="Arial" pitchFamily="34" charset="0"/>
-                <a:ea typeface="Arial" pitchFamily="34" charset="-122"/>
-                <a:cs typeface="Arial" pitchFamily="34" charset="-120"/>
-              </a:rPr>
-              <a:t>8. Implementation &amp; Pricing</a:t>
-            </a:r>
-            <a:endParaRPr lang="en-US" sz="1800" dirty="0"/>
-          </a:p>
-        </p:txBody>
-      </p:sp>
-    </p:spTree>
-  </p:cSld>
-  <p:clrMapOvr>
-    <a:masterClrMapping/>
-  </p:clrMapOvr>
-</p:sld>
-</file>
-
 <file path=ppt/slides/slide3.xml><?xml version="1.0" encoding="utf-8"?>
 <p:sld xmlns:a="http://schemas.openxmlformats.org/drawingml/2006/main" xmlns:r="http://schemas.openxmlformats.org/officeDocument/2006/relationships" xmlns:p="http://schemas.openxmlformats.org/presentationml/2006/main">
   <p:cSld name="Slide 3">
@@ -18654,7 +23623,7 @@
         <p:spPr>
           <a:xfrm>
             <a:off x="0" y="0"/>
-            <a:ext cx="9144000" cy="1097280"/>
+            <a:ext cx="9144000" cy="731520"/>
           </a:xfrm>
           <a:prstGeom prst="rect">
             <a:avLst/>
@@ -18673,8 +23642,8 @@
         </p:nvSpPr>
         <p:spPr>
           <a:xfrm>
-            <a:off x="457200" y="320040"/>
-            <a:ext cx="8229600" cy="457200"/>
+            <a:off x="457200" y="182880"/>
+            <a:ext cx="5486400" cy="365760"/>
           </a:xfrm>
           <a:prstGeom prst="rect">
             <a:avLst/>
@@ -18690,7 +23659,7 @@
               <a:buNone/>
             </a:pPr>
             <a:r>
-              <a:rPr lang="en-US" sz="3200" b="1" dirty="0">
+              <a:rPr lang="en-US" sz="2400" b="1" dirty="0">
                 <a:solidFill>
                   <a:srgbClr val="FFFFFF"/>
                 </a:solidFill>
@@ -18698,9 +23667,9 @@
                 <a:ea typeface="Arial" pitchFamily="34" charset="-122"/>
                 <a:cs typeface="Arial" pitchFamily="34" charset="-120"/>
               </a:rPr>
-              <a:t>Admin Staff: Biggest Impact</a:t>
+              <a:t>Principal Dashboard</a:t>
             </a:r>
-            <a:endParaRPr lang="en-US" sz="3200" dirty="0"/>
+            <a:endParaRPr lang="en-US" sz="2400" dirty="0"/>
           </a:p>
         </p:txBody>
       </p:sp>
@@ -18712,8 +23681,8 @@
         </p:nvSpPr>
         <p:spPr>
           <a:xfrm>
-            <a:off x="457200" y="1280160"/>
-            <a:ext cx="8229600" cy="365760"/>
+            <a:off x="5943600" y="182880"/>
+            <a:ext cx="2743200" cy="365760"/>
           </a:xfrm>
           <a:prstGeom prst="rect">
             <a:avLst/>
@@ -18725,1706 +23694,87 @@
           <a:bodyPr wrap="square" rtlCol="0" anchor="ctr"/>
           <a:lstStyle/>
           <a:p>
-            <a:pPr indent="0" marL="0">
+            <a:pPr algn="r" indent="0" marL="0">
               <a:buNone/>
             </a:pPr>
             <a:r>
-              <a:rPr lang="en-US" sz="1800" b="1" dirty="0">
+              <a:rPr lang="en-US" sz="1200" dirty="0">
                 <a:solidFill>
-                  <a:srgbClr val="059669"/>
+                  <a:srgbClr val="0D9488"/>
                 </a:solidFill>
                 <a:latin typeface="Arial" pitchFamily="34" charset="0"/>
                 <a:ea typeface="Arial" pitchFamily="34" charset="-122"/>
                 <a:cs typeface="Arial" pitchFamily="34" charset="-120"/>
               </a:rPr>
-              <a:t>120 hours saved per month!</a:t>
+              <a:t>Complete college overview at a glance</a:t>
             </a:r>
-            <a:endParaRPr lang="en-US" sz="1800" dirty="0"/>
+            <a:endParaRPr lang="en-US" sz="1200" dirty="0"/>
           </a:p>
         </p:txBody>
       </p:sp>
-      <p:graphicFrame>
-        <p:nvGraphicFramePr>
-          <p:cNvPr id="9" name="Table 0"/>
-          <p:cNvGraphicFramePr>
-            <a:graphicFrameLocks noGrp="1"/>
-          </p:cNvGraphicFramePr>
-          <p:nvPr>
-            <p:extLst>
-              <p:ext uri="{D42A27DB-BD31-4B8C-83A1-F6EECF244321}">
-                <p14:modId xmlns:p14="http://schemas.microsoft.com/office/powerpoint/2010/main" val="1579011935"/>
-              </p:ext>
-            </p:extLst>
-          </p:nvPr>
-        </p:nvGraphicFramePr>
-        <p:xfrm>
-          <a:off x="457200" y="1737360"/>
-          <a:ext cx="8229600" cy="2560320"/>
-        </p:xfrm>
-        <a:graphic>
-          <a:graphicData uri="http://schemas.openxmlformats.org/drawingml/2006/table">
-            <a:tbl>
-              <a:tblPr/>
-              <a:tblGrid>
-                <a:gridCol w="3200400"/>
-                <a:gridCol w="1645920"/>
-                <a:gridCol w="1645920"/>
-                <a:gridCol w="1737360"/>
-              </a:tblGrid>
-              <a:tr h="365760">
-                <a:tc>
-                  <a:txBody>
-                    <a:bodyPr/>
-                    <a:lstStyle/>
-                    <a:p>
-                      <a:pPr algn="ctr" indent="0" marL="0">
-                        <a:buNone/>
-                      </a:pPr>
-                      <a:r>
-                        <a:rPr lang="en-US" sz="1200" b="1" dirty="0">
-                          <a:solidFill>
-                            <a:srgbClr val="FFFFFF"/>
-                          </a:solidFill>
-                        </a:rPr>
-                        <a:t>Task</a:t>
-                      </a:r>
-                      <a:endParaRPr lang="en-US" sz="1200" dirty="0"/>
-                    </a:p>
-                  </a:txBody>
-                  <a:tcPr marL="91440" marR="91440" marT="45720" marB="45720" anchor="ctr">
-                    <a:lnL w="6350" cap="flat" cmpd="sng" algn="ctr">
-                      <a:solidFill>
-                        <a:srgbClr val="CCCCCC"/>
-                      </a:solidFill>
-                      <a:prstDash val="solid"/>
-                      <a:round/>
-                      <a:headEnd type="none" w="med" len="med"/>
-                      <a:tailEnd type="none" w="med" len="med"/>
-                    </a:lnL>
-                    <a:lnR w="6350" cap="flat" cmpd="sng" algn="ctr">
-                      <a:solidFill>
-                        <a:srgbClr val="CCCCCC"/>
-                      </a:solidFill>
-                      <a:prstDash val="solid"/>
-                      <a:round/>
-                      <a:headEnd type="none" w="med" len="med"/>
-                      <a:tailEnd type="none" w="med" len="med"/>
-                    </a:lnR>
-                    <a:lnT w="6350" cap="flat" cmpd="sng" algn="ctr">
-                      <a:solidFill>
-                        <a:srgbClr val="CCCCCC"/>
-                      </a:solidFill>
-                      <a:prstDash val="solid"/>
-                      <a:round/>
-                      <a:headEnd type="none" w="med" len="med"/>
-                      <a:tailEnd type="none" w="med" len="med"/>
-                    </a:lnT>
-                    <a:lnB w="6350" cap="flat" cmpd="sng" algn="ctr">
-                      <a:solidFill>
-                        <a:srgbClr val="CCCCCC"/>
-                      </a:solidFill>
-                      <a:prstDash val="solid"/>
-                      <a:round/>
-                      <a:headEnd type="none" w="med" len="med"/>
-                      <a:tailEnd type="none" w="med" len="med"/>
-                    </a:lnB>
-                    <a:solidFill>
-                      <a:srgbClr val="059669"/>
-                    </a:solidFill>
-                  </a:tcPr>
-                </a:tc>
-                <a:tc>
-                  <a:txBody>
-                    <a:bodyPr/>
-                    <a:lstStyle/>
-                    <a:p>
-                      <a:pPr algn="ctr" indent="0" marL="0">
-                        <a:buNone/>
-                      </a:pPr>
-                      <a:r>
-                        <a:rPr lang="en-US" sz="1200" b="1" dirty="0">
-                          <a:solidFill>
-                            <a:srgbClr val="FFFFFF"/>
-                          </a:solidFill>
-                        </a:rPr>
-                        <a:t>Before</a:t>
-                      </a:r>
-                      <a:endParaRPr lang="en-US" sz="1200" dirty="0"/>
-                    </a:p>
-                  </a:txBody>
-                  <a:tcPr marL="91440" marR="91440" marT="45720" marB="45720" anchor="ctr">
-                    <a:lnL w="6350" cap="flat" cmpd="sng" algn="ctr">
-                      <a:solidFill>
-                        <a:srgbClr val="CCCCCC"/>
-                      </a:solidFill>
-                      <a:prstDash val="solid"/>
-                      <a:round/>
-                      <a:headEnd type="none" w="med" len="med"/>
-                      <a:tailEnd type="none" w="med" len="med"/>
-                    </a:lnL>
-                    <a:lnR w="6350" cap="flat" cmpd="sng" algn="ctr">
-                      <a:solidFill>
-                        <a:srgbClr val="CCCCCC"/>
-                      </a:solidFill>
-                      <a:prstDash val="solid"/>
-                      <a:round/>
-                      <a:headEnd type="none" w="med" len="med"/>
-                      <a:tailEnd type="none" w="med" len="med"/>
-                    </a:lnR>
-                    <a:lnT w="6350" cap="flat" cmpd="sng" algn="ctr">
-                      <a:solidFill>
-                        <a:srgbClr val="CCCCCC"/>
-                      </a:solidFill>
-                      <a:prstDash val="solid"/>
-                      <a:round/>
-                      <a:headEnd type="none" w="med" len="med"/>
-                      <a:tailEnd type="none" w="med" len="med"/>
-                    </a:lnT>
-                    <a:lnB w="6350" cap="flat" cmpd="sng" algn="ctr">
-                      <a:solidFill>
-                        <a:srgbClr val="CCCCCC"/>
-                      </a:solidFill>
-                      <a:prstDash val="solid"/>
-                      <a:round/>
-                      <a:headEnd type="none" w="med" len="med"/>
-                      <a:tailEnd type="none" w="med" len="med"/>
-                    </a:lnB>
-                    <a:solidFill>
-                      <a:srgbClr val="059669"/>
-                    </a:solidFill>
-                  </a:tcPr>
-                </a:tc>
-                <a:tc>
-                  <a:txBody>
-                    <a:bodyPr/>
-                    <a:lstStyle/>
-                    <a:p>
-                      <a:pPr algn="ctr" indent="0" marL="0">
-                        <a:buNone/>
-                      </a:pPr>
-                      <a:r>
-                        <a:rPr lang="en-US" sz="1200" b="1" dirty="0">
-                          <a:solidFill>
-                            <a:srgbClr val="FFFFFF"/>
-                          </a:solidFill>
-                        </a:rPr>
-                        <a:t>After</a:t>
-                      </a:r>
-                      <a:endParaRPr lang="en-US" sz="1200" dirty="0"/>
-                    </a:p>
-                  </a:txBody>
-                  <a:tcPr marL="91440" marR="91440" marT="45720" marB="45720" anchor="ctr">
-                    <a:lnL w="6350" cap="flat" cmpd="sng" algn="ctr">
-                      <a:solidFill>
-                        <a:srgbClr val="CCCCCC"/>
-                      </a:solidFill>
-                      <a:prstDash val="solid"/>
-                      <a:round/>
-                      <a:headEnd type="none" w="med" len="med"/>
-                      <a:tailEnd type="none" w="med" len="med"/>
-                    </a:lnL>
-                    <a:lnR w="6350" cap="flat" cmpd="sng" algn="ctr">
-                      <a:solidFill>
-                        <a:srgbClr val="CCCCCC"/>
-                      </a:solidFill>
-                      <a:prstDash val="solid"/>
-                      <a:round/>
-                      <a:headEnd type="none" w="med" len="med"/>
-                      <a:tailEnd type="none" w="med" len="med"/>
-                    </a:lnR>
-                    <a:lnT w="6350" cap="flat" cmpd="sng" algn="ctr">
-                      <a:solidFill>
-                        <a:srgbClr val="CCCCCC"/>
-                      </a:solidFill>
-                      <a:prstDash val="solid"/>
-                      <a:round/>
-                      <a:headEnd type="none" w="med" len="med"/>
-                      <a:tailEnd type="none" w="med" len="med"/>
-                    </a:lnT>
-                    <a:lnB w="6350" cap="flat" cmpd="sng" algn="ctr">
-                      <a:solidFill>
-                        <a:srgbClr val="CCCCCC"/>
-                      </a:solidFill>
-                      <a:prstDash val="solid"/>
-                      <a:round/>
-                      <a:headEnd type="none" w="med" len="med"/>
-                      <a:tailEnd type="none" w="med" len="med"/>
-                    </a:lnB>
-                    <a:solidFill>
-                      <a:srgbClr val="059669"/>
-                    </a:solidFill>
-                  </a:tcPr>
-                </a:tc>
-                <a:tc>
-                  <a:txBody>
-                    <a:bodyPr/>
-                    <a:lstStyle/>
-                    <a:p>
-                      <a:pPr algn="ctr" indent="0" marL="0">
-                        <a:buNone/>
-                      </a:pPr>
-                      <a:r>
-                        <a:rPr lang="en-US" sz="1200" b="1" dirty="0">
-                          <a:solidFill>
-                            <a:srgbClr val="FFFFFF"/>
-                          </a:solidFill>
-                        </a:rPr>
-                        <a:t>Saved/Month</a:t>
-                      </a:r>
-                      <a:endParaRPr lang="en-US" sz="1200" dirty="0"/>
-                    </a:p>
-                  </a:txBody>
-                  <a:tcPr marL="91440" marR="91440" marT="45720" marB="45720" anchor="ctr">
-                    <a:lnL w="6350" cap="flat" cmpd="sng" algn="ctr">
-                      <a:solidFill>
-                        <a:srgbClr val="CCCCCC"/>
-                      </a:solidFill>
-                      <a:prstDash val="solid"/>
-                      <a:round/>
-                      <a:headEnd type="none" w="med" len="med"/>
-                      <a:tailEnd type="none" w="med" len="med"/>
-                    </a:lnL>
-                    <a:lnR w="6350" cap="flat" cmpd="sng" algn="ctr">
-                      <a:solidFill>
-                        <a:srgbClr val="CCCCCC"/>
-                      </a:solidFill>
-                      <a:prstDash val="solid"/>
-                      <a:round/>
-                      <a:headEnd type="none" w="med" len="med"/>
-                      <a:tailEnd type="none" w="med" len="med"/>
-                    </a:lnR>
-                    <a:lnT w="6350" cap="flat" cmpd="sng" algn="ctr">
-                      <a:solidFill>
-                        <a:srgbClr val="CCCCCC"/>
-                      </a:solidFill>
-                      <a:prstDash val="solid"/>
-                      <a:round/>
-                      <a:headEnd type="none" w="med" len="med"/>
-                      <a:tailEnd type="none" w="med" len="med"/>
-                    </a:lnT>
-                    <a:lnB w="6350" cap="flat" cmpd="sng" algn="ctr">
-                      <a:solidFill>
-                        <a:srgbClr val="CCCCCC"/>
-                      </a:solidFill>
-                      <a:prstDash val="solid"/>
-                      <a:round/>
-                      <a:headEnd type="none" w="med" len="med"/>
-                      <a:tailEnd type="none" w="med" len="med"/>
-                    </a:lnB>
-                    <a:solidFill>
-                      <a:srgbClr val="059669"/>
-                    </a:solidFill>
-                  </a:tcPr>
-                </a:tc>
-              </a:tr>
-              <a:tr h="365760">
-                <a:tc>
-                  <a:txBody>
-                    <a:bodyPr/>
-                    <a:lstStyle/>
-                    <a:p>
-                      <a:pPr algn="ctr" indent="0" marL="0">
-                        <a:buNone/>
-                      </a:pPr>
-                      <a:r>
-                        <a:rPr lang="en-US" sz="1200" dirty="0">
-                          <a:solidFill>
-                            <a:srgbClr val="000000"/>
-                          </a:solidFill>
-                        </a:rPr>
-                        <a:t>Fee collection &amp; receipts</a:t>
-                      </a:r>
-                      <a:endParaRPr lang="en-US" sz="1200" dirty="0"/>
-                    </a:p>
-                  </a:txBody>
-                  <a:tcPr marL="91440" marR="91440" marT="45720" marB="45720" anchor="ctr">
-                    <a:lnL w="6350" cap="flat" cmpd="sng" algn="ctr">
-                      <a:solidFill>
-                        <a:srgbClr val="CCCCCC"/>
-                      </a:solidFill>
-                      <a:prstDash val="solid"/>
-                      <a:round/>
-                      <a:headEnd type="none" w="med" len="med"/>
-                      <a:tailEnd type="none" w="med" len="med"/>
-                    </a:lnL>
-                    <a:lnR w="6350" cap="flat" cmpd="sng" algn="ctr">
-                      <a:solidFill>
-                        <a:srgbClr val="CCCCCC"/>
-                      </a:solidFill>
-                      <a:prstDash val="solid"/>
-                      <a:round/>
-                      <a:headEnd type="none" w="med" len="med"/>
-                      <a:tailEnd type="none" w="med" len="med"/>
-                    </a:lnR>
-                    <a:lnT w="6350" cap="flat" cmpd="sng" algn="ctr">
-                      <a:solidFill>
-                        <a:srgbClr val="CCCCCC"/>
-                      </a:solidFill>
-                      <a:prstDash val="solid"/>
-                      <a:round/>
-                      <a:headEnd type="none" w="med" len="med"/>
-                      <a:tailEnd type="none" w="med" len="med"/>
-                    </a:lnT>
-                    <a:lnB w="6350" cap="flat" cmpd="sng" algn="ctr">
-                      <a:solidFill>
-                        <a:srgbClr val="CCCCCC"/>
-                      </a:solidFill>
-                      <a:prstDash val="solid"/>
-                      <a:round/>
-                      <a:headEnd type="none" w="med" len="med"/>
-                      <a:tailEnd type="none" w="med" len="med"/>
-                    </a:lnB>
-                  </a:tcPr>
-                </a:tc>
-                <a:tc>
-                  <a:txBody>
-                    <a:bodyPr/>
-                    <a:lstStyle/>
-                    <a:p>
-                      <a:pPr algn="ctr" indent="0" marL="0">
-                        <a:buNone/>
-                      </a:pPr>
-                      <a:r>
-                        <a:rPr lang="en-US" sz="1200" dirty="0">
-                          <a:solidFill>
-                            <a:srgbClr val="000000"/>
-                          </a:solidFill>
-                        </a:rPr>
-                        <a:t>40 hrs</a:t>
-                      </a:r>
-                      <a:endParaRPr lang="en-US" sz="1200" dirty="0"/>
-                    </a:p>
-                  </a:txBody>
-                  <a:tcPr marL="91440" marR="91440" marT="45720" marB="45720" anchor="ctr">
-                    <a:lnL w="6350" cap="flat" cmpd="sng" algn="ctr">
-                      <a:solidFill>
-                        <a:srgbClr val="CCCCCC"/>
-                      </a:solidFill>
-                      <a:prstDash val="solid"/>
-                      <a:round/>
-                      <a:headEnd type="none" w="med" len="med"/>
-                      <a:tailEnd type="none" w="med" len="med"/>
-                    </a:lnL>
-                    <a:lnR w="6350" cap="flat" cmpd="sng" algn="ctr">
-                      <a:solidFill>
-                        <a:srgbClr val="CCCCCC"/>
-                      </a:solidFill>
-                      <a:prstDash val="solid"/>
-                      <a:round/>
-                      <a:headEnd type="none" w="med" len="med"/>
-                      <a:tailEnd type="none" w="med" len="med"/>
-                    </a:lnR>
-                    <a:lnT w="6350" cap="flat" cmpd="sng" algn="ctr">
-                      <a:solidFill>
-                        <a:srgbClr val="CCCCCC"/>
-                      </a:solidFill>
-                      <a:prstDash val="solid"/>
-                      <a:round/>
-                      <a:headEnd type="none" w="med" len="med"/>
-                      <a:tailEnd type="none" w="med" len="med"/>
-                    </a:lnT>
-                    <a:lnB w="6350" cap="flat" cmpd="sng" algn="ctr">
-                      <a:solidFill>
-                        <a:srgbClr val="CCCCCC"/>
-                      </a:solidFill>
-                      <a:prstDash val="solid"/>
-                      <a:round/>
-                      <a:headEnd type="none" w="med" len="med"/>
-                      <a:tailEnd type="none" w="med" len="med"/>
-                    </a:lnB>
-                  </a:tcPr>
-                </a:tc>
-                <a:tc>
-                  <a:txBody>
-                    <a:bodyPr/>
-                    <a:lstStyle/>
-                    <a:p>
-                      <a:pPr algn="ctr" indent="0" marL="0">
-                        <a:buNone/>
-                      </a:pPr>
-                      <a:r>
-                        <a:rPr lang="en-US" sz="1200" dirty="0">
-                          <a:solidFill>
-                            <a:srgbClr val="000000"/>
-                          </a:solidFill>
-                        </a:rPr>
-                        <a:t>5 hrs</a:t>
-                      </a:r>
-                      <a:endParaRPr lang="en-US" sz="1200" dirty="0"/>
-                    </a:p>
-                  </a:txBody>
-                  <a:tcPr marL="91440" marR="91440" marT="45720" marB="45720" anchor="ctr">
-                    <a:lnL w="6350" cap="flat" cmpd="sng" algn="ctr">
-                      <a:solidFill>
-                        <a:srgbClr val="CCCCCC"/>
-                      </a:solidFill>
-                      <a:prstDash val="solid"/>
-                      <a:round/>
-                      <a:headEnd type="none" w="med" len="med"/>
-                      <a:tailEnd type="none" w="med" len="med"/>
-                    </a:lnL>
-                    <a:lnR w="6350" cap="flat" cmpd="sng" algn="ctr">
-                      <a:solidFill>
-                        <a:srgbClr val="CCCCCC"/>
-                      </a:solidFill>
-                      <a:prstDash val="solid"/>
-                      <a:round/>
-                      <a:headEnd type="none" w="med" len="med"/>
-                      <a:tailEnd type="none" w="med" len="med"/>
-                    </a:lnR>
-                    <a:lnT w="6350" cap="flat" cmpd="sng" algn="ctr">
-                      <a:solidFill>
-                        <a:srgbClr val="CCCCCC"/>
-                      </a:solidFill>
-                      <a:prstDash val="solid"/>
-                      <a:round/>
-                      <a:headEnd type="none" w="med" len="med"/>
-                      <a:tailEnd type="none" w="med" len="med"/>
-                    </a:lnT>
-                    <a:lnB w="6350" cap="flat" cmpd="sng" algn="ctr">
-                      <a:solidFill>
-                        <a:srgbClr val="CCCCCC"/>
-                      </a:solidFill>
-                      <a:prstDash val="solid"/>
-                      <a:round/>
-                      <a:headEnd type="none" w="med" len="med"/>
-                      <a:tailEnd type="none" w="med" len="med"/>
-                    </a:lnB>
-                  </a:tcPr>
-                </a:tc>
-                <a:tc>
-                  <a:txBody>
-                    <a:bodyPr/>
-                    <a:lstStyle/>
-                    <a:p>
-                      <a:pPr algn="ctr" indent="0" marL="0">
-                        <a:buNone/>
-                      </a:pPr>
-                      <a:r>
-                        <a:rPr lang="en-US" sz="1200" dirty="0">
-                          <a:solidFill>
-                            <a:srgbClr val="000000"/>
-                          </a:solidFill>
-                        </a:rPr>
-                        <a:t>35 hrs</a:t>
-                      </a:r>
-                      <a:endParaRPr lang="en-US" sz="1200" dirty="0"/>
-                    </a:p>
-                  </a:txBody>
-                  <a:tcPr marL="91440" marR="91440" marT="45720" marB="45720" anchor="ctr">
-                    <a:lnL w="6350" cap="flat" cmpd="sng" algn="ctr">
-                      <a:solidFill>
-                        <a:srgbClr val="CCCCCC"/>
-                      </a:solidFill>
-                      <a:prstDash val="solid"/>
-                      <a:round/>
-                      <a:headEnd type="none" w="med" len="med"/>
-                      <a:tailEnd type="none" w="med" len="med"/>
-                    </a:lnL>
-                    <a:lnR w="6350" cap="flat" cmpd="sng" algn="ctr">
-                      <a:solidFill>
-                        <a:srgbClr val="CCCCCC"/>
-                      </a:solidFill>
-                      <a:prstDash val="solid"/>
-                      <a:round/>
-                      <a:headEnd type="none" w="med" len="med"/>
-                      <a:tailEnd type="none" w="med" len="med"/>
-                    </a:lnR>
-                    <a:lnT w="6350" cap="flat" cmpd="sng" algn="ctr">
-                      <a:solidFill>
-                        <a:srgbClr val="CCCCCC"/>
-                      </a:solidFill>
-                      <a:prstDash val="solid"/>
-                      <a:round/>
-                      <a:headEnd type="none" w="med" len="med"/>
-                      <a:tailEnd type="none" w="med" len="med"/>
-                    </a:lnT>
-                    <a:lnB w="6350" cap="flat" cmpd="sng" algn="ctr">
-                      <a:solidFill>
-                        <a:srgbClr val="CCCCCC"/>
-                      </a:solidFill>
-                      <a:prstDash val="solid"/>
-                      <a:round/>
-                      <a:headEnd type="none" w="med" len="med"/>
-                      <a:tailEnd type="none" w="med" len="med"/>
-                    </a:lnB>
-                  </a:tcPr>
-                </a:tc>
-              </a:tr>
-              <a:tr h="365760">
-                <a:tc>
-                  <a:txBody>
-                    <a:bodyPr/>
-                    <a:lstStyle/>
-                    <a:p>
-                      <a:pPr algn="ctr" indent="0" marL="0">
-                        <a:buNone/>
-                      </a:pPr>
-                      <a:r>
-                        <a:rPr lang="en-US" sz="1200" dirty="0">
-                          <a:solidFill>
-                            <a:srgbClr val="000000"/>
-                          </a:solidFill>
-                        </a:rPr>
-                        <a:t>Attendance compilation</a:t>
-                      </a:r>
-                      <a:endParaRPr lang="en-US" sz="1200" dirty="0"/>
-                    </a:p>
-                  </a:txBody>
-                  <a:tcPr marL="91440" marR="91440" marT="45720" marB="45720" anchor="ctr">
-                    <a:lnL w="6350" cap="flat" cmpd="sng" algn="ctr">
-                      <a:solidFill>
-                        <a:srgbClr val="CCCCCC"/>
-                      </a:solidFill>
-                      <a:prstDash val="solid"/>
-                      <a:round/>
-                      <a:headEnd type="none" w="med" len="med"/>
-                      <a:tailEnd type="none" w="med" len="med"/>
-                    </a:lnL>
-                    <a:lnR w="6350" cap="flat" cmpd="sng" algn="ctr">
-                      <a:solidFill>
-                        <a:srgbClr val="CCCCCC"/>
-                      </a:solidFill>
-                      <a:prstDash val="solid"/>
-                      <a:round/>
-                      <a:headEnd type="none" w="med" len="med"/>
-                      <a:tailEnd type="none" w="med" len="med"/>
-                    </a:lnR>
-                    <a:lnT w="6350" cap="flat" cmpd="sng" algn="ctr">
-                      <a:solidFill>
-                        <a:srgbClr val="CCCCCC"/>
-                      </a:solidFill>
-                      <a:prstDash val="solid"/>
-                      <a:round/>
-                      <a:headEnd type="none" w="med" len="med"/>
-                      <a:tailEnd type="none" w="med" len="med"/>
-                    </a:lnT>
-                    <a:lnB w="6350" cap="flat" cmpd="sng" algn="ctr">
-                      <a:solidFill>
-                        <a:srgbClr val="CCCCCC"/>
-                      </a:solidFill>
-                      <a:prstDash val="solid"/>
-                      <a:round/>
-                      <a:headEnd type="none" w="med" len="med"/>
-                      <a:tailEnd type="none" w="med" len="med"/>
-                    </a:lnB>
-                  </a:tcPr>
-                </a:tc>
-                <a:tc>
-                  <a:txBody>
-                    <a:bodyPr/>
-                    <a:lstStyle/>
-                    <a:p>
-                      <a:pPr algn="ctr" indent="0" marL="0">
-                        <a:buNone/>
-                      </a:pPr>
-                      <a:r>
-                        <a:rPr lang="en-US" sz="1200" dirty="0">
-                          <a:solidFill>
-                            <a:srgbClr val="000000"/>
-                          </a:solidFill>
-                        </a:rPr>
-                        <a:t>20 hrs</a:t>
-                      </a:r>
-                      <a:endParaRPr lang="en-US" sz="1200" dirty="0"/>
-                    </a:p>
-                  </a:txBody>
-                  <a:tcPr marL="91440" marR="91440" marT="45720" marB="45720" anchor="ctr">
-                    <a:lnL w="6350" cap="flat" cmpd="sng" algn="ctr">
-                      <a:solidFill>
-                        <a:srgbClr val="CCCCCC"/>
-                      </a:solidFill>
-                      <a:prstDash val="solid"/>
-                      <a:round/>
-                      <a:headEnd type="none" w="med" len="med"/>
-                      <a:tailEnd type="none" w="med" len="med"/>
-                    </a:lnL>
-                    <a:lnR w="6350" cap="flat" cmpd="sng" algn="ctr">
-                      <a:solidFill>
-                        <a:srgbClr val="CCCCCC"/>
-                      </a:solidFill>
-                      <a:prstDash val="solid"/>
-                      <a:round/>
-                      <a:headEnd type="none" w="med" len="med"/>
-                      <a:tailEnd type="none" w="med" len="med"/>
-                    </a:lnR>
-                    <a:lnT w="6350" cap="flat" cmpd="sng" algn="ctr">
-                      <a:solidFill>
-                        <a:srgbClr val="CCCCCC"/>
-                      </a:solidFill>
-                      <a:prstDash val="solid"/>
-                      <a:round/>
-                      <a:headEnd type="none" w="med" len="med"/>
-                      <a:tailEnd type="none" w="med" len="med"/>
-                    </a:lnT>
-                    <a:lnB w="6350" cap="flat" cmpd="sng" algn="ctr">
-                      <a:solidFill>
-                        <a:srgbClr val="CCCCCC"/>
-                      </a:solidFill>
-                      <a:prstDash val="solid"/>
-                      <a:round/>
-                      <a:headEnd type="none" w="med" len="med"/>
-                      <a:tailEnd type="none" w="med" len="med"/>
-                    </a:lnB>
-                  </a:tcPr>
-                </a:tc>
-                <a:tc>
-                  <a:txBody>
-                    <a:bodyPr/>
-                    <a:lstStyle/>
-                    <a:p>
-                      <a:pPr algn="ctr" indent="0" marL="0">
-                        <a:buNone/>
-                      </a:pPr>
-                      <a:r>
-                        <a:rPr lang="en-US" sz="1200" dirty="0">
-                          <a:solidFill>
-                            <a:srgbClr val="000000"/>
-                          </a:solidFill>
-                        </a:rPr>
-                        <a:t>1 hr</a:t>
-                      </a:r>
-                      <a:endParaRPr lang="en-US" sz="1200" dirty="0"/>
-                    </a:p>
-                  </a:txBody>
-                  <a:tcPr marL="91440" marR="91440" marT="45720" marB="45720" anchor="ctr">
-                    <a:lnL w="6350" cap="flat" cmpd="sng" algn="ctr">
-                      <a:solidFill>
-                        <a:srgbClr val="CCCCCC"/>
-                      </a:solidFill>
-                      <a:prstDash val="solid"/>
-                      <a:round/>
-                      <a:headEnd type="none" w="med" len="med"/>
-                      <a:tailEnd type="none" w="med" len="med"/>
-                    </a:lnL>
-                    <a:lnR w="6350" cap="flat" cmpd="sng" algn="ctr">
-                      <a:solidFill>
-                        <a:srgbClr val="CCCCCC"/>
-                      </a:solidFill>
-                      <a:prstDash val="solid"/>
-                      <a:round/>
-                      <a:headEnd type="none" w="med" len="med"/>
-                      <a:tailEnd type="none" w="med" len="med"/>
-                    </a:lnR>
-                    <a:lnT w="6350" cap="flat" cmpd="sng" algn="ctr">
-                      <a:solidFill>
-                        <a:srgbClr val="CCCCCC"/>
-                      </a:solidFill>
-                      <a:prstDash val="solid"/>
-                      <a:round/>
-                      <a:headEnd type="none" w="med" len="med"/>
-                      <a:tailEnd type="none" w="med" len="med"/>
-                    </a:lnT>
-                    <a:lnB w="6350" cap="flat" cmpd="sng" algn="ctr">
-                      <a:solidFill>
-                        <a:srgbClr val="CCCCCC"/>
-                      </a:solidFill>
-                      <a:prstDash val="solid"/>
-                      <a:round/>
-                      <a:headEnd type="none" w="med" len="med"/>
-                      <a:tailEnd type="none" w="med" len="med"/>
-                    </a:lnB>
-                  </a:tcPr>
-                </a:tc>
-                <a:tc>
-                  <a:txBody>
-                    <a:bodyPr/>
-                    <a:lstStyle/>
-                    <a:p>
-                      <a:pPr algn="ctr" indent="0" marL="0">
-                        <a:buNone/>
-                      </a:pPr>
-                      <a:r>
-                        <a:rPr lang="en-US" sz="1200" dirty="0">
-                          <a:solidFill>
-                            <a:srgbClr val="000000"/>
-                          </a:solidFill>
-                        </a:rPr>
-                        <a:t>19 hrs</a:t>
-                      </a:r>
-                      <a:endParaRPr lang="en-US" sz="1200" dirty="0"/>
-                    </a:p>
-                  </a:txBody>
-                  <a:tcPr marL="91440" marR="91440" marT="45720" marB="45720" anchor="ctr">
-                    <a:lnL w="6350" cap="flat" cmpd="sng" algn="ctr">
-                      <a:solidFill>
-                        <a:srgbClr val="CCCCCC"/>
-                      </a:solidFill>
-                      <a:prstDash val="solid"/>
-                      <a:round/>
-                      <a:headEnd type="none" w="med" len="med"/>
-                      <a:tailEnd type="none" w="med" len="med"/>
-                    </a:lnL>
-                    <a:lnR w="6350" cap="flat" cmpd="sng" algn="ctr">
-                      <a:solidFill>
-                        <a:srgbClr val="CCCCCC"/>
-                      </a:solidFill>
-                      <a:prstDash val="solid"/>
-                      <a:round/>
-                      <a:headEnd type="none" w="med" len="med"/>
-                      <a:tailEnd type="none" w="med" len="med"/>
-                    </a:lnR>
-                    <a:lnT w="6350" cap="flat" cmpd="sng" algn="ctr">
-                      <a:solidFill>
-                        <a:srgbClr val="CCCCCC"/>
-                      </a:solidFill>
-                      <a:prstDash val="solid"/>
-                      <a:round/>
-                      <a:headEnd type="none" w="med" len="med"/>
-                      <a:tailEnd type="none" w="med" len="med"/>
-                    </a:lnT>
-                    <a:lnB w="6350" cap="flat" cmpd="sng" algn="ctr">
-                      <a:solidFill>
-                        <a:srgbClr val="CCCCCC"/>
-                      </a:solidFill>
-                      <a:prstDash val="solid"/>
-                      <a:round/>
-                      <a:headEnd type="none" w="med" len="med"/>
-                      <a:tailEnd type="none" w="med" len="med"/>
-                    </a:lnB>
-                  </a:tcPr>
-                </a:tc>
-              </a:tr>
-              <a:tr h="365760">
-                <a:tc>
-                  <a:txBody>
-                    <a:bodyPr/>
-                    <a:lstStyle/>
-                    <a:p>
-                      <a:pPr algn="ctr" indent="0" marL="0">
-                        <a:buNone/>
-                      </a:pPr>
-                      <a:r>
-                        <a:rPr lang="en-US" sz="1200" dirty="0">
-                          <a:solidFill>
-                            <a:srgbClr val="000000"/>
-                          </a:solidFill>
-                        </a:rPr>
-                        <a:t>Report generation</a:t>
-                      </a:r>
-                      <a:endParaRPr lang="en-US" sz="1200" dirty="0"/>
-                    </a:p>
-                  </a:txBody>
-                  <a:tcPr marL="91440" marR="91440" marT="45720" marB="45720" anchor="ctr">
-                    <a:lnL w="6350" cap="flat" cmpd="sng" algn="ctr">
-                      <a:solidFill>
-                        <a:srgbClr val="CCCCCC"/>
-                      </a:solidFill>
-                      <a:prstDash val="solid"/>
-                      <a:round/>
-                      <a:headEnd type="none" w="med" len="med"/>
-                      <a:tailEnd type="none" w="med" len="med"/>
-                    </a:lnL>
-                    <a:lnR w="6350" cap="flat" cmpd="sng" algn="ctr">
-                      <a:solidFill>
-                        <a:srgbClr val="CCCCCC"/>
-                      </a:solidFill>
-                      <a:prstDash val="solid"/>
-                      <a:round/>
-                      <a:headEnd type="none" w="med" len="med"/>
-                      <a:tailEnd type="none" w="med" len="med"/>
-                    </a:lnR>
-                    <a:lnT w="6350" cap="flat" cmpd="sng" algn="ctr">
-                      <a:solidFill>
-                        <a:srgbClr val="CCCCCC"/>
-                      </a:solidFill>
-                      <a:prstDash val="solid"/>
-                      <a:round/>
-                      <a:headEnd type="none" w="med" len="med"/>
-                      <a:tailEnd type="none" w="med" len="med"/>
-                    </a:lnT>
-                    <a:lnB w="6350" cap="flat" cmpd="sng" algn="ctr">
-                      <a:solidFill>
-                        <a:srgbClr val="CCCCCC"/>
-                      </a:solidFill>
-                      <a:prstDash val="solid"/>
-                      <a:round/>
-                      <a:headEnd type="none" w="med" len="med"/>
-                      <a:tailEnd type="none" w="med" len="med"/>
-                    </a:lnB>
-                  </a:tcPr>
-                </a:tc>
-                <a:tc>
-                  <a:txBody>
-                    <a:bodyPr/>
-                    <a:lstStyle/>
-                    <a:p>
-                      <a:pPr algn="ctr" indent="0" marL="0">
-                        <a:buNone/>
-                      </a:pPr>
-                      <a:r>
-                        <a:rPr lang="en-US" sz="1200" dirty="0">
-                          <a:solidFill>
-                            <a:srgbClr val="000000"/>
-                          </a:solidFill>
-                        </a:rPr>
-                        <a:t>16 hrs</a:t>
-                      </a:r>
-                      <a:endParaRPr lang="en-US" sz="1200" dirty="0"/>
-                    </a:p>
-                  </a:txBody>
-                  <a:tcPr marL="91440" marR="91440" marT="45720" marB="45720" anchor="ctr">
-                    <a:lnL w="6350" cap="flat" cmpd="sng" algn="ctr">
-                      <a:solidFill>
-                        <a:srgbClr val="CCCCCC"/>
-                      </a:solidFill>
-                      <a:prstDash val="solid"/>
-                      <a:round/>
-                      <a:headEnd type="none" w="med" len="med"/>
-                      <a:tailEnd type="none" w="med" len="med"/>
-                    </a:lnL>
-                    <a:lnR w="6350" cap="flat" cmpd="sng" algn="ctr">
-                      <a:solidFill>
-                        <a:srgbClr val="CCCCCC"/>
-                      </a:solidFill>
-                      <a:prstDash val="solid"/>
-                      <a:round/>
-                      <a:headEnd type="none" w="med" len="med"/>
-                      <a:tailEnd type="none" w="med" len="med"/>
-                    </a:lnR>
-                    <a:lnT w="6350" cap="flat" cmpd="sng" algn="ctr">
-                      <a:solidFill>
-                        <a:srgbClr val="CCCCCC"/>
-                      </a:solidFill>
-                      <a:prstDash val="solid"/>
-                      <a:round/>
-                      <a:headEnd type="none" w="med" len="med"/>
-                      <a:tailEnd type="none" w="med" len="med"/>
-                    </a:lnT>
-                    <a:lnB w="6350" cap="flat" cmpd="sng" algn="ctr">
-                      <a:solidFill>
-                        <a:srgbClr val="CCCCCC"/>
-                      </a:solidFill>
-                      <a:prstDash val="solid"/>
-                      <a:round/>
-                      <a:headEnd type="none" w="med" len="med"/>
-                      <a:tailEnd type="none" w="med" len="med"/>
-                    </a:lnB>
-                  </a:tcPr>
-                </a:tc>
-                <a:tc>
-                  <a:txBody>
-                    <a:bodyPr/>
-                    <a:lstStyle/>
-                    <a:p>
-                      <a:pPr algn="ctr" indent="0" marL="0">
-                        <a:buNone/>
-                      </a:pPr>
-                      <a:r>
-                        <a:rPr lang="en-US" sz="1200" dirty="0">
-                          <a:solidFill>
-                            <a:srgbClr val="000000"/>
-                          </a:solidFill>
-                        </a:rPr>
-                        <a:t>2 hrs</a:t>
-                      </a:r>
-                      <a:endParaRPr lang="en-US" sz="1200" dirty="0"/>
-                    </a:p>
-                  </a:txBody>
-                  <a:tcPr marL="91440" marR="91440" marT="45720" marB="45720" anchor="ctr">
-                    <a:lnL w="6350" cap="flat" cmpd="sng" algn="ctr">
-                      <a:solidFill>
-                        <a:srgbClr val="CCCCCC"/>
-                      </a:solidFill>
-                      <a:prstDash val="solid"/>
-                      <a:round/>
-                      <a:headEnd type="none" w="med" len="med"/>
-                      <a:tailEnd type="none" w="med" len="med"/>
-                    </a:lnL>
-                    <a:lnR w="6350" cap="flat" cmpd="sng" algn="ctr">
-                      <a:solidFill>
-                        <a:srgbClr val="CCCCCC"/>
-                      </a:solidFill>
-                      <a:prstDash val="solid"/>
-                      <a:round/>
-                      <a:headEnd type="none" w="med" len="med"/>
-                      <a:tailEnd type="none" w="med" len="med"/>
-                    </a:lnR>
-                    <a:lnT w="6350" cap="flat" cmpd="sng" algn="ctr">
-                      <a:solidFill>
-                        <a:srgbClr val="CCCCCC"/>
-                      </a:solidFill>
-                      <a:prstDash val="solid"/>
-                      <a:round/>
-                      <a:headEnd type="none" w="med" len="med"/>
-                      <a:tailEnd type="none" w="med" len="med"/>
-                    </a:lnT>
-                    <a:lnB w="6350" cap="flat" cmpd="sng" algn="ctr">
-                      <a:solidFill>
-                        <a:srgbClr val="CCCCCC"/>
-                      </a:solidFill>
-                      <a:prstDash val="solid"/>
-                      <a:round/>
-                      <a:headEnd type="none" w="med" len="med"/>
-                      <a:tailEnd type="none" w="med" len="med"/>
-                    </a:lnB>
-                  </a:tcPr>
-                </a:tc>
-                <a:tc>
-                  <a:txBody>
-                    <a:bodyPr/>
-                    <a:lstStyle/>
-                    <a:p>
-                      <a:pPr algn="ctr" indent="0" marL="0">
-                        <a:buNone/>
-                      </a:pPr>
-                      <a:r>
-                        <a:rPr lang="en-US" sz="1200" dirty="0">
-                          <a:solidFill>
-                            <a:srgbClr val="000000"/>
-                          </a:solidFill>
-                        </a:rPr>
-                        <a:t>14 hrs</a:t>
-                      </a:r>
-                      <a:endParaRPr lang="en-US" sz="1200" dirty="0"/>
-                    </a:p>
-                  </a:txBody>
-                  <a:tcPr marL="91440" marR="91440" marT="45720" marB="45720" anchor="ctr">
-                    <a:lnL w="6350" cap="flat" cmpd="sng" algn="ctr">
-                      <a:solidFill>
-                        <a:srgbClr val="CCCCCC"/>
-                      </a:solidFill>
-                      <a:prstDash val="solid"/>
-                      <a:round/>
-                      <a:headEnd type="none" w="med" len="med"/>
-                      <a:tailEnd type="none" w="med" len="med"/>
-                    </a:lnL>
-                    <a:lnR w="6350" cap="flat" cmpd="sng" algn="ctr">
-                      <a:solidFill>
-                        <a:srgbClr val="CCCCCC"/>
-                      </a:solidFill>
-                      <a:prstDash val="solid"/>
-                      <a:round/>
-                      <a:headEnd type="none" w="med" len="med"/>
-                      <a:tailEnd type="none" w="med" len="med"/>
-                    </a:lnR>
-                    <a:lnT w="6350" cap="flat" cmpd="sng" algn="ctr">
-                      <a:solidFill>
-                        <a:srgbClr val="CCCCCC"/>
-                      </a:solidFill>
-                      <a:prstDash val="solid"/>
-                      <a:round/>
-                      <a:headEnd type="none" w="med" len="med"/>
-                      <a:tailEnd type="none" w="med" len="med"/>
-                    </a:lnT>
-                    <a:lnB w="6350" cap="flat" cmpd="sng" algn="ctr">
-                      <a:solidFill>
-                        <a:srgbClr val="CCCCCC"/>
-                      </a:solidFill>
-                      <a:prstDash val="solid"/>
-                      <a:round/>
-                      <a:headEnd type="none" w="med" len="med"/>
-                      <a:tailEnd type="none" w="med" len="med"/>
-                    </a:lnB>
-                  </a:tcPr>
-                </a:tc>
-              </a:tr>
-              <a:tr h="365760">
-                <a:tc>
-                  <a:txBody>
-                    <a:bodyPr/>
-                    <a:lstStyle/>
-                    <a:p>
-                      <a:pPr algn="ctr" indent="0" marL="0">
-                        <a:buNone/>
-                      </a:pPr>
-                      <a:r>
-                        <a:rPr lang="en-US" sz="1200" dirty="0">
-                          <a:solidFill>
-                            <a:srgbClr val="000000"/>
-                          </a:solidFill>
-                        </a:rPr>
-                        <a:t>Parent communication</a:t>
-                      </a:r>
-                      <a:endParaRPr lang="en-US" sz="1200" dirty="0"/>
-                    </a:p>
-                  </a:txBody>
-                  <a:tcPr marL="91440" marR="91440" marT="45720" marB="45720" anchor="ctr">
-                    <a:lnL w="6350" cap="flat" cmpd="sng" algn="ctr">
-                      <a:solidFill>
-                        <a:srgbClr val="CCCCCC"/>
-                      </a:solidFill>
-                      <a:prstDash val="solid"/>
-                      <a:round/>
-                      <a:headEnd type="none" w="med" len="med"/>
-                      <a:tailEnd type="none" w="med" len="med"/>
-                    </a:lnL>
-                    <a:lnR w="6350" cap="flat" cmpd="sng" algn="ctr">
-                      <a:solidFill>
-                        <a:srgbClr val="CCCCCC"/>
-                      </a:solidFill>
-                      <a:prstDash val="solid"/>
-                      <a:round/>
-                      <a:headEnd type="none" w="med" len="med"/>
-                      <a:tailEnd type="none" w="med" len="med"/>
-                    </a:lnR>
-                    <a:lnT w="6350" cap="flat" cmpd="sng" algn="ctr">
-                      <a:solidFill>
-                        <a:srgbClr val="CCCCCC"/>
-                      </a:solidFill>
-                      <a:prstDash val="solid"/>
-                      <a:round/>
-                      <a:headEnd type="none" w="med" len="med"/>
-                      <a:tailEnd type="none" w="med" len="med"/>
-                    </a:lnT>
-                    <a:lnB w="6350" cap="flat" cmpd="sng" algn="ctr">
-                      <a:solidFill>
-                        <a:srgbClr val="CCCCCC"/>
-                      </a:solidFill>
-                      <a:prstDash val="solid"/>
-                      <a:round/>
-                      <a:headEnd type="none" w="med" len="med"/>
-                      <a:tailEnd type="none" w="med" len="med"/>
-                    </a:lnB>
-                  </a:tcPr>
-                </a:tc>
-                <a:tc>
-                  <a:txBody>
-                    <a:bodyPr/>
-                    <a:lstStyle/>
-                    <a:p>
-                      <a:pPr algn="ctr" indent="0" marL="0">
-                        <a:buNone/>
-                      </a:pPr>
-                      <a:r>
-                        <a:rPr lang="en-US" sz="1200" dirty="0">
-                          <a:solidFill>
-                            <a:srgbClr val="000000"/>
-                          </a:solidFill>
-                        </a:rPr>
-                        <a:t>40 hrs</a:t>
-                      </a:r>
-                      <a:endParaRPr lang="en-US" sz="1200" dirty="0"/>
-                    </a:p>
-                  </a:txBody>
-                  <a:tcPr marL="91440" marR="91440" marT="45720" marB="45720" anchor="ctr">
-                    <a:lnL w="6350" cap="flat" cmpd="sng" algn="ctr">
-                      <a:solidFill>
-                        <a:srgbClr val="CCCCCC"/>
-                      </a:solidFill>
-                      <a:prstDash val="solid"/>
-                      <a:round/>
-                      <a:headEnd type="none" w="med" len="med"/>
-                      <a:tailEnd type="none" w="med" len="med"/>
-                    </a:lnL>
-                    <a:lnR w="6350" cap="flat" cmpd="sng" algn="ctr">
-                      <a:solidFill>
-                        <a:srgbClr val="CCCCCC"/>
-                      </a:solidFill>
-                      <a:prstDash val="solid"/>
-                      <a:round/>
-                      <a:headEnd type="none" w="med" len="med"/>
-                      <a:tailEnd type="none" w="med" len="med"/>
-                    </a:lnR>
-                    <a:lnT w="6350" cap="flat" cmpd="sng" algn="ctr">
-                      <a:solidFill>
-                        <a:srgbClr val="CCCCCC"/>
-                      </a:solidFill>
-                      <a:prstDash val="solid"/>
-                      <a:round/>
-                      <a:headEnd type="none" w="med" len="med"/>
-                      <a:tailEnd type="none" w="med" len="med"/>
-                    </a:lnT>
-                    <a:lnB w="6350" cap="flat" cmpd="sng" algn="ctr">
-                      <a:solidFill>
-                        <a:srgbClr val="CCCCCC"/>
-                      </a:solidFill>
-                      <a:prstDash val="solid"/>
-                      <a:round/>
-                      <a:headEnd type="none" w="med" len="med"/>
-                      <a:tailEnd type="none" w="med" len="med"/>
-                    </a:lnB>
-                  </a:tcPr>
-                </a:tc>
-                <a:tc>
-                  <a:txBody>
-                    <a:bodyPr/>
-                    <a:lstStyle/>
-                    <a:p>
-                      <a:pPr algn="ctr" indent="0" marL="0">
-                        <a:buNone/>
-                      </a:pPr>
-                      <a:r>
-                        <a:rPr lang="en-US" sz="1200" dirty="0">
-                          <a:solidFill>
-                            <a:srgbClr val="000000"/>
-                          </a:solidFill>
-                        </a:rPr>
-                        <a:t>8 hrs</a:t>
-                      </a:r>
-                      <a:endParaRPr lang="en-US" sz="1200" dirty="0"/>
-                    </a:p>
-                  </a:txBody>
-                  <a:tcPr marL="91440" marR="91440" marT="45720" marB="45720" anchor="ctr">
-                    <a:lnL w="6350" cap="flat" cmpd="sng" algn="ctr">
-                      <a:solidFill>
-                        <a:srgbClr val="CCCCCC"/>
-                      </a:solidFill>
-                      <a:prstDash val="solid"/>
-                      <a:round/>
-                      <a:headEnd type="none" w="med" len="med"/>
-                      <a:tailEnd type="none" w="med" len="med"/>
-                    </a:lnL>
-                    <a:lnR w="6350" cap="flat" cmpd="sng" algn="ctr">
-                      <a:solidFill>
-                        <a:srgbClr val="CCCCCC"/>
-                      </a:solidFill>
-                      <a:prstDash val="solid"/>
-                      <a:round/>
-                      <a:headEnd type="none" w="med" len="med"/>
-                      <a:tailEnd type="none" w="med" len="med"/>
-                    </a:lnR>
-                    <a:lnT w="6350" cap="flat" cmpd="sng" algn="ctr">
-                      <a:solidFill>
-                        <a:srgbClr val="CCCCCC"/>
-                      </a:solidFill>
-                      <a:prstDash val="solid"/>
-                      <a:round/>
-                      <a:headEnd type="none" w="med" len="med"/>
-                      <a:tailEnd type="none" w="med" len="med"/>
-                    </a:lnT>
-                    <a:lnB w="6350" cap="flat" cmpd="sng" algn="ctr">
-                      <a:solidFill>
-                        <a:srgbClr val="CCCCCC"/>
-                      </a:solidFill>
-                      <a:prstDash val="solid"/>
-                      <a:round/>
-                      <a:headEnd type="none" w="med" len="med"/>
-                      <a:tailEnd type="none" w="med" len="med"/>
-                    </a:lnB>
-                  </a:tcPr>
-                </a:tc>
-                <a:tc>
-                  <a:txBody>
-                    <a:bodyPr/>
-                    <a:lstStyle/>
-                    <a:p>
-                      <a:pPr algn="ctr" indent="0" marL="0">
-                        <a:buNone/>
-                      </a:pPr>
-                      <a:r>
-                        <a:rPr lang="en-US" sz="1200" dirty="0">
-                          <a:solidFill>
-                            <a:srgbClr val="000000"/>
-                          </a:solidFill>
-                        </a:rPr>
-                        <a:t>32 hrs</a:t>
-                      </a:r>
-                      <a:endParaRPr lang="en-US" sz="1200" dirty="0"/>
-                    </a:p>
-                  </a:txBody>
-                  <a:tcPr marL="91440" marR="91440" marT="45720" marB="45720" anchor="ctr">
-                    <a:lnL w="6350" cap="flat" cmpd="sng" algn="ctr">
-                      <a:solidFill>
-                        <a:srgbClr val="CCCCCC"/>
-                      </a:solidFill>
-                      <a:prstDash val="solid"/>
-                      <a:round/>
-                      <a:headEnd type="none" w="med" len="med"/>
-                      <a:tailEnd type="none" w="med" len="med"/>
-                    </a:lnL>
-                    <a:lnR w="6350" cap="flat" cmpd="sng" algn="ctr">
-                      <a:solidFill>
-                        <a:srgbClr val="CCCCCC"/>
-                      </a:solidFill>
-                      <a:prstDash val="solid"/>
-                      <a:round/>
-                      <a:headEnd type="none" w="med" len="med"/>
-                      <a:tailEnd type="none" w="med" len="med"/>
-                    </a:lnR>
-                    <a:lnT w="6350" cap="flat" cmpd="sng" algn="ctr">
-                      <a:solidFill>
-                        <a:srgbClr val="CCCCCC"/>
-                      </a:solidFill>
-                      <a:prstDash val="solid"/>
-                      <a:round/>
-                      <a:headEnd type="none" w="med" len="med"/>
-                      <a:tailEnd type="none" w="med" len="med"/>
-                    </a:lnT>
-                    <a:lnB w="6350" cap="flat" cmpd="sng" algn="ctr">
-                      <a:solidFill>
-                        <a:srgbClr val="CCCCCC"/>
-                      </a:solidFill>
-                      <a:prstDash val="solid"/>
-                      <a:round/>
-                      <a:headEnd type="none" w="med" len="med"/>
-                      <a:tailEnd type="none" w="med" len="med"/>
-                    </a:lnB>
-                  </a:tcPr>
-                </a:tc>
-              </a:tr>
-              <a:tr h="365760">
-                <a:tc>
-                  <a:txBody>
-                    <a:bodyPr/>
-                    <a:lstStyle/>
-                    <a:p>
-                      <a:pPr algn="ctr" indent="0" marL="0">
-                        <a:buNone/>
-                      </a:pPr>
-                      <a:r>
-                        <a:rPr lang="en-US" sz="1200" dirty="0">
-                          <a:solidFill>
-                            <a:srgbClr val="000000"/>
-                          </a:solidFill>
-                        </a:rPr>
-                        <a:t>Certificate processing</a:t>
-                      </a:r>
-                      <a:endParaRPr lang="en-US" sz="1200" dirty="0"/>
-                    </a:p>
-                  </a:txBody>
-                  <a:tcPr marL="91440" marR="91440" marT="45720" marB="45720" anchor="ctr">
-                    <a:lnL w="6350" cap="flat" cmpd="sng" algn="ctr">
-                      <a:solidFill>
-                        <a:srgbClr val="CCCCCC"/>
-                      </a:solidFill>
-                      <a:prstDash val="solid"/>
-                      <a:round/>
-                      <a:headEnd type="none" w="med" len="med"/>
-                      <a:tailEnd type="none" w="med" len="med"/>
-                    </a:lnL>
-                    <a:lnR w="6350" cap="flat" cmpd="sng" algn="ctr">
-                      <a:solidFill>
-                        <a:srgbClr val="CCCCCC"/>
-                      </a:solidFill>
-                      <a:prstDash val="solid"/>
-                      <a:round/>
-                      <a:headEnd type="none" w="med" len="med"/>
-                      <a:tailEnd type="none" w="med" len="med"/>
-                    </a:lnR>
-                    <a:lnT w="6350" cap="flat" cmpd="sng" algn="ctr">
-                      <a:solidFill>
-                        <a:srgbClr val="CCCCCC"/>
-                      </a:solidFill>
-                      <a:prstDash val="solid"/>
-                      <a:round/>
-                      <a:headEnd type="none" w="med" len="med"/>
-                      <a:tailEnd type="none" w="med" len="med"/>
-                    </a:lnT>
-                    <a:lnB w="6350" cap="flat" cmpd="sng" algn="ctr">
-                      <a:solidFill>
-                        <a:srgbClr val="CCCCCC"/>
-                      </a:solidFill>
-                      <a:prstDash val="solid"/>
-                      <a:round/>
-                      <a:headEnd type="none" w="med" len="med"/>
-                      <a:tailEnd type="none" w="med" len="med"/>
-                    </a:lnB>
-                  </a:tcPr>
-                </a:tc>
-                <a:tc>
-                  <a:txBody>
-                    <a:bodyPr/>
-                    <a:lstStyle/>
-                    <a:p>
-                      <a:pPr algn="ctr" indent="0" marL="0">
-                        <a:buNone/>
-                      </a:pPr>
-                      <a:r>
-                        <a:rPr lang="en-US" sz="1200" dirty="0">
-                          <a:solidFill>
-                            <a:srgbClr val="000000"/>
-                          </a:solidFill>
-                        </a:rPr>
-                        <a:t>25 hrs</a:t>
-                      </a:r>
-                      <a:endParaRPr lang="en-US" sz="1200" dirty="0"/>
-                    </a:p>
-                  </a:txBody>
-                  <a:tcPr marL="91440" marR="91440" marT="45720" marB="45720" anchor="ctr">
-                    <a:lnL w="6350" cap="flat" cmpd="sng" algn="ctr">
-                      <a:solidFill>
-                        <a:srgbClr val="CCCCCC"/>
-                      </a:solidFill>
-                      <a:prstDash val="solid"/>
-                      <a:round/>
-                      <a:headEnd type="none" w="med" len="med"/>
-                      <a:tailEnd type="none" w="med" len="med"/>
-                    </a:lnL>
-                    <a:lnR w="6350" cap="flat" cmpd="sng" algn="ctr">
-                      <a:solidFill>
-                        <a:srgbClr val="CCCCCC"/>
-                      </a:solidFill>
-                      <a:prstDash val="solid"/>
-                      <a:round/>
-                      <a:headEnd type="none" w="med" len="med"/>
-                      <a:tailEnd type="none" w="med" len="med"/>
-                    </a:lnR>
-                    <a:lnT w="6350" cap="flat" cmpd="sng" algn="ctr">
-                      <a:solidFill>
-                        <a:srgbClr val="CCCCCC"/>
-                      </a:solidFill>
-                      <a:prstDash val="solid"/>
-                      <a:round/>
-                      <a:headEnd type="none" w="med" len="med"/>
-                      <a:tailEnd type="none" w="med" len="med"/>
-                    </a:lnT>
-                    <a:lnB w="6350" cap="flat" cmpd="sng" algn="ctr">
-                      <a:solidFill>
-                        <a:srgbClr val="CCCCCC"/>
-                      </a:solidFill>
-                      <a:prstDash val="solid"/>
-                      <a:round/>
-                      <a:headEnd type="none" w="med" len="med"/>
-                      <a:tailEnd type="none" w="med" len="med"/>
-                    </a:lnB>
-                  </a:tcPr>
-                </a:tc>
-                <a:tc>
-                  <a:txBody>
-                    <a:bodyPr/>
-                    <a:lstStyle/>
-                    <a:p>
-                      <a:pPr algn="ctr" indent="0" marL="0">
-                        <a:buNone/>
-                      </a:pPr>
-                      <a:r>
-                        <a:rPr lang="en-US" sz="1200" dirty="0">
-                          <a:solidFill>
-                            <a:srgbClr val="000000"/>
-                          </a:solidFill>
-                        </a:rPr>
-                        <a:t>5 hrs</a:t>
-                      </a:r>
-                      <a:endParaRPr lang="en-US" sz="1200" dirty="0"/>
-                    </a:p>
-                  </a:txBody>
-                  <a:tcPr marL="91440" marR="91440" marT="45720" marB="45720" anchor="ctr">
-                    <a:lnL w="6350" cap="flat" cmpd="sng" algn="ctr">
-                      <a:solidFill>
-                        <a:srgbClr val="CCCCCC"/>
-                      </a:solidFill>
-                      <a:prstDash val="solid"/>
-                      <a:round/>
-                      <a:headEnd type="none" w="med" len="med"/>
-                      <a:tailEnd type="none" w="med" len="med"/>
-                    </a:lnL>
-                    <a:lnR w="6350" cap="flat" cmpd="sng" algn="ctr">
-                      <a:solidFill>
-                        <a:srgbClr val="CCCCCC"/>
-                      </a:solidFill>
-                      <a:prstDash val="solid"/>
-                      <a:round/>
-                      <a:headEnd type="none" w="med" len="med"/>
-                      <a:tailEnd type="none" w="med" len="med"/>
-                    </a:lnR>
-                    <a:lnT w="6350" cap="flat" cmpd="sng" algn="ctr">
-                      <a:solidFill>
-                        <a:srgbClr val="CCCCCC"/>
-                      </a:solidFill>
-                      <a:prstDash val="solid"/>
-                      <a:round/>
-                      <a:headEnd type="none" w="med" len="med"/>
-                      <a:tailEnd type="none" w="med" len="med"/>
-                    </a:lnT>
-                    <a:lnB w="6350" cap="flat" cmpd="sng" algn="ctr">
-                      <a:solidFill>
-                        <a:srgbClr val="CCCCCC"/>
-                      </a:solidFill>
-                      <a:prstDash val="solid"/>
-                      <a:round/>
-                      <a:headEnd type="none" w="med" len="med"/>
-                      <a:tailEnd type="none" w="med" len="med"/>
-                    </a:lnB>
-                  </a:tcPr>
-                </a:tc>
-                <a:tc>
-                  <a:txBody>
-                    <a:bodyPr/>
-                    <a:lstStyle/>
-                    <a:p>
-                      <a:pPr algn="ctr" indent="0" marL="0">
-                        <a:buNone/>
-                      </a:pPr>
-                      <a:r>
-                        <a:rPr lang="en-US" sz="1200" dirty="0">
-                          <a:solidFill>
-                            <a:srgbClr val="000000"/>
-                          </a:solidFill>
-                        </a:rPr>
-                        <a:t>20 hrs</a:t>
-                      </a:r>
-                      <a:endParaRPr lang="en-US" sz="1200" dirty="0"/>
-                    </a:p>
-                  </a:txBody>
-                  <a:tcPr marL="91440" marR="91440" marT="45720" marB="45720" anchor="ctr">
-                    <a:lnL w="6350" cap="flat" cmpd="sng" algn="ctr">
-                      <a:solidFill>
-                        <a:srgbClr val="CCCCCC"/>
-                      </a:solidFill>
-                      <a:prstDash val="solid"/>
-                      <a:round/>
-                      <a:headEnd type="none" w="med" len="med"/>
-                      <a:tailEnd type="none" w="med" len="med"/>
-                    </a:lnL>
-                    <a:lnR w="6350" cap="flat" cmpd="sng" algn="ctr">
-                      <a:solidFill>
-                        <a:srgbClr val="CCCCCC"/>
-                      </a:solidFill>
-                      <a:prstDash val="solid"/>
-                      <a:round/>
-                      <a:headEnd type="none" w="med" len="med"/>
-                      <a:tailEnd type="none" w="med" len="med"/>
-                    </a:lnR>
-                    <a:lnT w="6350" cap="flat" cmpd="sng" algn="ctr">
-                      <a:solidFill>
-                        <a:srgbClr val="CCCCCC"/>
-                      </a:solidFill>
-                      <a:prstDash val="solid"/>
-                      <a:round/>
-                      <a:headEnd type="none" w="med" len="med"/>
-                      <a:tailEnd type="none" w="med" len="med"/>
-                    </a:lnT>
-                    <a:lnB w="6350" cap="flat" cmpd="sng" algn="ctr">
-                      <a:solidFill>
-                        <a:srgbClr val="CCCCCC"/>
-                      </a:solidFill>
-                      <a:prstDash val="solid"/>
-                      <a:round/>
-                      <a:headEnd type="none" w="med" len="med"/>
-                      <a:tailEnd type="none" w="med" len="med"/>
-                    </a:lnB>
-                  </a:tcPr>
-                </a:tc>
-              </a:tr>
-              <a:tr h="365760">
-                <a:tc>
-                  <a:txBody>
-                    <a:bodyPr/>
-                    <a:lstStyle/>
-                    <a:p>
-                      <a:pPr algn="ctr" indent="0" marL="0">
-                        <a:buNone/>
-                      </a:pPr>
-                      <a:r>
-                        <a:rPr lang="en-US" sz="1200" b="1" dirty="0">
-                          <a:solidFill>
-                            <a:srgbClr val="000000"/>
-                          </a:solidFill>
-                        </a:rPr>
-                        <a:t>TOTAL</a:t>
-                      </a:r>
-                      <a:endParaRPr lang="en-US" sz="1200" dirty="0"/>
-                    </a:p>
-                  </a:txBody>
-                  <a:tcPr marL="91440" marR="91440" marT="45720" marB="45720" anchor="ctr">
-                    <a:lnL w="6350" cap="flat" cmpd="sng" algn="ctr">
-                      <a:solidFill>
-                        <a:srgbClr val="CCCCCC"/>
-                      </a:solidFill>
-                      <a:prstDash val="solid"/>
-                      <a:round/>
-                      <a:headEnd type="none" w="med" len="med"/>
-                      <a:tailEnd type="none" w="med" len="med"/>
-                    </a:lnL>
-                    <a:lnR w="6350" cap="flat" cmpd="sng" algn="ctr">
-                      <a:solidFill>
-                        <a:srgbClr val="CCCCCC"/>
-                      </a:solidFill>
-                      <a:prstDash val="solid"/>
-                      <a:round/>
-                      <a:headEnd type="none" w="med" len="med"/>
-                      <a:tailEnd type="none" w="med" len="med"/>
-                    </a:lnR>
-                    <a:lnT w="6350" cap="flat" cmpd="sng" algn="ctr">
-                      <a:solidFill>
-                        <a:srgbClr val="CCCCCC"/>
-                      </a:solidFill>
-                      <a:prstDash val="solid"/>
-                      <a:round/>
-                      <a:headEnd type="none" w="med" len="med"/>
-                      <a:tailEnd type="none" w="med" len="med"/>
-                    </a:lnT>
-                    <a:lnB w="6350" cap="flat" cmpd="sng" algn="ctr">
-                      <a:solidFill>
-                        <a:srgbClr val="CCCCCC"/>
-                      </a:solidFill>
-                      <a:prstDash val="solid"/>
-                      <a:round/>
-                      <a:headEnd type="none" w="med" len="med"/>
-                      <a:tailEnd type="none" w="med" len="med"/>
-                    </a:lnB>
-                  </a:tcPr>
-                </a:tc>
-                <a:tc>
-                  <a:txBody>
-                    <a:bodyPr/>
-                    <a:lstStyle/>
-                    <a:p>
-                      <a:pPr algn="ctr" indent="0" marL="0">
-                        <a:buNone/>
-                      </a:pPr>
-                      <a:r>
-                        <a:rPr lang="en-US" sz="1200" b="1" dirty="0">
-                          <a:solidFill>
-                            <a:srgbClr val="000000"/>
-                          </a:solidFill>
-                        </a:rPr>
-                        <a:t>141 hrs</a:t>
-                      </a:r>
-                      <a:endParaRPr lang="en-US" sz="1200" dirty="0"/>
-                    </a:p>
-                  </a:txBody>
-                  <a:tcPr marL="91440" marR="91440" marT="45720" marB="45720" anchor="ctr">
-                    <a:lnL w="6350" cap="flat" cmpd="sng" algn="ctr">
-                      <a:solidFill>
-                        <a:srgbClr val="CCCCCC"/>
-                      </a:solidFill>
-                      <a:prstDash val="solid"/>
-                      <a:round/>
-                      <a:headEnd type="none" w="med" len="med"/>
-                      <a:tailEnd type="none" w="med" len="med"/>
-                    </a:lnL>
-                    <a:lnR w="6350" cap="flat" cmpd="sng" algn="ctr">
-                      <a:solidFill>
-                        <a:srgbClr val="CCCCCC"/>
-                      </a:solidFill>
-                      <a:prstDash val="solid"/>
-                      <a:round/>
-                      <a:headEnd type="none" w="med" len="med"/>
-                      <a:tailEnd type="none" w="med" len="med"/>
-                    </a:lnR>
-                    <a:lnT w="6350" cap="flat" cmpd="sng" algn="ctr">
-                      <a:solidFill>
-                        <a:srgbClr val="CCCCCC"/>
-                      </a:solidFill>
-                      <a:prstDash val="solid"/>
-                      <a:round/>
-                      <a:headEnd type="none" w="med" len="med"/>
-                      <a:tailEnd type="none" w="med" len="med"/>
-                    </a:lnT>
-                    <a:lnB w="6350" cap="flat" cmpd="sng" algn="ctr">
-                      <a:solidFill>
-                        <a:srgbClr val="CCCCCC"/>
-                      </a:solidFill>
-                      <a:prstDash val="solid"/>
-                      <a:round/>
-                      <a:headEnd type="none" w="med" len="med"/>
-                      <a:tailEnd type="none" w="med" len="med"/>
-                    </a:lnB>
-                  </a:tcPr>
-                </a:tc>
-                <a:tc>
-                  <a:txBody>
-                    <a:bodyPr/>
-                    <a:lstStyle/>
-                    <a:p>
-                      <a:pPr algn="ctr" indent="0" marL="0">
-                        <a:buNone/>
-                      </a:pPr>
-                      <a:r>
-                        <a:rPr lang="en-US" sz="1200" b="1" dirty="0">
-                          <a:solidFill>
-                            <a:srgbClr val="000000"/>
-                          </a:solidFill>
-                        </a:rPr>
-                        <a:t>21 hrs</a:t>
-                      </a:r>
-                      <a:endParaRPr lang="en-US" sz="1200" dirty="0"/>
-                    </a:p>
-                  </a:txBody>
-                  <a:tcPr marL="91440" marR="91440" marT="45720" marB="45720" anchor="ctr">
-                    <a:lnL w="6350" cap="flat" cmpd="sng" algn="ctr">
-                      <a:solidFill>
-                        <a:srgbClr val="CCCCCC"/>
-                      </a:solidFill>
-                      <a:prstDash val="solid"/>
-                      <a:round/>
-                      <a:headEnd type="none" w="med" len="med"/>
-                      <a:tailEnd type="none" w="med" len="med"/>
-                    </a:lnL>
-                    <a:lnR w="6350" cap="flat" cmpd="sng" algn="ctr">
-                      <a:solidFill>
-                        <a:srgbClr val="CCCCCC"/>
-                      </a:solidFill>
-                      <a:prstDash val="solid"/>
-                      <a:round/>
-                      <a:headEnd type="none" w="med" len="med"/>
-                      <a:tailEnd type="none" w="med" len="med"/>
-                    </a:lnR>
-                    <a:lnT w="6350" cap="flat" cmpd="sng" algn="ctr">
-                      <a:solidFill>
-                        <a:srgbClr val="CCCCCC"/>
-                      </a:solidFill>
-                      <a:prstDash val="solid"/>
-                      <a:round/>
-                      <a:headEnd type="none" w="med" len="med"/>
-                      <a:tailEnd type="none" w="med" len="med"/>
-                    </a:lnT>
-                    <a:lnB w="6350" cap="flat" cmpd="sng" algn="ctr">
-                      <a:solidFill>
-                        <a:srgbClr val="CCCCCC"/>
-                      </a:solidFill>
-                      <a:prstDash val="solid"/>
-                      <a:round/>
-                      <a:headEnd type="none" w="med" len="med"/>
-                      <a:tailEnd type="none" w="med" len="med"/>
-                    </a:lnB>
-                  </a:tcPr>
-                </a:tc>
-                <a:tc>
-                  <a:txBody>
-                    <a:bodyPr/>
-                    <a:lstStyle/>
-                    <a:p>
-                      <a:pPr algn="ctr" indent="0" marL="0">
-                        <a:buNone/>
-                      </a:pPr>
-                      <a:r>
-                        <a:rPr lang="en-US" sz="1200" b="1" dirty="0">
-                          <a:solidFill>
-                            <a:srgbClr val="059669"/>
-                          </a:solidFill>
-                        </a:rPr>
-                        <a:t>120 hrs</a:t>
-                      </a:r>
-                      <a:endParaRPr lang="en-US" sz="1200" dirty="0"/>
-                    </a:p>
-                  </a:txBody>
-                  <a:tcPr marL="91440" marR="91440" marT="45720" marB="45720" anchor="ctr">
-                    <a:lnL w="6350" cap="flat" cmpd="sng" algn="ctr">
-                      <a:solidFill>
-                        <a:srgbClr val="CCCCCC"/>
-                      </a:solidFill>
-                      <a:prstDash val="solid"/>
-                      <a:round/>
-                      <a:headEnd type="none" w="med" len="med"/>
-                      <a:tailEnd type="none" w="med" len="med"/>
-                    </a:lnL>
-                    <a:lnR w="6350" cap="flat" cmpd="sng" algn="ctr">
-                      <a:solidFill>
-                        <a:srgbClr val="CCCCCC"/>
-                      </a:solidFill>
-                      <a:prstDash val="solid"/>
-                      <a:round/>
-                      <a:headEnd type="none" w="med" len="med"/>
-                      <a:tailEnd type="none" w="med" len="med"/>
-                    </a:lnR>
-                    <a:lnT w="6350" cap="flat" cmpd="sng" algn="ctr">
-                      <a:solidFill>
-                        <a:srgbClr val="CCCCCC"/>
-                      </a:solidFill>
-                      <a:prstDash val="solid"/>
-                      <a:round/>
-                      <a:headEnd type="none" w="med" len="med"/>
-                      <a:tailEnd type="none" w="med" len="med"/>
-                    </a:lnT>
-                    <a:lnB w="6350" cap="flat" cmpd="sng" algn="ctr">
-                      <a:solidFill>
-                        <a:srgbClr val="CCCCCC"/>
-                      </a:solidFill>
-                      <a:prstDash val="solid"/>
-                      <a:round/>
-                      <a:headEnd type="none" w="med" len="med"/>
-                      <a:tailEnd type="none" w="med" len="med"/>
-                    </a:lnB>
-                  </a:tcPr>
-                </a:tc>
-              </a:tr>
-            </a:tbl>
-          </a:graphicData>
-        </a:graphic>
-      </p:graphicFrame>
+      <p:pic>
+        <p:nvPicPr>
+          <p:cNvPr id="5" name="Image 0" descr="/Users/sriramvenkatg/edunexus/e2e-tests/screenshots/principal_nexus-ec_dashboard.png">    </p:cNvPr>
+          <p:cNvPicPr>
+            <a:picLocks noChangeAspect="1"/>
+          </p:cNvPicPr>
+          <p:nvPr/>
+        </p:nvPicPr>
+        <p:blipFill>
+          <a:blip r:embed="rId1"/>
+          <a:stretch>
+            <a:fillRect/>
+          </a:stretch>
+        </p:blipFill>
+        <p:spPr>
+          <a:xfrm>
+            <a:off x="274320" y="822960"/>
+            <a:ext cx="8595360" cy="3840480"/>
+          </a:xfrm>
+          <a:prstGeom prst="rect">
+            <a:avLst/>
+          </a:prstGeom>
+        </p:spPr>
+      </p:pic>
+      <p:sp>
+        <p:nvSpPr>
+          <p:cNvPr id="6" name="Text 3"/>
+          <p:cNvSpPr/>
+          <p:nvPr/>
+        </p:nvSpPr>
+        <p:spPr>
+          <a:xfrm>
+            <a:off x="274320" y="4709160"/>
+            <a:ext cx="8595360" cy="274320"/>
+          </a:xfrm>
+          <a:prstGeom prst="rect">
+            <a:avLst/>
+          </a:prstGeom>
+          <a:noFill/>
+          <a:ln/>
+        </p:spPr>
+        <p:txBody>
+          <a:bodyPr wrap="square" rtlCol="0" anchor="ctr"/>
+          <a:lstStyle/>
+          <a:p>
+            <a:pPr algn="ctr" indent="0" marL="0">
+              <a:buNone/>
+            </a:pPr>
+            <a:r>
+              <a:rPr lang="en-US" sz="1100" dirty="0">
+                <a:solidFill>
+                  <a:srgbClr val="1F2937"/>
+                </a:solidFill>
+                <a:latin typeface="Arial" pitchFamily="34" charset="0"/>
+                <a:ea typeface="Arial" pitchFamily="34" charset="-122"/>
+                <a:cs typeface="Arial" pitchFamily="34" charset="-120"/>
+              </a:rPr>
+              <a:t>Departments • Students • Staff • Fees • Analytics • Reports - All in one view</a:t>
+            </a:r>
+            <a:endParaRPr lang="en-US" sz="1100" dirty="0"/>
+          </a:p>
+        </p:txBody>
+      </p:sp>
     </p:spTree>
   </p:cSld>
   <p:clrMapOvr>
@@ -20459,7 +23809,7 @@
         <p:spPr>
           <a:xfrm>
             <a:off x="0" y="0"/>
-            <a:ext cx="9144000" cy="1097280"/>
+            <a:ext cx="9144000" cy="731520"/>
           </a:xfrm>
           <a:prstGeom prst="rect">
             <a:avLst/>
@@ -20478,8 +23828,8 @@
         </p:nvSpPr>
         <p:spPr>
           <a:xfrm>
-            <a:off x="457200" y="320040"/>
-            <a:ext cx="8229600" cy="457200"/>
+            <a:off x="457200" y="182880"/>
+            <a:ext cx="5486400" cy="365760"/>
           </a:xfrm>
           <a:prstGeom prst="rect">
             <a:avLst/>
@@ -20495,7 +23845,7 @@
               <a:buNone/>
             </a:pPr>
             <a:r>
-              <a:rPr lang="en-US" sz="3200" b="1" dirty="0">
+              <a:rPr lang="en-US" sz="2400" b="1" dirty="0">
                 <a:solidFill>
                   <a:srgbClr val="FFFFFF"/>
                 </a:solidFill>
@@ -20503,9 +23853,9 @@
                 <a:ea typeface="Arial" pitchFamily="34" charset="-122"/>
                 <a:cs typeface="Arial" pitchFamily="34" charset="-120"/>
               </a:rPr>
-              <a:t>Quality &amp; Reliability Assurance</a:t>
+              <a:t>HOD Dashboard</a:t>
             </a:r>
-            <a:endParaRPr lang="en-US" sz="3200" dirty="0"/>
+            <a:endParaRPr lang="en-US" sz="2400" dirty="0"/>
           </a:p>
         </p:txBody>
       </p:sp>
@@ -20517,7 +23867,7 @@
         </p:nvSpPr>
         <p:spPr>
           <a:xfrm>
-            <a:off x="457200" y="1280160"/>
+            <a:off x="5029200" y="182880"/>
             <a:ext cx="3657600" cy="365760"/>
           </a:xfrm>
           <a:prstGeom prst="rect">
@@ -20530,11 +23880,11 @@
           <a:bodyPr wrap="square" rtlCol="0" anchor="ctr"/>
           <a:lstStyle/>
           <a:p>
-            <a:pPr indent="0" marL="0">
+            <a:pPr algn="r" indent="0" marL="0">
               <a:buNone/>
             </a:pPr>
             <a:r>
-              <a:rPr lang="en-US" sz="1600" b="1" dirty="0">
+              <a:rPr lang="en-US" sz="1200" dirty="0">
                 <a:solidFill>
                   <a:srgbClr val="0D9488"/>
                 </a:solidFill>
@@ -20542,874 +23892,36 @@
                 <a:ea typeface="Arial" pitchFamily="34" charset="-122"/>
                 <a:cs typeface="Arial" pitchFamily="34" charset="-120"/>
               </a:rPr>
-              <a:t>E2E Testing Verification</a:t>
+              <a:t>Department-level management &amp; analytics</a:t>
             </a:r>
-            <a:endParaRPr lang="en-US" sz="1600" dirty="0"/>
+            <a:endParaRPr lang="en-US" sz="1200" dirty="0"/>
           </a:p>
         </p:txBody>
       </p:sp>
-      <p:graphicFrame>
-        <p:nvGraphicFramePr>
-          <p:cNvPr id="10" name="Table 0"/>
-          <p:cNvGraphicFramePr>
-            <a:graphicFrameLocks noGrp="1"/>
-          </p:cNvGraphicFramePr>
-          <p:nvPr>
-            <p:extLst>
-              <p:ext uri="{D42A27DB-BD31-4B8C-83A1-F6EECF244321}">
-                <p14:modId xmlns:p14="http://schemas.microsoft.com/office/powerpoint/2010/main" val="1579011935"/>
-              </p:ext>
-            </p:extLst>
-          </p:nvPr>
-        </p:nvGraphicFramePr>
-        <p:xfrm>
-          <a:off x="457200" y="1645920"/>
-          <a:ext cx="3931920" cy="2286000"/>
-        </p:xfrm>
-        <a:graphic>
-          <a:graphicData uri="http://schemas.openxmlformats.org/drawingml/2006/table">
-            <a:tbl>
-              <a:tblPr/>
-              <a:tblGrid>
-                <a:gridCol w="1965960"/>
-                <a:gridCol w="1965960"/>
-              </a:tblGrid>
-              <a:tr h="326571">
-                <a:tc>
-                  <a:txBody>
-                    <a:bodyPr/>
-                    <a:lstStyle/>
-                    <a:p>
-                      <a:pPr algn="ctr" indent="0" marL="0">
-                        <a:buNone/>
-                      </a:pPr>
-                      <a:r>
-                        <a:rPr lang="en-US" sz="1100" b="1" dirty="0">
-                          <a:solidFill>
-                            <a:srgbClr val="FFFFFF"/>
-                          </a:solidFill>
-                        </a:rPr>
-                        <a:t>Metric</a:t>
-                      </a:r>
-                      <a:endParaRPr lang="en-US" sz="1100" dirty="0"/>
-                    </a:p>
-                  </a:txBody>
-                  <a:tcPr marL="91440" marR="91440" marT="45720" marB="45720" anchor="ctr">
-                    <a:lnL w="6350" cap="flat" cmpd="sng" algn="ctr">
-                      <a:solidFill>
-                        <a:srgbClr val="CCCCCC"/>
-                      </a:solidFill>
-                      <a:prstDash val="solid"/>
-                      <a:round/>
-                      <a:headEnd type="none" w="med" len="med"/>
-                      <a:tailEnd type="none" w="med" len="med"/>
-                    </a:lnL>
-                    <a:lnR w="6350" cap="flat" cmpd="sng" algn="ctr">
-                      <a:solidFill>
-                        <a:srgbClr val="CCCCCC"/>
-                      </a:solidFill>
-                      <a:prstDash val="solid"/>
-                      <a:round/>
-                      <a:headEnd type="none" w="med" len="med"/>
-                      <a:tailEnd type="none" w="med" len="med"/>
-                    </a:lnR>
-                    <a:lnT w="6350" cap="flat" cmpd="sng" algn="ctr">
-                      <a:solidFill>
-                        <a:srgbClr val="CCCCCC"/>
-                      </a:solidFill>
-                      <a:prstDash val="solid"/>
-                      <a:round/>
-                      <a:headEnd type="none" w="med" len="med"/>
-                      <a:tailEnd type="none" w="med" len="med"/>
-                    </a:lnT>
-                    <a:lnB w="6350" cap="flat" cmpd="sng" algn="ctr">
-                      <a:solidFill>
-                        <a:srgbClr val="CCCCCC"/>
-                      </a:solidFill>
-                      <a:prstDash val="solid"/>
-                      <a:round/>
-                      <a:headEnd type="none" w="med" len="med"/>
-                      <a:tailEnd type="none" w="med" len="med"/>
-                    </a:lnB>
-                    <a:solidFill>
-                      <a:srgbClr val="059669"/>
-                    </a:solidFill>
-                  </a:tcPr>
-                </a:tc>
-                <a:tc>
-                  <a:txBody>
-                    <a:bodyPr/>
-                    <a:lstStyle/>
-                    <a:p>
-                      <a:pPr algn="ctr" indent="0" marL="0">
-                        <a:buNone/>
-                      </a:pPr>
-                      <a:r>
-                        <a:rPr lang="en-US" sz="1100" b="1" dirty="0">
-                          <a:solidFill>
-                            <a:srgbClr val="FFFFFF"/>
-                          </a:solidFill>
-                        </a:rPr>
-                        <a:t>Result</a:t>
-                      </a:r>
-                      <a:endParaRPr lang="en-US" sz="1100" dirty="0"/>
-                    </a:p>
-                  </a:txBody>
-                  <a:tcPr marL="91440" marR="91440" marT="45720" marB="45720" anchor="ctr">
-                    <a:lnL w="6350" cap="flat" cmpd="sng" algn="ctr">
-                      <a:solidFill>
-                        <a:srgbClr val="CCCCCC"/>
-                      </a:solidFill>
-                      <a:prstDash val="solid"/>
-                      <a:round/>
-                      <a:headEnd type="none" w="med" len="med"/>
-                      <a:tailEnd type="none" w="med" len="med"/>
-                    </a:lnL>
-                    <a:lnR w="6350" cap="flat" cmpd="sng" algn="ctr">
-                      <a:solidFill>
-                        <a:srgbClr val="CCCCCC"/>
-                      </a:solidFill>
-                      <a:prstDash val="solid"/>
-                      <a:round/>
-                      <a:headEnd type="none" w="med" len="med"/>
-                      <a:tailEnd type="none" w="med" len="med"/>
-                    </a:lnR>
-                    <a:lnT w="6350" cap="flat" cmpd="sng" algn="ctr">
-                      <a:solidFill>
-                        <a:srgbClr val="CCCCCC"/>
-                      </a:solidFill>
-                      <a:prstDash val="solid"/>
-                      <a:round/>
-                      <a:headEnd type="none" w="med" len="med"/>
-                      <a:tailEnd type="none" w="med" len="med"/>
-                    </a:lnT>
-                    <a:lnB w="6350" cap="flat" cmpd="sng" algn="ctr">
-                      <a:solidFill>
-                        <a:srgbClr val="CCCCCC"/>
-                      </a:solidFill>
-                      <a:prstDash val="solid"/>
-                      <a:round/>
-                      <a:headEnd type="none" w="med" len="med"/>
-                      <a:tailEnd type="none" w="med" len="med"/>
-                    </a:lnB>
-                    <a:solidFill>
-                      <a:srgbClr val="059669"/>
-                    </a:solidFill>
-                  </a:tcPr>
-                </a:tc>
-              </a:tr>
-              <a:tr h="326571">
-                <a:tc>
-                  <a:txBody>
-                    <a:bodyPr/>
-                    <a:lstStyle/>
-                    <a:p>
-                      <a:pPr algn="ctr" indent="0" marL="0">
-                        <a:buNone/>
-                      </a:pPr>
-                      <a:r>
-                        <a:rPr lang="en-US" sz="1100" dirty="0">
-                          <a:solidFill>
-                            <a:srgbClr val="000000"/>
-                          </a:solidFill>
-                        </a:rPr>
-                        <a:t>Total Personas Tested</a:t>
-                      </a:r>
-                      <a:endParaRPr lang="en-US" sz="1100" dirty="0"/>
-                    </a:p>
-                  </a:txBody>
-                  <a:tcPr marL="91440" marR="91440" marT="45720" marB="45720" anchor="ctr">
-                    <a:lnL w="6350" cap="flat" cmpd="sng" algn="ctr">
-                      <a:solidFill>
-                        <a:srgbClr val="CCCCCC"/>
-                      </a:solidFill>
-                      <a:prstDash val="solid"/>
-                      <a:round/>
-                      <a:headEnd type="none" w="med" len="med"/>
-                      <a:tailEnd type="none" w="med" len="med"/>
-                    </a:lnL>
-                    <a:lnR w="6350" cap="flat" cmpd="sng" algn="ctr">
-                      <a:solidFill>
-                        <a:srgbClr val="CCCCCC"/>
-                      </a:solidFill>
-                      <a:prstDash val="solid"/>
-                      <a:round/>
-                      <a:headEnd type="none" w="med" len="med"/>
-                      <a:tailEnd type="none" w="med" len="med"/>
-                    </a:lnR>
-                    <a:lnT w="6350" cap="flat" cmpd="sng" algn="ctr">
-                      <a:solidFill>
-                        <a:srgbClr val="CCCCCC"/>
-                      </a:solidFill>
-                      <a:prstDash val="solid"/>
-                      <a:round/>
-                      <a:headEnd type="none" w="med" len="med"/>
-                      <a:tailEnd type="none" w="med" len="med"/>
-                    </a:lnT>
-                    <a:lnB w="6350" cap="flat" cmpd="sng" algn="ctr">
-                      <a:solidFill>
-                        <a:srgbClr val="CCCCCC"/>
-                      </a:solidFill>
-                      <a:prstDash val="solid"/>
-                      <a:round/>
-                      <a:headEnd type="none" w="med" len="med"/>
-                      <a:tailEnd type="none" w="med" len="med"/>
-                    </a:lnB>
-                  </a:tcPr>
-                </a:tc>
-                <a:tc>
-                  <a:txBody>
-                    <a:bodyPr/>
-                    <a:lstStyle/>
-                    <a:p>
-                      <a:pPr algn="ctr" indent="0" marL="0">
-                        <a:buNone/>
-                      </a:pPr>
-                      <a:r>
-                        <a:rPr lang="en-US" sz="1100" dirty="0">
-                          <a:solidFill>
-                            <a:srgbClr val="000000"/>
-                          </a:solidFill>
-                        </a:rPr>
-                        <a:t>21 (7 roles x 3 colleges)</a:t>
-                      </a:r>
-                      <a:endParaRPr lang="en-US" sz="1100" dirty="0"/>
-                    </a:p>
-                  </a:txBody>
-                  <a:tcPr marL="91440" marR="91440" marT="45720" marB="45720" anchor="ctr">
-                    <a:lnL w="6350" cap="flat" cmpd="sng" algn="ctr">
-                      <a:solidFill>
-                        <a:srgbClr val="CCCCCC"/>
-                      </a:solidFill>
-                      <a:prstDash val="solid"/>
-                      <a:round/>
-                      <a:headEnd type="none" w="med" len="med"/>
-                      <a:tailEnd type="none" w="med" len="med"/>
-                    </a:lnL>
-                    <a:lnR w="6350" cap="flat" cmpd="sng" algn="ctr">
-                      <a:solidFill>
-                        <a:srgbClr val="CCCCCC"/>
-                      </a:solidFill>
-                      <a:prstDash val="solid"/>
-                      <a:round/>
-                      <a:headEnd type="none" w="med" len="med"/>
-                      <a:tailEnd type="none" w="med" len="med"/>
-                    </a:lnR>
-                    <a:lnT w="6350" cap="flat" cmpd="sng" algn="ctr">
-                      <a:solidFill>
-                        <a:srgbClr val="CCCCCC"/>
-                      </a:solidFill>
-                      <a:prstDash val="solid"/>
-                      <a:round/>
-                      <a:headEnd type="none" w="med" len="med"/>
-                      <a:tailEnd type="none" w="med" len="med"/>
-                    </a:lnT>
-                    <a:lnB w="6350" cap="flat" cmpd="sng" algn="ctr">
-                      <a:solidFill>
-                        <a:srgbClr val="CCCCCC"/>
-                      </a:solidFill>
-                      <a:prstDash val="solid"/>
-                      <a:round/>
-                      <a:headEnd type="none" w="med" len="med"/>
-                      <a:tailEnd type="none" w="med" len="med"/>
-                    </a:lnB>
-                  </a:tcPr>
-                </a:tc>
-              </a:tr>
-              <a:tr h="326571">
-                <a:tc>
-                  <a:txBody>
-                    <a:bodyPr/>
-                    <a:lstStyle/>
-                    <a:p>
-                      <a:pPr algn="ctr" indent="0" marL="0">
-                        <a:buNone/>
-                      </a:pPr>
-                      <a:r>
-                        <a:rPr lang="en-US" sz="1100" dirty="0">
-                          <a:solidFill>
-                            <a:srgbClr val="000000"/>
-                          </a:solidFill>
-                        </a:rPr>
-                        <a:t>Test Scenarios</a:t>
-                      </a:r>
-                      <a:endParaRPr lang="en-US" sz="1100" dirty="0"/>
-                    </a:p>
-                  </a:txBody>
-                  <a:tcPr marL="91440" marR="91440" marT="45720" marB="45720" anchor="ctr">
-                    <a:lnL w="6350" cap="flat" cmpd="sng" algn="ctr">
-                      <a:solidFill>
-                        <a:srgbClr val="CCCCCC"/>
-                      </a:solidFill>
-                      <a:prstDash val="solid"/>
-                      <a:round/>
-                      <a:headEnd type="none" w="med" len="med"/>
-                      <a:tailEnd type="none" w="med" len="med"/>
-                    </a:lnL>
-                    <a:lnR w="6350" cap="flat" cmpd="sng" algn="ctr">
-                      <a:solidFill>
-                        <a:srgbClr val="CCCCCC"/>
-                      </a:solidFill>
-                      <a:prstDash val="solid"/>
-                      <a:round/>
-                      <a:headEnd type="none" w="med" len="med"/>
-                      <a:tailEnd type="none" w="med" len="med"/>
-                    </a:lnR>
-                    <a:lnT w="6350" cap="flat" cmpd="sng" algn="ctr">
-                      <a:solidFill>
-                        <a:srgbClr val="CCCCCC"/>
-                      </a:solidFill>
-                      <a:prstDash val="solid"/>
-                      <a:round/>
-                      <a:headEnd type="none" w="med" len="med"/>
-                      <a:tailEnd type="none" w="med" len="med"/>
-                    </a:lnT>
-                    <a:lnB w="6350" cap="flat" cmpd="sng" algn="ctr">
-                      <a:solidFill>
-                        <a:srgbClr val="CCCCCC"/>
-                      </a:solidFill>
-                      <a:prstDash val="solid"/>
-                      <a:round/>
-                      <a:headEnd type="none" w="med" len="med"/>
-                      <a:tailEnd type="none" w="med" len="med"/>
-                    </a:lnB>
-                  </a:tcPr>
-                </a:tc>
-                <a:tc>
-                  <a:txBody>
-                    <a:bodyPr/>
-                    <a:lstStyle/>
-                    <a:p>
-                      <a:pPr algn="ctr" indent="0" marL="0">
-                        <a:buNone/>
-                      </a:pPr>
-                      <a:r>
-                        <a:rPr lang="en-US" sz="1100" dirty="0">
-                          <a:solidFill>
-                            <a:srgbClr val="000000"/>
-                          </a:solidFill>
-                        </a:rPr>
-                        <a:t>100+ automated</a:t>
-                      </a:r>
-                      <a:endParaRPr lang="en-US" sz="1100" dirty="0"/>
-                    </a:p>
-                  </a:txBody>
-                  <a:tcPr marL="91440" marR="91440" marT="45720" marB="45720" anchor="ctr">
-                    <a:lnL w="6350" cap="flat" cmpd="sng" algn="ctr">
-                      <a:solidFill>
-                        <a:srgbClr val="CCCCCC"/>
-                      </a:solidFill>
-                      <a:prstDash val="solid"/>
-                      <a:round/>
-                      <a:headEnd type="none" w="med" len="med"/>
-                      <a:tailEnd type="none" w="med" len="med"/>
-                    </a:lnL>
-                    <a:lnR w="6350" cap="flat" cmpd="sng" algn="ctr">
-                      <a:solidFill>
-                        <a:srgbClr val="CCCCCC"/>
-                      </a:solidFill>
-                      <a:prstDash val="solid"/>
-                      <a:round/>
-                      <a:headEnd type="none" w="med" len="med"/>
-                      <a:tailEnd type="none" w="med" len="med"/>
-                    </a:lnR>
-                    <a:lnT w="6350" cap="flat" cmpd="sng" algn="ctr">
-                      <a:solidFill>
-                        <a:srgbClr val="CCCCCC"/>
-                      </a:solidFill>
-                      <a:prstDash val="solid"/>
-                      <a:round/>
-                      <a:headEnd type="none" w="med" len="med"/>
-                      <a:tailEnd type="none" w="med" len="med"/>
-                    </a:lnT>
-                    <a:lnB w="6350" cap="flat" cmpd="sng" algn="ctr">
-                      <a:solidFill>
-                        <a:srgbClr val="CCCCCC"/>
-                      </a:solidFill>
-                      <a:prstDash val="solid"/>
-                      <a:round/>
-                      <a:headEnd type="none" w="med" len="med"/>
-                      <a:tailEnd type="none" w="med" len="med"/>
-                    </a:lnB>
-                  </a:tcPr>
-                </a:tc>
-              </a:tr>
-              <a:tr h="326571">
-                <a:tc>
-                  <a:txBody>
-                    <a:bodyPr/>
-                    <a:lstStyle/>
-                    <a:p>
-                      <a:pPr algn="ctr" indent="0" marL="0">
-                        <a:buNone/>
-                      </a:pPr>
-                      <a:r>
-                        <a:rPr lang="en-US" sz="1100" dirty="0">
-                          <a:solidFill>
-                            <a:srgbClr val="000000"/>
-                          </a:solidFill>
-                        </a:rPr>
-                        <a:t>404 Errors Found</a:t>
-                      </a:r>
-                      <a:endParaRPr lang="en-US" sz="1100" dirty="0"/>
-                    </a:p>
-                  </a:txBody>
-                  <a:tcPr marL="91440" marR="91440" marT="45720" marB="45720" anchor="ctr">
-                    <a:lnL w="6350" cap="flat" cmpd="sng" algn="ctr">
-                      <a:solidFill>
-                        <a:srgbClr val="CCCCCC"/>
-                      </a:solidFill>
-                      <a:prstDash val="solid"/>
-                      <a:round/>
-                      <a:headEnd type="none" w="med" len="med"/>
-                      <a:tailEnd type="none" w="med" len="med"/>
-                    </a:lnL>
-                    <a:lnR w="6350" cap="flat" cmpd="sng" algn="ctr">
-                      <a:solidFill>
-                        <a:srgbClr val="CCCCCC"/>
-                      </a:solidFill>
-                      <a:prstDash val="solid"/>
-                      <a:round/>
-                      <a:headEnd type="none" w="med" len="med"/>
-                      <a:tailEnd type="none" w="med" len="med"/>
-                    </a:lnR>
-                    <a:lnT w="6350" cap="flat" cmpd="sng" algn="ctr">
-                      <a:solidFill>
-                        <a:srgbClr val="CCCCCC"/>
-                      </a:solidFill>
-                      <a:prstDash val="solid"/>
-                      <a:round/>
-                      <a:headEnd type="none" w="med" len="med"/>
-                      <a:tailEnd type="none" w="med" len="med"/>
-                    </a:lnT>
-                    <a:lnB w="6350" cap="flat" cmpd="sng" algn="ctr">
-                      <a:solidFill>
-                        <a:srgbClr val="CCCCCC"/>
-                      </a:solidFill>
-                      <a:prstDash val="solid"/>
-                      <a:round/>
-                      <a:headEnd type="none" w="med" len="med"/>
-                      <a:tailEnd type="none" w="med" len="med"/>
-                    </a:lnB>
-                  </a:tcPr>
-                </a:tc>
-                <a:tc>
-                  <a:txBody>
-                    <a:bodyPr/>
-                    <a:lstStyle/>
-                    <a:p>
-                      <a:pPr algn="ctr" indent="0" marL="0">
-                        <a:buNone/>
-                      </a:pPr>
-                      <a:r>
-                        <a:rPr lang="en-US" sz="1100" dirty="0">
-                          <a:solidFill>
-                            <a:srgbClr val="000000"/>
-                          </a:solidFill>
-                        </a:rPr>
-                        <a:t>0</a:t>
-                      </a:r>
-                      <a:endParaRPr lang="en-US" sz="1100" dirty="0"/>
-                    </a:p>
-                  </a:txBody>
-                  <a:tcPr marL="91440" marR="91440" marT="45720" marB="45720" anchor="ctr">
-                    <a:lnL w="6350" cap="flat" cmpd="sng" algn="ctr">
-                      <a:solidFill>
-                        <a:srgbClr val="CCCCCC"/>
-                      </a:solidFill>
-                      <a:prstDash val="solid"/>
-                      <a:round/>
-                      <a:headEnd type="none" w="med" len="med"/>
-                      <a:tailEnd type="none" w="med" len="med"/>
-                    </a:lnL>
-                    <a:lnR w="6350" cap="flat" cmpd="sng" algn="ctr">
-                      <a:solidFill>
-                        <a:srgbClr val="CCCCCC"/>
-                      </a:solidFill>
-                      <a:prstDash val="solid"/>
-                      <a:round/>
-                      <a:headEnd type="none" w="med" len="med"/>
-                      <a:tailEnd type="none" w="med" len="med"/>
-                    </a:lnR>
-                    <a:lnT w="6350" cap="flat" cmpd="sng" algn="ctr">
-                      <a:solidFill>
-                        <a:srgbClr val="CCCCCC"/>
-                      </a:solidFill>
-                      <a:prstDash val="solid"/>
-                      <a:round/>
-                      <a:headEnd type="none" w="med" len="med"/>
-                      <a:tailEnd type="none" w="med" len="med"/>
-                    </a:lnT>
-                    <a:lnB w="6350" cap="flat" cmpd="sng" algn="ctr">
-                      <a:solidFill>
-                        <a:srgbClr val="CCCCCC"/>
-                      </a:solidFill>
-                      <a:prstDash val="solid"/>
-                      <a:round/>
-                      <a:headEnd type="none" w="med" len="med"/>
-                      <a:tailEnd type="none" w="med" len="med"/>
-                    </a:lnB>
-                  </a:tcPr>
-                </a:tc>
-              </a:tr>
-              <a:tr h="326571">
-                <a:tc>
-                  <a:txBody>
-                    <a:bodyPr/>
-                    <a:lstStyle/>
-                    <a:p>
-                      <a:pPr algn="ctr" indent="0" marL="0">
-                        <a:buNone/>
-                      </a:pPr>
-                      <a:r>
-                        <a:rPr lang="en-US" sz="1100" dirty="0">
-                          <a:solidFill>
-                            <a:srgbClr val="000000"/>
-                          </a:solidFill>
-                        </a:rPr>
-                        <a:t>Access Denied Errors</a:t>
-                      </a:r>
-                      <a:endParaRPr lang="en-US" sz="1100" dirty="0"/>
-                    </a:p>
-                  </a:txBody>
-                  <a:tcPr marL="91440" marR="91440" marT="45720" marB="45720" anchor="ctr">
-                    <a:lnL w="6350" cap="flat" cmpd="sng" algn="ctr">
-                      <a:solidFill>
-                        <a:srgbClr val="CCCCCC"/>
-                      </a:solidFill>
-                      <a:prstDash val="solid"/>
-                      <a:round/>
-                      <a:headEnd type="none" w="med" len="med"/>
-                      <a:tailEnd type="none" w="med" len="med"/>
-                    </a:lnL>
-                    <a:lnR w="6350" cap="flat" cmpd="sng" algn="ctr">
-                      <a:solidFill>
-                        <a:srgbClr val="CCCCCC"/>
-                      </a:solidFill>
-                      <a:prstDash val="solid"/>
-                      <a:round/>
-                      <a:headEnd type="none" w="med" len="med"/>
-                      <a:tailEnd type="none" w="med" len="med"/>
-                    </a:lnR>
-                    <a:lnT w="6350" cap="flat" cmpd="sng" algn="ctr">
-                      <a:solidFill>
-                        <a:srgbClr val="CCCCCC"/>
-                      </a:solidFill>
-                      <a:prstDash val="solid"/>
-                      <a:round/>
-                      <a:headEnd type="none" w="med" len="med"/>
-                      <a:tailEnd type="none" w="med" len="med"/>
-                    </a:lnT>
-                    <a:lnB w="6350" cap="flat" cmpd="sng" algn="ctr">
-                      <a:solidFill>
-                        <a:srgbClr val="CCCCCC"/>
-                      </a:solidFill>
-                      <a:prstDash val="solid"/>
-                      <a:round/>
-                      <a:headEnd type="none" w="med" len="med"/>
-                      <a:tailEnd type="none" w="med" len="med"/>
-                    </a:lnB>
-                  </a:tcPr>
-                </a:tc>
-                <a:tc>
-                  <a:txBody>
-                    <a:bodyPr/>
-                    <a:lstStyle/>
-                    <a:p>
-                      <a:pPr algn="ctr" indent="0" marL="0">
-                        <a:buNone/>
-                      </a:pPr>
-                      <a:r>
-                        <a:rPr lang="en-US" sz="1100" dirty="0">
-                          <a:solidFill>
-                            <a:srgbClr val="000000"/>
-                          </a:solidFill>
-                        </a:rPr>
-                        <a:t>0</a:t>
-                      </a:r>
-                      <a:endParaRPr lang="en-US" sz="1100" dirty="0"/>
-                    </a:p>
-                  </a:txBody>
-                  <a:tcPr marL="91440" marR="91440" marT="45720" marB="45720" anchor="ctr">
-                    <a:lnL w="6350" cap="flat" cmpd="sng" algn="ctr">
-                      <a:solidFill>
-                        <a:srgbClr val="CCCCCC"/>
-                      </a:solidFill>
-                      <a:prstDash val="solid"/>
-                      <a:round/>
-                      <a:headEnd type="none" w="med" len="med"/>
-                      <a:tailEnd type="none" w="med" len="med"/>
-                    </a:lnL>
-                    <a:lnR w="6350" cap="flat" cmpd="sng" algn="ctr">
-                      <a:solidFill>
-                        <a:srgbClr val="CCCCCC"/>
-                      </a:solidFill>
-                      <a:prstDash val="solid"/>
-                      <a:round/>
-                      <a:headEnd type="none" w="med" len="med"/>
-                      <a:tailEnd type="none" w="med" len="med"/>
-                    </a:lnR>
-                    <a:lnT w="6350" cap="flat" cmpd="sng" algn="ctr">
-                      <a:solidFill>
-                        <a:srgbClr val="CCCCCC"/>
-                      </a:solidFill>
-                      <a:prstDash val="solid"/>
-                      <a:round/>
-                      <a:headEnd type="none" w="med" len="med"/>
-                      <a:tailEnd type="none" w="med" len="med"/>
-                    </a:lnT>
-                    <a:lnB w="6350" cap="flat" cmpd="sng" algn="ctr">
-                      <a:solidFill>
-                        <a:srgbClr val="CCCCCC"/>
-                      </a:solidFill>
-                      <a:prstDash val="solid"/>
-                      <a:round/>
-                      <a:headEnd type="none" w="med" len="med"/>
-                      <a:tailEnd type="none" w="med" len="med"/>
-                    </a:lnB>
-                  </a:tcPr>
-                </a:tc>
-              </a:tr>
-              <a:tr h="326571">
-                <a:tc>
-                  <a:txBody>
-                    <a:bodyPr/>
-                    <a:lstStyle/>
-                    <a:p>
-                      <a:pPr algn="ctr" indent="0" marL="0">
-                        <a:buNone/>
-                      </a:pPr>
-                      <a:r>
-                        <a:rPr lang="en-US" sz="1100" dirty="0">
-                          <a:solidFill>
-                            <a:srgbClr val="000000"/>
-                          </a:solidFill>
-                        </a:rPr>
-                        <a:t>Tenant Isolation</a:t>
-                      </a:r>
-                      <a:endParaRPr lang="en-US" sz="1100" dirty="0"/>
-                    </a:p>
-                  </a:txBody>
-                  <a:tcPr marL="91440" marR="91440" marT="45720" marB="45720" anchor="ctr">
-                    <a:lnL w="6350" cap="flat" cmpd="sng" algn="ctr">
-                      <a:solidFill>
-                        <a:srgbClr val="CCCCCC"/>
-                      </a:solidFill>
-                      <a:prstDash val="solid"/>
-                      <a:round/>
-                      <a:headEnd type="none" w="med" len="med"/>
-                      <a:tailEnd type="none" w="med" len="med"/>
-                    </a:lnL>
-                    <a:lnR w="6350" cap="flat" cmpd="sng" algn="ctr">
-                      <a:solidFill>
-                        <a:srgbClr val="CCCCCC"/>
-                      </a:solidFill>
-                      <a:prstDash val="solid"/>
-                      <a:round/>
-                      <a:headEnd type="none" w="med" len="med"/>
-                      <a:tailEnd type="none" w="med" len="med"/>
-                    </a:lnR>
-                    <a:lnT w="6350" cap="flat" cmpd="sng" algn="ctr">
-                      <a:solidFill>
-                        <a:srgbClr val="CCCCCC"/>
-                      </a:solidFill>
-                      <a:prstDash val="solid"/>
-                      <a:round/>
-                      <a:headEnd type="none" w="med" len="med"/>
-                      <a:tailEnd type="none" w="med" len="med"/>
-                    </a:lnT>
-                    <a:lnB w="6350" cap="flat" cmpd="sng" algn="ctr">
-                      <a:solidFill>
-                        <a:srgbClr val="CCCCCC"/>
-                      </a:solidFill>
-                      <a:prstDash val="solid"/>
-                      <a:round/>
-                      <a:headEnd type="none" w="med" len="med"/>
-                      <a:tailEnd type="none" w="med" len="med"/>
-                    </a:lnB>
-                  </a:tcPr>
-                </a:tc>
-                <a:tc>
-                  <a:txBody>
-                    <a:bodyPr/>
-                    <a:lstStyle/>
-                    <a:p>
-                      <a:pPr algn="ctr" indent="0" marL="0">
-                        <a:buNone/>
-                      </a:pPr>
-                      <a:r>
-                        <a:rPr lang="en-US" sz="1100" dirty="0">
-                          <a:solidFill>
-                            <a:srgbClr val="000000"/>
-                          </a:solidFill>
-                        </a:rPr>
-                        <a:t>Verified</a:t>
-                      </a:r>
-                      <a:endParaRPr lang="en-US" sz="1100" dirty="0"/>
-                    </a:p>
-                  </a:txBody>
-                  <a:tcPr marL="91440" marR="91440" marT="45720" marB="45720" anchor="ctr">
-                    <a:lnL w="6350" cap="flat" cmpd="sng" algn="ctr">
-                      <a:solidFill>
-                        <a:srgbClr val="CCCCCC"/>
-                      </a:solidFill>
-                      <a:prstDash val="solid"/>
-                      <a:round/>
-                      <a:headEnd type="none" w="med" len="med"/>
-                      <a:tailEnd type="none" w="med" len="med"/>
-                    </a:lnL>
-                    <a:lnR w="6350" cap="flat" cmpd="sng" algn="ctr">
-                      <a:solidFill>
-                        <a:srgbClr val="CCCCCC"/>
-                      </a:solidFill>
-                      <a:prstDash val="solid"/>
-                      <a:round/>
-                      <a:headEnd type="none" w="med" len="med"/>
-                      <a:tailEnd type="none" w="med" len="med"/>
-                    </a:lnR>
-                    <a:lnT w="6350" cap="flat" cmpd="sng" algn="ctr">
-                      <a:solidFill>
-                        <a:srgbClr val="CCCCCC"/>
-                      </a:solidFill>
-                      <a:prstDash val="solid"/>
-                      <a:round/>
-                      <a:headEnd type="none" w="med" len="med"/>
-                      <a:tailEnd type="none" w="med" len="med"/>
-                    </a:lnT>
-                    <a:lnB w="6350" cap="flat" cmpd="sng" algn="ctr">
-                      <a:solidFill>
-                        <a:srgbClr val="CCCCCC"/>
-                      </a:solidFill>
-                      <a:prstDash val="solid"/>
-                      <a:round/>
-                      <a:headEnd type="none" w="med" len="med"/>
-                      <a:tailEnd type="none" w="med" len="med"/>
-                    </a:lnB>
-                  </a:tcPr>
-                </a:tc>
-              </a:tr>
-              <a:tr h="326571">
-                <a:tc>
-                  <a:txBody>
-                    <a:bodyPr/>
-                    <a:lstStyle/>
-                    <a:p>
-                      <a:pPr algn="ctr" indent="0" marL="0">
-                        <a:buNone/>
-                      </a:pPr>
-                      <a:r>
-                        <a:rPr lang="en-US" sz="1100" dirty="0">
-                          <a:solidFill>
-                            <a:srgbClr val="000000"/>
-                          </a:solidFill>
-                        </a:rPr>
-                        <a:t>Overall Status</a:t>
-                      </a:r>
-                      <a:endParaRPr lang="en-US" sz="1100" dirty="0"/>
-                    </a:p>
-                  </a:txBody>
-                  <a:tcPr marL="91440" marR="91440" marT="45720" marB="45720" anchor="ctr">
-                    <a:lnL w="6350" cap="flat" cmpd="sng" algn="ctr">
-                      <a:solidFill>
-                        <a:srgbClr val="CCCCCC"/>
-                      </a:solidFill>
-                      <a:prstDash val="solid"/>
-                      <a:round/>
-                      <a:headEnd type="none" w="med" len="med"/>
-                      <a:tailEnd type="none" w="med" len="med"/>
-                    </a:lnL>
-                    <a:lnR w="6350" cap="flat" cmpd="sng" algn="ctr">
-                      <a:solidFill>
-                        <a:srgbClr val="CCCCCC"/>
-                      </a:solidFill>
-                      <a:prstDash val="solid"/>
-                      <a:round/>
-                      <a:headEnd type="none" w="med" len="med"/>
-                      <a:tailEnd type="none" w="med" len="med"/>
-                    </a:lnR>
-                    <a:lnT w="6350" cap="flat" cmpd="sng" algn="ctr">
-                      <a:solidFill>
-                        <a:srgbClr val="CCCCCC"/>
-                      </a:solidFill>
-                      <a:prstDash val="solid"/>
-                      <a:round/>
-                      <a:headEnd type="none" w="med" len="med"/>
-                      <a:tailEnd type="none" w="med" len="med"/>
-                    </a:lnT>
-                    <a:lnB w="6350" cap="flat" cmpd="sng" algn="ctr">
-                      <a:solidFill>
-                        <a:srgbClr val="CCCCCC"/>
-                      </a:solidFill>
-                      <a:prstDash val="solid"/>
-                      <a:round/>
-                      <a:headEnd type="none" w="med" len="med"/>
-                      <a:tailEnd type="none" w="med" len="med"/>
-                    </a:lnB>
-                  </a:tcPr>
-                </a:tc>
-                <a:tc>
-                  <a:txBody>
-                    <a:bodyPr/>
-                    <a:lstStyle/>
-                    <a:p>
-                      <a:pPr algn="ctr" indent="0" marL="0">
-                        <a:buNone/>
-                      </a:pPr>
-                      <a:r>
-                        <a:rPr lang="en-US" sz="1100" dirty="0">
-                          <a:solidFill>
-                            <a:srgbClr val="000000"/>
-                          </a:solidFill>
-                        </a:rPr>
-                        <a:t>PASS</a:t>
-                      </a:r>
-                      <a:endParaRPr lang="en-US" sz="1100" dirty="0"/>
-                    </a:p>
-                  </a:txBody>
-                  <a:tcPr marL="91440" marR="91440" marT="45720" marB="45720" anchor="ctr">
-                    <a:lnL w="6350" cap="flat" cmpd="sng" algn="ctr">
-                      <a:solidFill>
-                        <a:srgbClr val="CCCCCC"/>
-                      </a:solidFill>
-                      <a:prstDash val="solid"/>
-                      <a:round/>
-                      <a:headEnd type="none" w="med" len="med"/>
-                      <a:tailEnd type="none" w="med" len="med"/>
-                    </a:lnL>
-                    <a:lnR w="6350" cap="flat" cmpd="sng" algn="ctr">
-                      <a:solidFill>
-                        <a:srgbClr val="CCCCCC"/>
-                      </a:solidFill>
-                      <a:prstDash val="solid"/>
-                      <a:round/>
-                      <a:headEnd type="none" w="med" len="med"/>
-                      <a:tailEnd type="none" w="med" len="med"/>
-                    </a:lnR>
-                    <a:lnT w="6350" cap="flat" cmpd="sng" algn="ctr">
-                      <a:solidFill>
-                        <a:srgbClr val="CCCCCC"/>
-                      </a:solidFill>
-                      <a:prstDash val="solid"/>
-                      <a:round/>
-                      <a:headEnd type="none" w="med" len="med"/>
-                      <a:tailEnd type="none" w="med" len="med"/>
-                    </a:lnT>
-                    <a:lnB w="6350" cap="flat" cmpd="sng" algn="ctr">
-                      <a:solidFill>
-                        <a:srgbClr val="CCCCCC"/>
-                      </a:solidFill>
-                      <a:prstDash val="solid"/>
-                      <a:round/>
-                      <a:headEnd type="none" w="med" len="med"/>
-                      <a:tailEnd type="none" w="med" len="med"/>
-                    </a:lnB>
-                  </a:tcPr>
-                </a:tc>
-              </a:tr>
-            </a:tbl>
-          </a:graphicData>
-        </a:graphic>
-      </p:graphicFrame>
+      <p:pic>
+        <p:nvPicPr>
+          <p:cNvPr id="5" name="Image 0" descr="/Users/sriramvenkatg/edunexus/e2e-tests/screenshots/hod_nexus-ec_dashboard.png">    </p:cNvPr>
+          <p:cNvPicPr>
+            <a:picLocks noChangeAspect="1"/>
+          </p:cNvPicPr>
+          <p:nvPr/>
+        </p:nvPicPr>
+        <p:blipFill>
+          <a:blip r:embed="rId1"/>
+          <a:stretch>
+            <a:fillRect/>
+          </a:stretch>
+        </p:blipFill>
+        <p:spPr>
+          <a:xfrm>
+            <a:off x="274320" y="822960"/>
+            <a:ext cx="8595360" cy="3840480"/>
+          </a:xfrm>
+          <a:prstGeom prst="rect">
+            <a:avLst/>
+          </a:prstGeom>
+        </p:spPr>
+      </p:pic>
       <p:sp>
         <p:nvSpPr>
           <p:cNvPr id="6" name="Text 3"/>
@@ -21418,8 +23930,8 @@
         </p:nvSpPr>
         <p:spPr>
           <a:xfrm>
-            <a:off x="4572000" y="1280160"/>
-            <a:ext cx="4114800" cy="365760"/>
+            <a:off x="274320" y="4709160"/>
+            <a:ext cx="8595360" cy="274320"/>
           </a:xfrm>
           <a:prstGeom prst="rect">
             <a:avLst/>
@@ -21431,886 +23943,24 @@
           <a:bodyPr wrap="square" rtlCol="0" anchor="ctr"/>
           <a:lstStyle/>
           <a:p>
-            <a:pPr indent="0" marL="0">
+            <a:pPr algn="ctr" indent="0" marL="0">
               <a:buNone/>
             </a:pPr>
             <a:r>
-              <a:rPr lang="en-US" sz="1600" b="1" dirty="0">
+              <a:rPr lang="en-US" sz="1100" dirty="0">
                 <a:solidFill>
-                  <a:srgbClr val="0D9488"/>
+                  <a:srgbClr val="1F2937"/>
                 </a:solidFill>
                 <a:latin typeface="Arial" pitchFamily="34" charset="0"/>
                 <a:ea typeface="Arial" pitchFamily="34" charset="-122"/>
                 <a:cs typeface="Arial" pitchFamily="34" charset="-120"/>
               </a:rPr>
-              <a:t>Performance &amp; Security</a:t>
+              <a:t>Faculty Management • Student Performance • Curriculum • Batch Analytics</a:t>
             </a:r>
-            <a:endParaRPr lang="en-US" sz="1600" dirty="0"/>
+            <a:endParaRPr lang="en-US" sz="1100" dirty="0"/>
           </a:p>
         </p:txBody>
       </p:sp>
-      <p:graphicFrame>
-        <p:nvGraphicFramePr>
-          <p:cNvPr id="19" name="Table 1"/>
-          <p:cNvGraphicFramePr>
-            <a:graphicFrameLocks noGrp="1"/>
-          </p:cNvGraphicFramePr>
-          <p:nvPr>
-            <p:extLst>
-              <p:ext uri="{D42A27DB-BD31-4B8C-83A1-F6EECF244321}">
-                <p14:modId xmlns:p14="http://schemas.microsoft.com/office/powerpoint/2010/main" val="1579011935"/>
-              </p:ext>
-            </p:extLst>
-          </p:nvPr>
-        </p:nvGraphicFramePr>
-        <p:xfrm>
-          <a:off x="4572000" y="1645920"/>
-          <a:ext cx="4114800" cy="2286000"/>
-        </p:xfrm>
-        <a:graphic>
-          <a:graphicData uri="http://schemas.openxmlformats.org/drawingml/2006/table">
-            <a:tbl>
-              <a:tblPr/>
-              <a:tblGrid>
-                <a:gridCol w="2057400"/>
-                <a:gridCol w="2057400"/>
-              </a:tblGrid>
-              <a:tr h="326571">
-                <a:tc>
-                  <a:txBody>
-                    <a:bodyPr/>
-                    <a:lstStyle/>
-                    <a:p>
-                      <a:pPr algn="ctr" indent="0" marL="0">
-                        <a:buNone/>
-                      </a:pPr>
-                      <a:r>
-                        <a:rPr lang="en-US" sz="1100" b="1" dirty="0">
-                          <a:solidFill>
-                            <a:srgbClr val="FFFFFF"/>
-                          </a:solidFill>
-                        </a:rPr>
-                        <a:t>Aspect</a:t>
-                      </a:r>
-                      <a:endParaRPr lang="en-US" sz="1100" dirty="0"/>
-                    </a:p>
-                  </a:txBody>
-                  <a:tcPr marL="91440" marR="91440" marT="45720" marB="45720" anchor="ctr">
-                    <a:lnL w="6350" cap="flat" cmpd="sng" algn="ctr">
-                      <a:solidFill>
-                        <a:srgbClr val="CCCCCC"/>
-                      </a:solidFill>
-                      <a:prstDash val="solid"/>
-                      <a:round/>
-                      <a:headEnd type="none" w="med" len="med"/>
-                      <a:tailEnd type="none" w="med" len="med"/>
-                    </a:lnL>
-                    <a:lnR w="6350" cap="flat" cmpd="sng" algn="ctr">
-                      <a:solidFill>
-                        <a:srgbClr val="CCCCCC"/>
-                      </a:solidFill>
-                      <a:prstDash val="solid"/>
-                      <a:round/>
-                      <a:headEnd type="none" w="med" len="med"/>
-                      <a:tailEnd type="none" w="med" len="med"/>
-                    </a:lnR>
-                    <a:lnT w="6350" cap="flat" cmpd="sng" algn="ctr">
-                      <a:solidFill>
-                        <a:srgbClr val="CCCCCC"/>
-                      </a:solidFill>
-                      <a:prstDash val="solid"/>
-                      <a:round/>
-                      <a:headEnd type="none" w="med" len="med"/>
-                      <a:tailEnd type="none" w="med" len="med"/>
-                    </a:lnT>
-                    <a:lnB w="6350" cap="flat" cmpd="sng" algn="ctr">
-                      <a:solidFill>
-                        <a:srgbClr val="CCCCCC"/>
-                      </a:solidFill>
-                      <a:prstDash val="solid"/>
-                      <a:round/>
-                      <a:headEnd type="none" w="med" len="med"/>
-                      <a:tailEnd type="none" w="med" len="med"/>
-                    </a:lnB>
-                    <a:solidFill>
-                      <a:srgbClr val="1E40AF"/>
-                    </a:solidFill>
-                  </a:tcPr>
-                </a:tc>
-                <a:tc>
-                  <a:txBody>
-                    <a:bodyPr/>
-                    <a:lstStyle/>
-                    <a:p>
-                      <a:pPr algn="ctr" indent="0" marL="0">
-                        <a:buNone/>
-                      </a:pPr>
-                      <a:r>
-                        <a:rPr lang="en-US" sz="1100" b="1" dirty="0">
-                          <a:solidFill>
-                            <a:srgbClr val="FFFFFF"/>
-                          </a:solidFill>
-                        </a:rPr>
-                        <a:t>Status</a:t>
-                      </a:r>
-                      <a:endParaRPr lang="en-US" sz="1100" dirty="0"/>
-                    </a:p>
-                  </a:txBody>
-                  <a:tcPr marL="91440" marR="91440" marT="45720" marB="45720" anchor="ctr">
-                    <a:lnL w="6350" cap="flat" cmpd="sng" algn="ctr">
-                      <a:solidFill>
-                        <a:srgbClr val="CCCCCC"/>
-                      </a:solidFill>
-                      <a:prstDash val="solid"/>
-                      <a:round/>
-                      <a:headEnd type="none" w="med" len="med"/>
-                      <a:tailEnd type="none" w="med" len="med"/>
-                    </a:lnL>
-                    <a:lnR w="6350" cap="flat" cmpd="sng" algn="ctr">
-                      <a:solidFill>
-                        <a:srgbClr val="CCCCCC"/>
-                      </a:solidFill>
-                      <a:prstDash val="solid"/>
-                      <a:round/>
-                      <a:headEnd type="none" w="med" len="med"/>
-                      <a:tailEnd type="none" w="med" len="med"/>
-                    </a:lnR>
-                    <a:lnT w="6350" cap="flat" cmpd="sng" algn="ctr">
-                      <a:solidFill>
-                        <a:srgbClr val="CCCCCC"/>
-                      </a:solidFill>
-                      <a:prstDash val="solid"/>
-                      <a:round/>
-                      <a:headEnd type="none" w="med" len="med"/>
-                      <a:tailEnd type="none" w="med" len="med"/>
-                    </a:lnT>
-                    <a:lnB w="6350" cap="flat" cmpd="sng" algn="ctr">
-                      <a:solidFill>
-                        <a:srgbClr val="CCCCCC"/>
-                      </a:solidFill>
-                      <a:prstDash val="solid"/>
-                      <a:round/>
-                      <a:headEnd type="none" w="med" len="med"/>
-                      <a:tailEnd type="none" w="med" len="med"/>
-                    </a:lnB>
-                    <a:solidFill>
-                      <a:srgbClr val="1E40AF"/>
-                    </a:solidFill>
-                  </a:tcPr>
-                </a:tc>
-              </a:tr>
-              <a:tr h="326571">
-                <a:tc>
-                  <a:txBody>
-                    <a:bodyPr/>
-                    <a:lstStyle/>
-                    <a:p>
-                      <a:pPr algn="ctr" indent="0" marL="0">
-                        <a:buNone/>
-                      </a:pPr>
-                      <a:r>
-                        <a:rPr lang="en-US" sz="1100" dirty="0">
-                          <a:solidFill>
-                            <a:srgbClr val="000000"/>
-                          </a:solidFill>
-                        </a:rPr>
-                        <a:t>Dashboard Load</a:t>
-                      </a:r>
-                      <a:endParaRPr lang="en-US" sz="1100" dirty="0"/>
-                    </a:p>
-                  </a:txBody>
-                  <a:tcPr marL="91440" marR="91440" marT="45720" marB="45720" anchor="ctr">
-                    <a:lnL w="6350" cap="flat" cmpd="sng" algn="ctr">
-                      <a:solidFill>
-                        <a:srgbClr val="CCCCCC"/>
-                      </a:solidFill>
-                      <a:prstDash val="solid"/>
-                      <a:round/>
-                      <a:headEnd type="none" w="med" len="med"/>
-                      <a:tailEnd type="none" w="med" len="med"/>
-                    </a:lnL>
-                    <a:lnR w="6350" cap="flat" cmpd="sng" algn="ctr">
-                      <a:solidFill>
-                        <a:srgbClr val="CCCCCC"/>
-                      </a:solidFill>
-                      <a:prstDash val="solid"/>
-                      <a:round/>
-                      <a:headEnd type="none" w="med" len="med"/>
-                      <a:tailEnd type="none" w="med" len="med"/>
-                    </a:lnR>
-                    <a:lnT w="6350" cap="flat" cmpd="sng" algn="ctr">
-                      <a:solidFill>
-                        <a:srgbClr val="CCCCCC"/>
-                      </a:solidFill>
-                      <a:prstDash val="solid"/>
-                      <a:round/>
-                      <a:headEnd type="none" w="med" len="med"/>
-                      <a:tailEnd type="none" w="med" len="med"/>
-                    </a:lnT>
-                    <a:lnB w="6350" cap="flat" cmpd="sng" algn="ctr">
-                      <a:solidFill>
-                        <a:srgbClr val="CCCCCC"/>
-                      </a:solidFill>
-                      <a:prstDash val="solid"/>
-                      <a:round/>
-                      <a:headEnd type="none" w="med" len="med"/>
-                      <a:tailEnd type="none" w="med" len="med"/>
-                    </a:lnB>
-                  </a:tcPr>
-                </a:tc>
-                <a:tc>
-                  <a:txBody>
-                    <a:bodyPr/>
-                    <a:lstStyle/>
-                    <a:p>
-                      <a:pPr algn="ctr" indent="0" marL="0">
-                        <a:buNone/>
-                      </a:pPr>
-                      <a:r>
-                        <a:rPr lang="en-US" sz="1100" dirty="0">
-                          <a:solidFill>
-                            <a:srgbClr val="000000"/>
-                          </a:solidFill>
-                        </a:rPr>
-                        <a:t>&lt; 3 seconds</a:t>
-                      </a:r>
-                      <a:endParaRPr lang="en-US" sz="1100" dirty="0"/>
-                    </a:p>
-                  </a:txBody>
-                  <a:tcPr marL="91440" marR="91440" marT="45720" marB="45720" anchor="ctr">
-                    <a:lnL w="6350" cap="flat" cmpd="sng" algn="ctr">
-                      <a:solidFill>
-                        <a:srgbClr val="CCCCCC"/>
-                      </a:solidFill>
-                      <a:prstDash val="solid"/>
-                      <a:round/>
-                      <a:headEnd type="none" w="med" len="med"/>
-                      <a:tailEnd type="none" w="med" len="med"/>
-                    </a:lnL>
-                    <a:lnR w="6350" cap="flat" cmpd="sng" algn="ctr">
-                      <a:solidFill>
-                        <a:srgbClr val="CCCCCC"/>
-                      </a:solidFill>
-                      <a:prstDash val="solid"/>
-                      <a:round/>
-                      <a:headEnd type="none" w="med" len="med"/>
-                      <a:tailEnd type="none" w="med" len="med"/>
-                    </a:lnR>
-                    <a:lnT w="6350" cap="flat" cmpd="sng" algn="ctr">
-                      <a:solidFill>
-                        <a:srgbClr val="CCCCCC"/>
-                      </a:solidFill>
-                      <a:prstDash val="solid"/>
-                      <a:round/>
-                      <a:headEnd type="none" w="med" len="med"/>
-                      <a:tailEnd type="none" w="med" len="med"/>
-                    </a:lnT>
-                    <a:lnB w="6350" cap="flat" cmpd="sng" algn="ctr">
-                      <a:solidFill>
-                        <a:srgbClr val="CCCCCC"/>
-                      </a:solidFill>
-                      <a:prstDash val="solid"/>
-                      <a:round/>
-                      <a:headEnd type="none" w="med" len="med"/>
-                      <a:tailEnd type="none" w="med" len="med"/>
-                    </a:lnB>
-                  </a:tcPr>
-                </a:tc>
-              </a:tr>
-              <a:tr h="326571">
-                <a:tc>
-                  <a:txBody>
-                    <a:bodyPr/>
-                    <a:lstStyle/>
-                    <a:p>
-                      <a:pPr algn="ctr" indent="0" marL="0">
-                        <a:buNone/>
-                      </a:pPr>
-                      <a:r>
-                        <a:rPr lang="en-US" sz="1100" dirty="0">
-                          <a:solidFill>
-                            <a:srgbClr val="000000"/>
-                          </a:solidFill>
-                        </a:rPr>
-                        <a:t>API Response (p95)</a:t>
-                      </a:r>
-                      <a:endParaRPr lang="en-US" sz="1100" dirty="0"/>
-                    </a:p>
-                  </a:txBody>
-                  <a:tcPr marL="91440" marR="91440" marT="45720" marB="45720" anchor="ctr">
-                    <a:lnL w="6350" cap="flat" cmpd="sng" algn="ctr">
-                      <a:solidFill>
-                        <a:srgbClr val="CCCCCC"/>
-                      </a:solidFill>
-                      <a:prstDash val="solid"/>
-                      <a:round/>
-                      <a:headEnd type="none" w="med" len="med"/>
-                      <a:tailEnd type="none" w="med" len="med"/>
-                    </a:lnL>
-                    <a:lnR w="6350" cap="flat" cmpd="sng" algn="ctr">
-                      <a:solidFill>
-                        <a:srgbClr val="CCCCCC"/>
-                      </a:solidFill>
-                      <a:prstDash val="solid"/>
-                      <a:round/>
-                      <a:headEnd type="none" w="med" len="med"/>
-                      <a:tailEnd type="none" w="med" len="med"/>
-                    </a:lnR>
-                    <a:lnT w="6350" cap="flat" cmpd="sng" algn="ctr">
-                      <a:solidFill>
-                        <a:srgbClr val="CCCCCC"/>
-                      </a:solidFill>
-                      <a:prstDash val="solid"/>
-                      <a:round/>
-                      <a:headEnd type="none" w="med" len="med"/>
-                      <a:tailEnd type="none" w="med" len="med"/>
-                    </a:lnT>
-                    <a:lnB w="6350" cap="flat" cmpd="sng" algn="ctr">
-                      <a:solidFill>
-                        <a:srgbClr val="CCCCCC"/>
-                      </a:solidFill>
-                      <a:prstDash val="solid"/>
-                      <a:round/>
-                      <a:headEnd type="none" w="med" len="med"/>
-                      <a:tailEnd type="none" w="med" len="med"/>
-                    </a:lnB>
-                  </a:tcPr>
-                </a:tc>
-                <a:tc>
-                  <a:txBody>
-                    <a:bodyPr/>
-                    <a:lstStyle/>
-                    <a:p>
-                      <a:pPr algn="ctr" indent="0" marL="0">
-                        <a:buNone/>
-                      </a:pPr>
-                      <a:r>
-                        <a:rPr lang="en-US" sz="1100" dirty="0">
-                          <a:solidFill>
-                            <a:srgbClr val="000000"/>
-                          </a:solidFill>
-                        </a:rPr>
-                        <a:t>&lt; 200ms</a:t>
-                      </a:r>
-                      <a:endParaRPr lang="en-US" sz="1100" dirty="0"/>
-                    </a:p>
-                  </a:txBody>
-                  <a:tcPr marL="91440" marR="91440" marT="45720" marB="45720" anchor="ctr">
-                    <a:lnL w="6350" cap="flat" cmpd="sng" algn="ctr">
-                      <a:solidFill>
-                        <a:srgbClr val="CCCCCC"/>
-                      </a:solidFill>
-                      <a:prstDash val="solid"/>
-                      <a:round/>
-                      <a:headEnd type="none" w="med" len="med"/>
-                      <a:tailEnd type="none" w="med" len="med"/>
-                    </a:lnL>
-                    <a:lnR w="6350" cap="flat" cmpd="sng" algn="ctr">
-                      <a:solidFill>
-                        <a:srgbClr val="CCCCCC"/>
-                      </a:solidFill>
-                      <a:prstDash val="solid"/>
-                      <a:round/>
-                      <a:headEnd type="none" w="med" len="med"/>
-                      <a:tailEnd type="none" w="med" len="med"/>
-                    </a:lnR>
-                    <a:lnT w="6350" cap="flat" cmpd="sng" algn="ctr">
-                      <a:solidFill>
-                        <a:srgbClr val="CCCCCC"/>
-                      </a:solidFill>
-                      <a:prstDash val="solid"/>
-                      <a:round/>
-                      <a:headEnd type="none" w="med" len="med"/>
-                      <a:tailEnd type="none" w="med" len="med"/>
-                    </a:lnT>
-                    <a:lnB w="6350" cap="flat" cmpd="sng" algn="ctr">
-                      <a:solidFill>
-                        <a:srgbClr val="CCCCCC"/>
-                      </a:solidFill>
-                      <a:prstDash val="solid"/>
-                      <a:round/>
-                      <a:headEnd type="none" w="med" len="med"/>
-                      <a:tailEnd type="none" w="med" len="med"/>
-                    </a:lnB>
-                  </a:tcPr>
-                </a:tc>
-              </a:tr>
-              <a:tr h="326571">
-                <a:tc>
-                  <a:txBody>
-                    <a:bodyPr/>
-                    <a:lstStyle/>
-                    <a:p>
-                      <a:pPr algn="ctr" indent="0" marL="0">
-                        <a:buNone/>
-                      </a:pPr>
-                      <a:r>
-                        <a:rPr lang="en-US" sz="1100" dirty="0">
-                          <a:solidFill>
-                            <a:srgbClr val="000000"/>
-                          </a:solidFill>
-                        </a:rPr>
-                        <a:t>Uptime SLA</a:t>
-                      </a:r>
-                      <a:endParaRPr lang="en-US" sz="1100" dirty="0"/>
-                    </a:p>
-                  </a:txBody>
-                  <a:tcPr marL="91440" marR="91440" marT="45720" marB="45720" anchor="ctr">
-                    <a:lnL w="6350" cap="flat" cmpd="sng" algn="ctr">
-                      <a:solidFill>
-                        <a:srgbClr val="CCCCCC"/>
-                      </a:solidFill>
-                      <a:prstDash val="solid"/>
-                      <a:round/>
-                      <a:headEnd type="none" w="med" len="med"/>
-                      <a:tailEnd type="none" w="med" len="med"/>
-                    </a:lnL>
-                    <a:lnR w="6350" cap="flat" cmpd="sng" algn="ctr">
-                      <a:solidFill>
-                        <a:srgbClr val="CCCCCC"/>
-                      </a:solidFill>
-                      <a:prstDash val="solid"/>
-                      <a:round/>
-                      <a:headEnd type="none" w="med" len="med"/>
-                      <a:tailEnd type="none" w="med" len="med"/>
-                    </a:lnR>
-                    <a:lnT w="6350" cap="flat" cmpd="sng" algn="ctr">
-                      <a:solidFill>
-                        <a:srgbClr val="CCCCCC"/>
-                      </a:solidFill>
-                      <a:prstDash val="solid"/>
-                      <a:round/>
-                      <a:headEnd type="none" w="med" len="med"/>
-                      <a:tailEnd type="none" w="med" len="med"/>
-                    </a:lnT>
-                    <a:lnB w="6350" cap="flat" cmpd="sng" algn="ctr">
-                      <a:solidFill>
-                        <a:srgbClr val="CCCCCC"/>
-                      </a:solidFill>
-                      <a:prstDash val="solid"/>
-                      <a:round/>
-                      <a:headEnd type="none" w="med" len="med"/>
-                      <a:tailEnd type="none" w="med" len="med"/>
-                    </a:lnB>
-                  </a:tcPr>
-                </a:tc>
-                <a:tc>
-                  <a:txBody>
-                    <a:bodyPr/>
-                    <a:lstStyle/>
-                    <a:p>
-                      <a:pPr algn="ctr" indent="0" marL="0">
-                        <a:buNone/>
-                      </a:pPr>
-                      <a:r>
-                        <a:rPr lang="en-US" sz="1100" dirty="0">
-                          <a:solidFill>
-                            <a:srgbClr val="000000"/>
-                          </a:solidFill>
-                        </a:rPr>
-                        <a:t>99.9%</a:t>
-                      </a:r>
-                      <a:endParaRPr lang="en-US" sz="1100" dirty="0"/>
-                    </a:p>
-                  </a:txBody>
-                  <a:tcPr marL="91440" marR="91440" marT="45720" marB="45720" anchor="ctr">
-                    <a:lnL w="6350" cap="flat" cmpd="sng" algn="ctr">
-                      <a:solidFill>
-                        <a:srgbClr val="CCCCCC"/>
-                      </a:solidFill>
-                      <a:prstDash val="solid"/>
-                      <a:round/>
-                      <a:headEnd type="none" w="med" len="med"/>
-                      <a:tailEnd type="none" w="med" len="med"/>
-                    </a:lnL>
-                    <a:lnR w="6350" cap="flat" cmpd="sng" algn="ctr">
-                      <a:solidFill>
-                        <a:srgbClr val="CCCCCC"/>
-                      </a:solidFill>
-                      <a:prstDash val="solid"/>
-                      <a:round/>
-                      <a:headEnd type="none" w="med" len="med"/>
-                      <a:tailEnd type="none" w="med" len="med"/>
-                    </a:lnR>
-                    <a:lnT w="6350" cap="flat" cmpd="sng" algn="ctr">
-                      <a:solidFill>
-                        <a:srgbClr val="CCCCCC"/>
-                      </a:solidFill>
-                      <a:prstDash val="solid"/>
-                      <a:round/>
-                      <a:headEnd type="none" w="med" len="med"/>
-                      <a:tailEnd type="none" w="med" len="med"/>
-                    </a:lnT>
-                    <a:lnB w="6350" cap="flat" cmpd="sng" algn="ctr">
-                      <a:solidFill>
-                        <a:srgbClr val="CCCCCC"/>
-                      </a:solidFill>
-                      <a:prstDash val="solid"/>
-                      <a:round/>
-                      <a:headEnd type="none" w="med" len="med"/>
-                      <a:tailEnd type="none" w="med" len="med"/>
-                    </a:lnB>
-                  </a:tcPr>
-                </a:tc>
-              </a:tr>
-              <a:tr h="326571">
-                <a:tc>
-                  <a:txBody>
-                    <a:bodyPr/>
-                    <a:lstStyle/>
-                    <a:p>
-                      <a:pPr algn="ctr" indent="0" marL="0">
-                        <a:buNone/>
-                      </a:pPr>
-                      <a:r>
-                        <a:rPr lang="en-US" sz="1100" dirty="0">
-                          <a:solidFill>
-                            <a:srgbClr val="000000"/>
-                          </a:solidFill>
-                        </a:rPr>
-                        <a:t>Encryption</a:t>
-                      </a:r>
-                      <a:endParaRPr lang="en-US" sz="1100" dirty="0"/>
-                    </a:p>
-                  </a:txBody>
-                  <a:tcPr marL="91440" marR="91440" marT="45720" marB="45720" anchor="ctr">
-                    <a:lnL w="6350" cap="flat" cmpd="sng" algn="ctr">
-                      <a:solidFill>
-                        <a:srgbClr val="CCCCCC"/>
-                      </a:solidFill>
-                      <a:prstDash val="solid"/>
-                      <a:round/>
-                      <a:headEnd type="none" w="med" len="med"/>
-                      <a:tailEnd type="none" w="med" len="med"/>
-                    </a:lnL>
-                    <a:lnR w="6350" cap="flat" cmpd="sng" algn="ctr">
-                      <a:solidFill>
-                        <a:srgbClr val="CCCCCC"/>
-                      </a:solidFill>
-                      <a:prstDash val="solid"/>
-                      <a:round/>
-                      <a:headEnd type="none" w="med" len="med"/>
-                      <a:tailEnd type="none" w="med" len="med"/>
-                    </a:lnR>
-                    <a:lnT w="6350" cap="flat" cmpd="sng" algn="ctr">
-                      <a:solidFill>
-                        <a:srgbClr val="CCCCCC"/>
-                      </a:solidFill>
-                      <a:prstDash val="solid"/>
-                      <a:round/>
-                      <a:headEnd type="none" w="med" len="med"/>
-                      <a:tailEnd type="none" w="med" len="med"/>
-                    </a:lnT>
-                    <a:lnB w="6350" cap="flat" cmpd="sng" algn="ctr">
-                      <a:solidFill>
-                        <a:srgbClr val="CCCCCC"/>
-                      </a:solidFill>
-                      <a:prstDash val="solid"/>
-                      <a:round/>
-                      <a:headEnd type="none" w="med" len="med"/>
-                      <a:tailEnd type="none" w="med" len="med"/>
-                    </a:lnB>
-                  </a:tcPr>
-                </a:tc>
-                <a:tc>
-                  <a:txBody>
-                    <a:bodyPr/>
-                    <a:lstStyle/>
-                    <a:p>
-                      <a:pPr algn="ctr" indent="0" marL="0">
-                        <a:buNone/>
-                      </a:pPr>
-                      <a:r>
-                        <a:rPr lang="en-US" sz="1100" dirty="0">
-                          <a:solidFill>
-                            <a:srgbClr val="000000"/>
-                          </a:solidFill>
-                        </a:rPr>
-                        <a:t>AES-256 + TLS 1.3</a:t>
-                      </a:r>
-                      <a:endParaRPr lang="en-US" sz="1100" dirty="0"/>
-                    </a:p>
-                  </a:txBody>
-                  <a:tcPr marL="91440" marR="91440" marT="45720" marB="45720" anchor="ctr">
-                    <a:lnL w="6350" cap="flat" cmpd="sng" algn="ctr">
-                      <a:solidFill>
-                        <a:srgbClr val="CCCCCC"/>
-                      </a:solidFill>
-                      <a:prstDash val="solid"/>
-                      <a:round/>
-                      <a:headEnd type="none" w="med" len="med"/>
-                      <a:tailEnd type="none" w="med" len="med"/>
-                    </a:lnL>
-                    <a:lnR w="6350" cap="flat" cmpd="sng" algn="ctr">
-                      <a:solidFill>
-                        <a:srgbClr val="CCCCCC"/>
-                      </a:solidFill>
-                      <a:prstDash val="solid"/>
-                      <a:round/>
-                      <a:headEnd type="none" w="med" len="med"/>
-                      <a:tailEnd type="none" w="med" len="med"/>
-                    </a:lnR>
-                    <a:lnT w="6350" cap="flat" cmpd="sng" algn="ctr">
-                      <a:solidFill>
-                        <a:srgbClr val="CCCCCC"/>
-                      </a:solidFill>
-                      <a:prstDash val="solid"/>
-                      <a:round/>
-                      <a:headEnd type="none" w="med" len="med"/>
-                      <a:tailEnd type="none" w="med" len="med"/>
-                    </a:lnT>
-                    <a:lnB w="6350" cap="flat" cmpd="sng" algn="ctr">
-                      <a:solidFill>
-                        <a:srgbClr val="CCCCCC"/>
-                      </a:solidFill>
-                      <a:prstDash val="solid"/>
-                      <a:round/>
-                      <a:headEnd type="none" w="med" len="med"/>
-                      <a:tailEnd type="none" w="med" len="med"/>
-                    </a:lnB>
-                  </a:tcPr>
-                </a:tc>
-              </a:tr>
-              <a:tr h="326571">
-                <a:tc>
-                  <a:txBody>
-                    <a:bodyPr/>
-                    <a:lstStyle/>
-                    <a:p>
-                      <a:pPr algn="ctr" indent="0" marL="0">
-                        <a:buNone/>
-                      </a:pPr>
-                      <a:r>
-                        <a:rPr lang="en-US" sz="1100" dirty="0">
-                          <a:solidFill>
-                            <a:srgbClr val="000000"/>
-                          </a:solidFill>
-                        </a:rPr>
-                        <a:t>Data Location</a:t>
-                      </a:r>
-                      <a:endParaRPr lang="en-US" sz="1100" dirty="0"/>
-                    </a:p>
-                  </a:txBody>
-                  <a:tcPr marL="91440" marR="91440" marT="45720" marB="45720" anchor="ctr">
-                    <a:lnL w="6350" cap="flat" cmpd="sng" algn="ctr">
-                      <a:solidFill>
-                        <a:srgbClr val="CCCCCC"/>
-                      </a:solidFill>
-                      <a:prstDash val="solid"/>
-                      <a:round/>
-                      <a:headEnd type="none" w="med" len="med"/>
-                      <a:tailEnd type="none" w="med" len="med"/>
-                    </a:lnL>
-                    <a:lnR w="6350" cap="flat" cmpd="sng" algn="ctr">
-                      <a:solidFill>
-                        <a:srgbClr val="CCCCCC"/>
-                      </a:solidFill>
-                      <a:prstDash val="solid"/>
-                      <a:round/>
-                      <a:headEnd type="none" w="med" len="med"/>
-                      <a:tailEnd type="none" w="med" len="med"/>
-                    </a:lnR>
-                    <a:lnT w="6350" cap="flat" cmpd="sng" algn="ctr">
-                      <a:solidFill>
-                        <a:srgbClr val="CCCCCC"/>
-                      </a:solidFill>
-                      <a:prstDash val="solid"/>
-                      <a:round/>
-                      <a:headEnd type="none" w="med" len="med"/>
-                      <a:tailEnd type="none" w="med" len="med"/>
-                    </a:lnT>
-                    <a:lnB w="6350" cap="flat" cmpd="sng" algn="ctr">
-                      <a:solidFill>
-                        <a:srgbClr val="CCCCCC"/>
-                      </a:solidFill>
-                      <a:prstDash val="solid"/>
-                      <a:round/>
-                      <a:headEnd type="none" w="med" len="med"/>
-                      <a:tailEnd type="none" w="med" len="med"/>
-                    </a:lnB>
-                  </a:tcPr>
-                </a:tc>
-                <a:tc>
-                  <a:txBody>
-                    <a:bodyPr/>
-                    <a:lstStyle/>
-                    <a:p>
-                      <a:pPr algn="ctr" indent="0" marL="0">
-                        <a:buNone/>
-                      </a:pPr>
-                      <a:r>
-                        <a:rPr lang="en-US" sz="1100" dirty="0">
-                          <a:solidFill>
-                            <a:srgbClr val="000000"/>
-                          </a:solidFill>
-                        </a:rPr>
-                        <a:t>AWS Mumbai (India)</a:t>
-                      </a:r>
-                      <a:endParaRPr lang="en-US" sz="1100" dirty="0"/>
-                    </a:p>
-                  </a:txBody>
-                  <a:tcPr marL="91440" marR="91440" marT="45720" marB="45720" anchor="ctr">
-                    <a:lnL w="6350" cap="flat" cmpd="sng" algn="ctr">
-                      <a:solidFill>
-                        <a:srgbClr val="CCCCCC"/>
-                      </a:solidFill>
-                      <a:prstDash val="solid"/>
-                      <a:round/>
-                      <a:headEnd type="none" w="med" len="med"/>
-                      <a:tailEnd type="none" w="med" len="med"/>
-                    </a:lnL>
-                    <a:lnR w="6350" cap="flat" cmpd="sng" algn="ctr">
-                      <a:solidFill>
-                        <a:srgbClr val="CCCCCC"/>
-                      </a:solidFill>
-                      <a:prstDash val="solid"/>
-                      <a:round/>
-                      <a:headEnd type="none" w="med" len="med"/>
-                      <a:tailEnd type="none" w="med" len="med"/>
-                    </a:lnR>
-                    <a:lnT w="6350" cap="flat" cmpd="sng" algn="ctr">
-                      <a:solidFill>
-                        <a:srgbClr val="CCCCCC"/>
-                      </a:solidFill>
-                      <a:prstDash val="solid"/>
-                      <a:round/>
-                      <a:headEnd type="none" w="med" len="med"/>
-                      <a:tailEnd type="none" w="med" len="med"/>
-                    </a:lnT>
-                    <a:lnB w="6350" cap="flat" cmpd="sng" algn="ctr">
-                      <a:solidFill>
-                        <a:srgbClr val="CCCCCC"/>
-                      </a:solidFill>
-                      <a:prstDash val="solid"/>
-                      <a:round/>
-                      <a:headEnd type="none" w="med" len="med"/>
-                      <a:tailEnd type="none" w="med" len="med"/>
-                    </a:lnB>
-                  </a:tcPr>
-                </a:tc>
-              </a:tr>
-              <a:tr h="326571">
-                <a:tc>
-                  <a:txBody>
-                    <a:bodyPr/>
-                    <a:lstStyle/>
-                    <a:p>
-                      <a:pPr algn="ctr" indent="0" marL="0">
-                        <a:buNone/>
-                      </a:pPr>
-                      <a:r>
-                        <a:rPr lang="en-US" sz="1100" dirty="0">
-                          <a:solidFill>
-                            <a:srgbClr val="000000"/>
-                          </a:solidFill>
-                        </a:rPr>
-                        <a:t>Compliance</a:t>
-                      </a:r>
-                      <a:endParaRPr lang="en-US" sz="1100" dirty="0"/>
-                    </a:p>
-                  </a:txBody>
-                  <a:tcPr marL="91440" marR="91440" marT="45720" marB="45720" anchor="ctr">
-                    <a:lnL w="6350" cap="flat" cmpd="sng" algn="ctr">
-                      <a:solidFill>
-                        <a:srgbClr val="CCCCCC"/>
-                      </a:solidFill>
-                      <a:prstDash val="solid"/>
-                      <a:round/>
-                      <a:headEnd type="none" w="med" len="med"/>
-                      <a:tailEnd type="none" w="med" len="med"/>
-                    </a:lnL>
-                    <a:lnR w="6350" cap="flat" cmpd="sng" algn="ctr">
-                      <a:solidFill>
-                        <a:srgbClr val="CCCCCC"/>
-                      </a:solidFill>
-                      <a:prstDash val="solid"/>
-                      <a:round/>
-                      <a:headEnd type="none" w="med" len="med"/>
-                      <a:tailEnd type="none" w="med" len="med"/>
-                    </a:lnR>
-                    <a:lnT w="6350" cap="flat" cmpd="sng" algn="ctr">
-                      <a:solidFill>
-                        <a:srgbClr val="CCCCCC"/>
-                      </a:solidFill>
-                      <a:prstDash val="solid"/>
-                      <a:round/>
-                      <a:headEnd type="none" w="med" len="med"/>
-                      <a:tailEnd type="none" w="med" len="med"/>
-                    </a:lnT>
-                    <a:lnB w="6350" cap="flat" cmpd="sng" algn="ctr">
-                      <a:solidFill>
-                        <a:srgbClr val="CCCCCC"/>
-                      </a:solidFill>
-                      <a:prstDash val="solid"/>
-                      <a:round/>
-                      <a:headEnd type="none" w="med" len="med"/>
-                      <a:tailEnd type="none" w="med" len="med"/>
-                    </a:lnB>
-                  </a:tcPr>
-                </a:tc>
-                <a:tc>
-                  <a:txBody>
-                    <a:bodyPr/>
-                    <a:lstStyle/>
-                    <a:p>
-                      <a:pPr algn="ctr" indent="0" marL="0">
-                        <a:buNone/>
-                      </a:pPr>
-                      <a:r>
-                        <a:rPr lang="en-US" sz="1100" dirty="0">
-                          <a:solidFill>
-                            <a:srgbClr val="000000"/>
-                          </a:solidFill>
-                        </a:rPr>
-                        <a:t>AICTE Ready</a:t>
-                      </a:r>
-                      <a:endParaRPr lang="en-US" sz="1100" dirty="0"/>
-                    </a:p>
-                  </a:txBody>
-                  <a:tcPr marL="91440" marR="91440" marT="45720" marB="45720" anchor="ctr">
-                    <a:lnL w="6350" cap="flat" cmpd="sng" algn="ctr">
-                      <a:solidFill>
-                        <a:srgbClr val="CCCCCC"/>
-                      </a:solidFill>
-                      <a:prstDash val="solid"/>
-                      <a:round/>
-                      <a:headEnd type="none" w="med" len="med"/>
-                      <a:tailEnd type="none" w="med" len="med"/>
-                    </a:lnL>
-                    <a:lnR w="6350" cap="flat" cmpd="sng" algn="ctr">
-                      <a:solidFill>
-                        <a:srgbClr val="CCCCCC"/>
-                      </a:solidFill>
-                      <a:prstDash val="solid"/>
-                      <a:round/>
-                      <a:headEnd type="none" w="med" len="med"/>
-                      <a:tailEnd type="none" w="med" len="med"/>
-                    </a:lnR>
-                    <a:lnT w="6350" cap="flat" cmpd="sng" algn="ctr">
-                      <a:solidFill>
-                        <a:srgbClr val="CCCCCC"/>
-                      </a:solidFill>
-                      <a:prstDash val="solid"/>
-                      <a:round/>
-                      <a:headEnd type="none" w="med" len="med"/>
-                      <a:tailEnd type="none" w="med" len="med"/>
-                    </a:lnT>
-                    <a:lnB w="6350" cap="flat" cmpd="sng" algn="ctr">
-                      <a:solidFill>
-                        <a:srgbClr val="CCCCCC"/>
-                      </a:solidFill>
-                      <a:prstDash val="solid"/>
-                      <a:round/>
-                      <a:headEnd type="none" w="med" len="med"/>
-                      <a:tailEnd type="none" w="med" len="med"/>
-                    </a:lnB>
-                  </a:tcPr>
-                </a:tc>
-              </a:tr>
-            </a:tbl>
-          </a:graphicData>
-        </a:graphic>
-      </p:graphicFrame>
     </p:spTree>
   </p:cSld>
   <p:clrMapOvr>
